--- a/docs/apresentacao/Sistema-de-Moeda-Estudantil.pptx
+++ b/docs/apresentacao/Sistema-de-Moeda-Estudantil.pptx
@@ -17,6 +17,10 @@
     <p:sldId id="265" r:id="rId17"/>
     <p:sldId id="266" r:id="rId18"/>
     <p:sldId id="267" r:id="rId19"/>
+    <p:sldId id="268" r:id="rId20"/>
+    <p:sldId id="269" r:id="rId21"/>
+    <p:sldId id="270" r:id="rId22"/>
+    <p:sldId id="271" r:id="rId23"/>
   </p:sldIdLst>
   <p:sldSz cx="12192000" cy="6858000" type="screen4x3"/>
   <p:notesSz cx="6858000" cy="9144000"/>
@@ -583,7 +587,7 @@
           <a:lstStyle/>
           <a:p>
             <a:r>
-              <a:t>Tempo: 2 a 3 min. Preparar previamente aluno, empresa e professor fictícios. Login do professor: professor.demo; consultar a senha no arquivo local, sem mostrá-la nos slides. A vantagem deve custar menos que o saldo disponível. Alternar as sessões ao demonstrar os perfis. Confirmar backend, frontend, PostgreSQL e Mailpit antes da apresentação. Os endereços são da máquina que executa a aplicação.</a:t>
+              <a:t>Tempo: 1 min 30 s. Abrir docs/modelagem/diagramas/classes.svg, componentes.svg e modelo-er.svg. Comparar Usuario, Aluno e Conta com as entidades do pacote cadastro. Mostrar o limite entre frontend e backend no diagrama de componentes. No ER, localizar conta e movimentacao, comparando com V3__moedas_vantagens_notificacoes.sql. As imagens e fontes PlantUML estão versionadas. O PDF da Sprint 1 é histórico; os modelos em docs/modelagem são os atuais.</a:t>
             </a:r>
           </a:p>
         </p:txBody>
@@ -653,7 +657,7 @@
           <a:lstStyle/>
           <a:p>
             <a:r>
-              <a:t>Tempo: 35 s. Não afirmar que a suíte completa passou: a documentação indica que a campanha completa ficou para a etapa posterior. Estas verificações são as registradas no projeto, não uma nova execução feita para criar os slides. O SMTP externo depende da configuração de um provedor.</a:t>
+              <a:t>Tempo: 1 min 30 s. Tutorial ao vivo: abrir frontend/src/CadastroForm.tsx e frontend/src/api.ts no editor. Mostrar a relação entre campo e dados enviados. No navegador autenticado, abrir as ferramentas de desenvolvedor e editar um campo. Inspecionar o PUT sem expor cookies ou credenciais. Explicar que TypeScript descreve os dados e React atualiza a interface a partir do estado.</a:t>
             </a:r>
           </a:p>
         </p:txBody>
@@ -723,6 +727,286 @@
           <a:lstStyle/>
           <a:p>
             <a:r>
+              <a:t>Tempo: 1 min 30 s. Abrir backend/src/main/java/br/pucminas/moedaestudantil/cadastro/CadastrosController.java e CadastrosService.java. Mostrar o método cadastrarAluno. Explicar injeção de dependência pelo construtor, DTO de entrada, validação e a delegação para service. A lógica fica no serviço para preservar as responsabilidades MVC.</a:t>
+            </a:r>
+          </a:p>
+        </p:txBody>
+      </p:sp>
+      <p:sp>
+        <p:nvSpPr>
+          <p:cNvPr id="4" name="Slide Number Placeholder 3"/>
+          <p:cNvSpPr>
+            <a:spLocks noGrp="1"/>
+          </p:cNvSpPr>
+          <p:nvPr>
+            <p:ph type="sldNum" idx="5" sz="quarter"/>
+          </p:nvPr>
+        </p:nvSpPr>
+        <p:spPr/>
+      </p:sp>
+    </p:spTree>
+  </p:cSld>
+  <p:clrMapOvr>
+    <a:masterClrMapping/>
+  </p:clrMapOvr>
+</p:notes>
+</file>
+
+<file path=ppt/notesSlides/notesSlide13.xml><?xml version="1.0" encoding="utf-8"?>
+<p:notes xmlns:a="http://schemas.openxmlformats.org/drawingml/2006/main" xmlns:p="http://schemas.openxmlformats.org/presentationml/2006/main" xmlns:r="http://schemas.openxmlformats.org/officeDocument/2006/relationships">
+  <p:cSld>
+    <p:spTree>
+      <p:nvGrpSpPr>
+        <p:cNvPr id="1" name=""/>
+        <p:cNvGrpSpPr/>
+        <p:nvPr/>
+      </p:nvGrpSpPr>
+      <p:grpSpPr>
+        <a:xfrm>
+          <a:off x="0" y="0"/>
+          <a:ext cx="0" cy="0"/>
+          <a:chOff x="0" y="0"/>
+          <a:chExt cx="0" cy="0"/>
+        </a:xfrm>
+      </p:grpSpPr>
+      <p:sp>
+        <p:nvSpPr>
+          <p:cNvPr id="2" name="Slide Image Placeholder 1"/>
+          <p:cNvSpPr>
+            <a:spLocks noGrp="1"/>
+          </p:cNvSpPr>
+          <p:nvPr>
+            <p:ph type="sldImg" idx="2"/>
+          </p:nvPr>
+        </p:nvSpPr>
+        <p:spPr/>
+      </p:sp>
+      <p:sp>
+        <p:nvSpPr>
+          <p:cNvPr id="3" name="Notes Placeholder 2"/>
+          <p:cNvSpPr>
+            <a:spLocks noGrp="1"/>
+          </p:cNvSpPr>
+          <p:nvPr>
+            <p:ph type="body" idx="3" sz="quarter"/>
+          </p:nvPr>
+        </p:nvSpPr>
+        <p:spPr/>
+        <p:txBody>
+          <a:bodyPr/>
+          <a:lstStyle/>
+          <a:p>
+            <a:r>
+              <a:t>Tempo: 1 min 30 s. Abrir as três fontes indicadas. Mostrar que JpaRepository&lt;Aluno, UUID&gt; oferece persistência sem implementar manualmente cada consulta SQL. Mostrar uma FK na migração. Flyway aplica versões em sequência e Hibernate valida o mapeamento; alterações futuras usam novas migrações. PostgreSQL é o banco da aplicação atual.</a:t>
+            </a:r>
+          </a:p>
+        </p:txBody>
+      </p:sp>
+      <p:sp>
+        <p:nvSpPr>
+          <p:cNvPr id="4" name="Slide Number Placeholder 3"/>
+          <p:cNvSpPr>
+            <a:spLocks noGrp="1"/>
+          </p:cNvSpPr>
+          <p:nvPr>
+            <p:ph type="sldNum" idx="5" sz="quarter"/>
+          </p:nvPr>
+        </p:nvSpPr>
+        <p:spPr/>
+      </p:sp>
+    </p:spTree>
+  </p:cSld>
+  <p:clrMapOvr>
+    <a:masterClrMapping/>
+  </p:clrMapOvr>
+</p:notes>
+</file>
+
+<file path=ppt/notesSlides/notesSlide14.xml><?xml version="1.0" encoding="utf-8"?>
+<p:notes xmlns:a="http://schemas.openxmlformats.org/drawingml/2006/main" xmlns:p="http://schemas.openxmlformats.org/presentationml/2006/main" xmlns:r="http://schemas.openxmlformats.org/officeDocument/2006/relationships">
+  <p:cSld>
+    <p:spTree>
+      <p:nvGrpSpPr>
+        <p:cNvPr id="1" name=""/>
+        <p:cNvGrpSpPr/>
+        <p:nvPr/>
+      </p:nvGrpSpPr>
+      <p:grpSpPr>
+        <a:xfrm>
+          <a:off x="0" y="0"/>
+          <a:ext cx="0" cy="0"/>
+          <a:chOff x="0" y="0"/>
+          <a:chExt cx="0" cy="0"/>
+        </a:xfrm>
+      </p:grpSpPr>
+      <p:sp>
+        <p:nvSpPr>
+          <p:cNvPr id="2" name="Slide Image Placeholder 1"/>
+          <p:cNvSpPr>
+            <a:spLocks noGrp="1"/>
+          </p:cNvSpPr>
+          <p:nvPr>
+            <p:ph type="sldImg" idx="2"/>
+          </p:nvPr>
+        </p:nvSpPr>
+        <p:spPr/>
+      </p:sp>
+      <p:sp>
+        <p:nvSpPr>
+          <p:cNvPr id="3" name="Notes Placeholder 2"/>
+          <p:cNvSpPr>
+            <a:spLocks noGrp="1"/>
+          </p:cNvSpPr>
+          <p:nvPr>
+            <p:ph type="body" idx="3" sz="quarter"/>
+          </p:nvPr>
+        </p:nvSpPr>
+        <p:spPr/>
+        <p:txBody>
+          <a:bodyPr/>
+          <a:lstStyle/>
+          <a:p>
+            <a:r>
+              <a:t>Tempo: 1 min 30 s. Abrir compose.yaml e executar o comando exibido, com Docker já iniciado. Explicar container e mapeamento de portas. Mostrar apenas as variáveis SMTP sem credenciais. A aplicação roda fora dos containers nesta configuração. Mailpit recebe SMTP em 1025 e exibe mensagens em 8025. A entrega externa depende de um provedor SMTP; o teste local é feito no Mailpit.</a:t>
+            </a:r>
+          </a:p>
+        </p:txBody>
+      </p:sp>
+      <p:sp>
+        <p:nvSpPr>
+          <p:cNvPr id="4" name="Slide Number Placeholder 3"/>
+          <p:cNvSpPr>
+            <a:spLocks noGrp="1"/>
+          </p:cNvSpPr>
+          <p:nvPr>
+            <p:ph type="sldNum" idx="5" sz="quarter"/>
+          </p:nvPr>
+        </p:nvSpPr>
+        <p:spPr/>
+      </p:sp>
+    </p:spTree>
+  </p:cSld>
+  <p:clrMapOvr>
+    <a:masterClrMapping/>
+  </p:clrMapOvr>
+</p:notes>
+</file>
+
+<file path=ppt/notesSlides/notesSlide15.xml><?xml version="1.0" encoding="utf-8"?>
+<p:notes xmlns:a="http://schemas.openxmlformats.org/drawingml/2006/main" xmlns:p="http://schemas.openxmlformats.org/presentationml/2006/main" xmlns:r="http://schemas.openxmlformats.org/officeDocument/2006/relationships">
+  <p:cSld>
+    <p:spTree>
+      <p:nvGrpSpPr>
+        <p:cNvPr id="1" name=""/>
+        <p:cNvGrpSpPr/>
+        <p:nvPr/>
+      </p:nvGrpSpPr>
+      <p:grpSpPr>
+        <a:xfrm>
+          <a:off x="0" y="0"/>
+          <a:ext cx="0" cy="0"/>
+          <a:chOff x="0" y="0"/>
+          <a:chExt cx="0" cy="0"/>
+        </a:xfrm>
+      </p:grpSpPr>
+      <p:sp>
+        <p:nvSpPr>
+          <p:cNvPr id="2" name="Slide Image Placeholder 1"/>
+          <p:cNvSpPr>
+            <a:spLocks noGrp="1"/>
+          </p:cNvSpPr>
+          <p:nvPr>
+            <p:ph type="sldImg" idx="2"/>
+          </p:nvPr>
+        </p:nvSpPr>
+        <p:spPr/>
+      </p:sp>
+      <p:sp>
+        <p:nvSpPr>
+          <p:cNvPr id="3" name="Notes Placeholder 2"/>
+          <p:cNvSpPr>
+            <a:spLocks noGrp="1"/>
+          </p:cNvSpPr>
+          <p:nvPr>
+            <p:ph type="body" idx="3" sz="quarter"/>
+          </p:nvPr>
+        </p:nvSpPr>
+        <p:spPr/>
+        <p:txBody>
+          <a:bodyPr/>
+          <a:lstStyle/>
+          <a:p>
+            <a:r>
+              <a:t>Tempo: 5 min. Demonstrar também inativação com cadastros descartáveis de aluno e empresa. Preparar previamente aluno, empresa e professor fictícios. Login do professor: professor.demo; consultar a senha no arquivo local, sem mostrá-la nos slides. A vantagem deve custar menos que o saldo disponível. Alternar as sessões ao demonstrar os perfis. Confirmar backend, frontend, PostgreSQL e Mailpit antes da apresentação. Os endereços são da máquina que executa a aplicação.</a:t>
+            </a:r>
+          </a:p>
+        </p:txBody>
+      </p:sp>
+      <p:sp>
+        <p:nvSpPr>
+          <p:cNvPr id="4" name="Slide Number Placeholder 3"/>
+          <p:cNvSpPr>
+            <a:spLocks noGrp="1"/>
+          </p:cNvSpPr>
+          <p:nvPr>
+            <p:ph type="sldNum" idx="5" sz="quarter"/>
+          </p:nvPr>
+        </p:nvSpPr>
+        <p:spPr/>
+      </p:sp>
+    </p:spTree>
+  </p:cSld>
+  <p:clrMapOvr>
+    <a:masterClrMapping/>
+  </p:clrMapOvr>
+</p:notes>
+</file>
+
+<file path=ppt/notesSlides/notesSlide16.xml><?xml version="1.0" encoding="utf-8"?>
+<p:notes xmlns:a="http://schemas.openxmlformats.org/drawingml/2006/main" xmlns:p="http://schemas.openxmlformats.org/presentationml/2006/main" xmlns:r="http://schemas.openxmlformats.org/officeDocument/2006/relationships">
+  <p:cSld>
+    <p:spTree>
+      <p:nvGrpSpPr>
+        <p:cNvPr id="1" name=""/>
+        <p:cNvGrpSpPr/>
+        <p:nvPr/>
+      </p:nvGrpSpPr>
+      <p:grpSpPr>
+        <a:xfrm>
+          <a:off x="0" y="0"/>
+          <a:ext cx="0" cy="0"/>
+          <a:chOff x="0" y="0"/>
+          <a:chExt cx="0" cy="0"/>
+        </a:xfrm>
+      </p:grpSpPr>
+      <p:sp>
+        <p:nvSpPr>
+          <p:cNvPr id="2" name="Slide Image Placeholder 1"/>
+          <p:cNvSpPr>
+            <a:spLocks noGrp="1"/>
+          </p:cNvSpPr>
+          <p:nvPr>
+            <p:ph type="sldImg" idx="2"/>
+          </p:nvPr>
+        </p:nvSpPr>
+        <p:spPr/>
+      </p:sp>
+      <p:sp>
+        <p:nvSpPr>
+          <p:cNvPr id="3" name="Notes Placeholder 2"/>
+          <p:cNvSpPr>
+            <a:spLocks noGrp="1"/>
+          </p:cNvSpPr>
+          <p:nvPr>
+            <p:ph type="body" idx="3" sz="quarter"/>
+          </p:nvPr>
+        </p:nvSpPr>
+        <p:spPr/>
+        <p:txBody>
+          <a:bodyPr/>
+          <a:lstStyle/>
+          <a:p>
+            <a:r>
               <a:t>Tempo: 20 s. Retomar o objetivo do sistema e abrir para perguntas. Referências internas: README.md; docs/modelagem/persistencia.md; docs/modelagem/requisitos.md; código em backend/ e frontend/.</a:t>
             </a:r>
           </a:p>
@@ -863,7 +1147,7 @@
           <a:lstStyle/>
           <a:p>
             <a:r>
-              <a:t>Tempo: 40 s. Apresentar a implementação atual em backend/ e frontend/. A versão inicial da Sprint 2 em SQLite foi preservada como entrega histórica; esta apresentação trata da aplicação integrada atual.</a:t>
+              <a:t>Tempo: 50 s. Os valores 100 e 60 são exemplos, não dados reais. O aluno começa com zero; a empresa não possui carteira. O saldo não pode ficar negativo. O professor consulta alunos ativos da mesma instituição, decisão D09 do grupo.</a:t>
             </a:r>
           </a:p>
         </p:txBody>
@@ -933,7 +1217,7 @@
           <a:lstStyle/>
           <a:p>
             <a:r>
-              <a:t>Tempo: 50 s. Os valores 100 e 60 são exemplos, não dados reais. O aluno começa com zero; a empresa não possui carteira. O saldo não pode ficar negativo. O professor consulta alunos ativos da mesma instituição, decisão D09 do grupo.</a:t>
+              <a:t>Tempo: 1 min. Explicar MVC e a separação em camadas. Controllers recebem DTOs; services verificam autorização e regras dentro de transações; repositories acessam PostgreSQL por Spring Data JPA. Hibernate valida o esquema criado pelo Flyway.</a:t>
             </a:r>
           </a:p>
         </p:txBody>
@@ -1003,7 +1287,7 @@
           <a:lstStyle/>
           <a:p>
             <a:r>
-              <a:t>Tempo: 50 s. Explicar MVC e a separação em camadas. Controllers recebem DTOs; services verificam autorização e regras dentro de transações; repositories acessam PostgreSQL por Spring Data JPA. Hibernate valida o esquema criado pelo Flyway.</a:t>
+              <a:t>Tempo: 50 s. Referência: docs/modelagem/persistencia.md e diagramas/modelo-er.png. Aluno, professor e empresa associam o UUID de Usuario como PK e FK, sem herança JPA. O cupom fica na movimentação de resgate. A descrição e o custo resgatados são preservados no histórico.</a:t>
             </a:r>
           </a:p>
         </p:txBody>
@@ -1073,7 +1357,7 @@
           <a:lstStyle/>
           <a:p>
             <a:r>
-              <a:t>Tempo: 50 s. Referência: docs/modelagem/persistencia.md e diagramas/modelo-er.png. Aluno, professor e empresa associam o UUID de Usuario como PK e FK, sem herança JPA. O cupom fica na movimentação de resgate. A descrição e o custo resgatados são preservados no histórico.</a:t>
+              <a:t>Tempo: 45 s. A unicidade de solicitante e requisicaoId protege o comando. Repetir o mesmo comando retorna o registro original; reutilizar o identificador com outro comando gera conflito. Crédito semestral também tem proteção contra duplicidade. Falhas causam rollback da operação.</a:t>
             </a:r>
           </a:p>
         </p:txBody>
@@ -1143,7 +1427,7 @@
           <a:lstStyle/>
           <a:p>
             <a:r>
-              <a:t>Tempo: 45 s. A unicidade de solicitante e requisicaoId protege o comando. Repetir o mesmo comando retorna o registro original; reutilizar o identificador com outro comando gera conflito. Crédito semestral também tem proteção contra duplicidade. Falhas causam rollback da operação.</a:t>
+              <a:t>Tempo: 40 s. Explicar que esconder botões não basta: os serviços validam o titular e o perfil. Cadastro e login são públicos; demais operações exigem sessão. Professores são importados por arquivo institucional privado.</a:t>
             </a:r>
           </a:p>
         </p:txBody>
@@ -1213,7 +1497,7 @@
           <a:lstStyle/>
           <a:p>
             <a:r>
-              <a:t>Tempo: 40 s. Explicar que esconder botões não basta: os serviços validam o titular e o perfil. Cadastro e login são públicos; demais operações exigem sessão. Professores são importados por arquivo institucional privado.</a:t>
+              <a:t>Tempo: 45 s. O envio SMTP ocorre após a confirmação da operação. Se falhar, apenas a notificação é repetida, sem novo débito. Mailpit captura emails locais; um provedor SMTP no .env permite entrega externa. A conferência do cupom é presencial, sem baixa digital nesta versão.</a:t>
             </a:r>
           </a:p>
         </p:txBody>
@@ -1283,7 +1567,7 @@
           <a:lstStyle/>
           <a:p>
             <a:r>
-              <a:t>Tempo: 45 s. O envio SMTP ocorre após a confirmação da operação. Se falhar, apenas a notificação é repetida, sem novo débito. Mailpit captura emails locais; um provedor SMTP no .env permite entrega externa. A conferência do cupom é presencial, sem baixa digital nesta versão.</a:t>
+              <a:t>Tempo: 1 min. Mostrar os endpoints em CadastrosController.java. Alunos usam /api/alunos e empresas /api/empresas. IDs aparecem nas operações individuais. Na demonstração, criar, consultar e editar nos dois perfis. Usar cadastros descartáveis para demonstrar inativação sem interromper o fluxo principal.</a:t>
             </a:r>
           </a:p>
         </p:txBody>
@@ -4933,7 +5217,7 @@
               </a:defRPr>
             </a:pPr>
             <a:r>
-              <a:t>DEMONSTRAÇÃO AO VIVO</a:t>
+              <a:t>MODELAGEM E CÓDIGO</a:t>
             </a:r>
           </a:p>
         </p:txBody>
@@ -4975,7 +5259,7 @@
               </a:defRPr>
             </a:pPr>
             <a:r>
-              <a:t>Percorrer o ciclo na aplicação</a:t>
+              <a:t>O modelo orienta a implementação</a:t>
             </a:r>
           </a:p>
         </p:txBody>
@@ -5017,7 +5301,7 @@
               </a:defRPr>
             </a:pPr>
             <a:r>
-              <a:t>Aplicação: localhost:5173  ·  Emails: localhost:8025</a:t>
+              <a:t>Correspondências que podem ser conferidas no repositório.</a:t>
             </a:r>
           </a:p>
         </p:txBody>
@@ -5151,14 +5435,57 @@
       </p:sp>
       <p:sp>
         <p:nvSpPr>
-          <p:cNvPr id="10" name="TextBox 9"/>
+          <p:cNvPr id="10" name="Rectangle 9"/>
+          <p:cNvSpPr/>
+          <p:nvPr/>
+        </p:nvSpPr>
+        <p:spPr>
+          <a:xfrm>
+            <a:off x="508000" y="2438400"/>
+            <a:ext cx="3589866" cy="3175000"/>
+          </a:xfrm>
+          <a:prstGeom prst="rect">
+            <a:avLst/>
+          </a:prstGeom>
+          <a:solidFill>
+            <a:srgbClr val="1B2D42"/>
+          </a:solidFill>
+          <a:ln>
+            <a:noFill/>
+          </a:ln>
+        </p:spPr>
+        <p:style>
+          <a:lnRef idx="1">
+            <a:schemeClr val="accent1"/>
+          </a:lnRef>
+          <a:fillRef idx="3">
+            <a:schemeClr val="accent1"/>
+          </a:fillRef>
+          <a:effectRef idx="2">
+            <a:schemeClr val="accent1"/>
+          </a:effectRef>
+          <a:fontRef idx="minor">
+            <a:schemeClr val="lt1"/>
+          </a:fontRef>
+        </p:style>
+        <p:txBody>
+          <a:bodyPr rtlCol="0" anchor="ctr"/>
+          <a:lstStyle/>
+          <a:p>
+            <a:pPr algn="ctr"/>
+          </a:p>
+        </p:txBody>
+      </p:sp>
+      <p:sp>
+        <p:nvSpPr>
+          <p:cNvPr id="11" name="TextBox 10"/>
           <p:cNvSpPr txBox="1"/>
           <p:nvPr/>
         </p:nvSpPr>
         <p:spPr>
           <a:xfrm>
-            <a:off x="508000" y="2298700"/>
-            <a:ext cx="698500" cy="520954"/>
+            <a:off x="762000" y="2667000"/>
+            <a:ext cx="3081866" cy="456438"/>
           </a:xfrm>
           <a:prstGeom prst="rect">
             <a:avLst/>
@@ -5178,7 +5505,7 @@
               <a:spcAft>
                 <a:spcPts val="0"/>
               </a:spcAft>
-              <a:defRPr sz="2600" b="1">
+              <a:defRPr sz="2200" b="1">
                 <a:solidFill>
                   <a:srgbClr val="56D9B0"/>
                 </a:solidFill>
@@ -5186,21 +5513,21 @@
               </a:defRPr>
             </a:pPr>
             <a:r>
-              <a:t>01</a:t>
-            </a:r>
-          </a:p>
-        </p:txBody>
-      </p:sp>
-      <p:sp>
-        <p:nvSpPr>
-          <p:cNvPr id="11" name="TextBox 10"/>
+              <a:t>Classes do domínio</a:t>
+            </a:r>
+          </a:p>
+        </p:txBody>
+      </p:sp>
+      <p:sp>
+        <p:nvSpPr>
+          <p:cNvPr id="12" name="TextBox 11"/>
           <p:cNvSpPr txBox="1"/>
           <p:nvPr/>
         </p:nvSpPr>
         <p:spPr>
           <a:xfrm>
-            <a:off x="1333500" y="2298700"/>
-            <a:ext cx="3111500" cy="440309"/>
+            <a:off x="762000" y="3327400"/>
+            <a:ext cx="3081866" cy="1327404"/>
           </a:xfrm>
           <a:prstGeom prst="rect">
             <a:avLst/>
@@ -5220,7 +5547,7 @@
               <a:spcAft>
                 <a:spcPts val="0"/>
               </a:spcAft>
-              <a:defRPr sz="2100" b="1">
+              <a:defRPr sz="1900" b="0">
                 <a:solidFill>
                   <a:srgbClr val="F4F7FA"/>
                 </a:solidFill>
@@ -5228,21 +5555,121 @@
               </a:defRPr>
             </a:pPr>
             <a:r>
-              <a:t>Aluno e empresa</a:t>
-            </a:r>
-          </a:p>
-        </p:txBody>
-      </p:sp>
-      <p:sp>
-        <p:nvSpPr>
-          <p:cNvPr id="12" name="TextBox 11"/>
+              <a:t>Usuario, Aluno e Conta</a:t>
+            </a:r>
+          </a:p>
+          <a:p>
+            <a:pPr>
+              <a:lnSpc>
+                <a:spcPct val="115000"/>
+              </a:lnSpc>
+              <a:spcAft>
+                <a:spcPts val="0"/>
+              </a:spcAft>
+              <a:defRPr sz="1900" b="0">
+                <a:solidFill>
+                  <a:srgbClr val="F4F7FA"/>
+                </a:solidFill>
+                <a:latin typeface="Arial"/>
+              </a:defRPr>
+            </a:pPr>
+            <a:r>
+              <a:t>aparecem no modelo e nas</a:t>
+            </a:r>
+          </a:p>
+          <a:p>
+            <a:pPr>
+              <a:lnSpc>
+                <a:spcPct val="115000"/>
+              </a:lnSpc>
+              <a:spcAft>
+                <a:spcPts val="0"/>
+              </a:spcAft>
+              <a:defRPr sz="1900" b="0">
+                <a:solidFill>
+                  <a:srgbClr val="F4F7FA"/>
+                </a:solidFill>
+                <a:latin typeface="Arial"/>
+              </a:defRPr>
+            </a:pPr>
+            <a:r>
+              <a:t>entidades do pacote</a:t>
+            </a:r>
+          </a:p>
+          <a:p>
+            <a:pPr>
+              <a:lnSpc>
+                <a:spcPct val="115000"/>
+              </a:lnSpc>
+              <a:spcAft>
+                <a:spcPts val="0"/>
+              </a:spcAft>
+              <a:defRPr sz="1900" b="0">
+                <a:solidFill>
+                  <a:srgbClr val="F4F7FA"/>
+                </a:solidFill>
+                <a:latin typeface="Arial"/>
+              </a:defRPr>
+            </a:pPr>
+            <a:r>
+              <a:t>cadastro.</a:t>
+            </a:r>
+          </a:p>
+        </p:txBody>
+      </p:sp>
+      <p:sp>
+        <p:nvSpPr>
+          <p:cNvPr id="13" name="Rectangle 12"/>
+          <p:cNvSpPr/>
+          <p:nvPr/>
+        </p:nvSpPr>
+        <p:spPr>
+          <a:xfrm>
+            <a:off x="4301066" y="2438400"/>
+            <a:ext cx="3589866" cy="3175000"/>
+          </a:xfrm>
+          <a:prstGeom prst="rect">
+            <a:avLst/>
+          </a:prstGeom>
+          <a:solidFill>
+            <a:srgbClr val="1B2D42"/>
+          </a:solidFill>
+          <a:ln>
+            <a:noFill/>
+          </a:ln>
+        </p:spPr>
+        <p:style>
+          <a:lnRef idx="1">
+            <a:schemeClr val="accent1"/>
+          </a:lnRef>
+          <a:fillRef idx="3">
+            <a:schemeClr val="accent1"/>
+          </a:fillRef>
+          <a:effectRef idx="2">
+            <a:schemeClr val="accent1"/>
+          </a:effectRef>
+          <a:fontRef idx="minor">
+            <a:schemeClr val="lt1"/>
+          </a:fontRef>
+        </p:style>
+        <p:txBody>
+          <a:bodyPr rtlCol="0" anchor="ctr"/>
+          <a:lstStyle/>
+          <a:p>
+            <a:pPr algn="ctr"/>
+          </a:p>
+        </p:txBody>
+      </p:sp>
+      <p:sp>
+        <p:nvSpPr>
+          <p:cNvPr id="14" name="TextBox 13"/>
           <p:cNvSpPr txBox="1"/>
           <p:nvPr/>
         </p:nvSpPr>
         <p:spPr>
           <a:xfrm>
-            <a:off x="4572000" y="2298700"/>
-            <a:ext cx="6985000" cy="408050"/>
+            <a:off x="4555066" y="2667000"/>
+            <a:ext cx="3081866" cy="456438"/>
           </a:xfrm>
           <a:prstGeom prst="rect">
             <a:avLst/>
@@ -5262,29 +5689,29 @@
               <a:spcAft>
                 <a:spcPts val="0"/>
               </a:spcAft>
-              <a:defRPr sz="1900" b="0">
-                <a:solidFill>
-                  <a:srgbClr val="B6C7D9"/>
-                </a:solidFill>
-                <a:latin typeface="Arial"/>
-              </a:defRPr>
-            </a:pPr>
-            <a:r>
-              <a:t>Mostrar cadastros e publicar uma vantagem com foto.</a:t>
-            </a:r>
-          </a:p>
-        </p:txBody>
-      </p:sp>
-      <p:sp>
-        <p:nvSpPr>
-          <p:cNvPr id="13" name="TextBox 12"/>
+              <a:defRPr sz="2200" b="1">
+                <a:solidFill>
+                  <a:srgbClr val="56D9B0"/>
+                </a:solidFill>
+                <a:latin typeface="Arial"/>
+              </a:defRPr>
+            </a:pPr>
+            <a:r>
+              <a:t>Componentes MVC</a:t>
+            </a:r>
+          </a:p>
+        </p:txBody>
+      </p:sp>
+      <p:sp>
+        <p:nvSpPr>
+          <p:cNvPr id="15" name="TextBox 14"/>
           <p:cNvSpPr txBox="1"/>
           <p:nvPr/>
         </p:nvSpPr>
         <p:spPr>
           <a:xfrm>
-            <a:off x="508000" y="3213100"/>
-            <a:ext cx="698500" cy="520954"/>
+            <a:off x="4555066" y="3327400"/>
+            <a:ext cx="3081866" cy="1327404"/>
           </a:xfrm>
           <a:prstGeom prst="rect">
             <a:avLst/>
@@ -5304,29 +5731,129 @@
               <a:spcAft>
                 <a:spcPts val="0"/>
               </a:spcAft>
-              <a:defRPr sz="2600" b="1">
-                <a:solidFill>
-                  <a:srgbClr val="56D9B0"/>
-                </a:solidFill>
-                <a:latin typeface="Arial"/>
-              </a:defRPr>
-            </a:pPr>
-            <a:r>
-              <a:t>02</a:t>
-            </a:r>
-          </a:p>
-        </p:txBody>
-      </p:sp>
-      <p:sp>
-        <p:nvSpPr>
-          <p:cNvPr id="14" name="TextBox 13"/>
+              <a:defRPr sz="1900" b="0">
+                <a:solidFill>
+                  <a:srgbClr val="F4F7FA"/>
+                </a:solidFill>
+                <a:latin typeface="Arial"/>
+              </a:defRPr>
+            </a:pPr>
+            <a:r>
+              <a:t>React → controllers →</a:t>
+            </a:r>
+          </a:p>
+          <a:p>
+            <a:pPr>
+              <a:lnSpc>
+                <a:spcPct val="115000"/>
+              </a:lnSpc>
+              <a:spcAft>
+                <a:spcPts val="0"/>
+              </a:spcAft>
+              <a:defRPr sz="1900" b="0">
+                <a:solidFill>
+                  <a:srgbClr val="F4F7FA"/>
+                </a:solidFill>
+                <a:latin typeface="Arial"/>
+              </a:defRPr>
+            </a:pPr>
+            <a:r>
+              <a:t>services → repositories.</a:t>
+            </a:r>
+          </a:p>
+          <a:p>
+            <a:pPr>
+              <a:lnSpc>
+                <a:spcPct val="115000"/>
+              </a:lnSpc>
+              <a:spcAft>
+                <a:spcPts val="0"/>
+              </a:spcAft>
+              <a:defRPr sz="1900" b="0">
+                <a:solidFill>
+                  <a:srgbClr val="F4F7FA"/>
+                </a:solidFill>
+                <a:latin typeface="Arial"/>
+              </a:defRPr>
+            </a:pPr>
+            <a:r>
+              <a:t>A separação aparece no</a:t>
+            </a:r>
+          </a:p>
+          <a:p>
+            <a:pPr>
+              <a:lnSpc>
+                <a:spcPct val="115000"/>
+              </a:lnSpc>
+              <a:spcAft>
+                <a:spcPts val="0"/>
+              </a:spcAft>
+              <a:defRPr sz="1900" b="0">
+                <a:solidFill>
+                  <a:srgbClr val="F4F7FA"/>
+                </a:solidFill>
+                <a:latin typeface="Arial"/>
+              </a:defRPr>
+            </a:pPr>
+            <a:r>
+              <a:t>código.</a:t>
+            </a:r>
+          </a:p>
+        </p:txBody>
+      </p:sp>
+      <p:sp>
+        <p:nvSpPr>
+          <p:cNvPr id="16" name="Rectangle 15"/>
+          <p:cNvSpPr/>
+          <p:nvPr/>
+        </p:nvSpPr>
+        <p:spPr>
+          <a:xfrm>
+            <a:off x="8094133" y="2438400"/>
+            <a:ext cx="3589866" cy="3175000"/>
+          </a:xfrm>
+          <a:prstGeom prst="rect">
+            <a:avLst/>
+          </a:prstGeom>
+          <a:solidFill>
+            <a:srgbClr val="1B2D42"/>
+          </a:solidFill>
+          <a:ln>
+            <a:noFill/>
+          </a:ln>
+        </p:spPr>
+        <p:style>
+          <a:lnRef idx="1">
+            <a:schemeClr val="accent1"/>
+          </a:lnRef>
+          <a:fillRef idx="3">
+            <a:schemeClr val="accent1"/>
+          </a:fillRef>
+          <a:effectRef idx="2">
+            <a:schemeClr val="accent1"/>
+          </a:effectRef>
+          <a:fontRef idx="minor">
+            <a:schemeClr val="lt1"/>
+          </a:fontRef>
+        </p:style>
+        <p:txBody>
+          <a:bodyPr rtlCol="0" anchor="ctr"/>
+          <a:lstStyle/>
+          <a:p>
+            <a:pPr algn="ctr"/>
+          </a:p>
+        </p:txBody>
+      </p:sp>
+      <p:sp>
+        <p:nvSpPr>
+          <p:cNvPr id="17" name="TextBox 16"/>
           <p:cNvSpPr txBox="1"/>
           <p:nvPr/>
         </p:nvSpPr>
         <p:spPr>
           <a:xfrm>
-            <a:off x="1333500" y="3213100"/>
-            <a:ext cx="3111500" cy="440309"/>
+            <a:off x="8348133" y="2667000"/>
+            <a:ext cx="3081866" cy="456438"/>
           </a:xfrm>
           <a:prstGeom prst="rect">
             <a:avLst/>
@@ -5346,29 +5873,29 @@
               <a:spcAft>
                 <a:spcPts val="0"/>
               </a:spcAft>
-              <a:defRPr sz="2100" b="1">
-                <a:solidFill>
-                  <a:srgbClr val="F4F7FA"/>
-                </a:solidFill>
-                <a:latin typeface="Arial"/>
-              </a:defRPr>
-            </a:pPr>
-            <a:r>
-              <a:t>Professor</a:t>
-            </a:r>
-          </a:p>
-        </p:txBody>
-      </p:sp>
-      <p:sp>
-        <p:nvSpPr>
-          <p:cNvPr id="15" name="TextBox 14"/>
+              <a:defRPr sz="2200" b="1">
+                <a:solidFill>
+                  <a:srgbClr val="56D9B0"/>
+                </a:solidFill>
+                <a:latin typeface="Arial"/>
+              </a:defRPr>
+            </a:pPr>
+            <a:r>
+              <a:t>Modelo ER</a:t>
+            </a:r>
+          </a:p>
+        </p:txBody>
+      </p:sp>
+      <p:sp>
+        <p:nvSpPr>
+          <p:cNvPr id="18" name="TextBox 17"/>
           <p:cNvSpPr txBox="1"/>
           <p:nvPr/>
         </p:nvSpPr>
         <p:spPr>
           <a:xfrm>
-            <a:off x="4572000" y="3213100"/>
-            <a:ext cx="6985000" cy="408050"/>
+            <a:off x="8348133" y="3327400"/>
+            <a:ext cx="3081866" cy="1020953"/>
           </a:xfrm>
           <a:prstGeom prst="rect">
             <a:avLst/>
@@ -5390,122 +5917,15 @@
               </a:spcAft>
               <a:defRPr sz="1900" b="0">
                 <a:solidFill>
-                  <a:srgbClr val="B6C7D9"/>
-                </a:solidFill>
-                <a:latin typeface="Arial"/>
-              </a:defRPr>
-            </a:pPr>
-            <a:r>
-              <a:t>Entrar, escolher aluno e enviar moedas com um motivo.</a:t>
-            </a:r>
-          </a:p>
-        </p:txBody>
-      </p:sp>
-      <p:sp>
-        <p:nvSpPr>
-          <p:cNvPr id="16" name="TextBox 15"/>
-          <p:cNvSpPr txBox="1"/>
-          <p:nvPr/>
-        </p:nvSpPr>
-        <p:spPr>
-          <a:xfrm>
-            <a:off x="508000" y="4127500"/>
-            <a:ext cx="698500" cy="520954"/>
-          </a:xfrm>
-          <a:prstGeom prst="rect">
-            <a:avLst/>
-          </a:prstGeom>
-          <a:noFill/>
-        </p:spPr>
-        <p:txBody>
-          <a:bodyPr wrap="none" lIns="0" rIns="0" tIns="0" bIns="0">
-            <a:spAutoFit/>
-          </a:bodyPr>
-          <a:lstStyle/>
-          <a:p>
-            <a:pPr>
-              <a:lnSpc>
-                <a:spcPct val="115000"/>
-              </a:lnSpc>
-              <a:spcAft>
-                <a:spcPts val="0"/>
-              </a:spcAft>
-              <a:defRPr sz="2600" b="1">
-                <a:solidFill>
-                  <a:srgbClr val="56D9B0"/>
-                </a:solidFill>
-                <a:latin typeface="Arial"/>
-              </a:defRPr>
-            </a:pPr>
-            <a:r>
-              <a:t>03</a:t>
-            </a:r>
-          </a:p>
-        </p:txBody>
-      </p:sp>
-      <p:sp>
-        <p:nvSpPr>
-          <p:cNvPr id="17" name="TextBox 16"/>
-          <p:cNvSpPr txBox="1"/>
-          <p:nvPr/>
-        </p:nvSpPr>
-        <p:spPr>
-          <a:xfrm>
-            <a:off x="1333500" y="4127500"/>
-            <a:ext cx="3111500" cy="440309"/>
-          </a:xfrm>
-          <a:prstGeom prst="rect">
-            <a:avLst/>
-          </a:prstGeom>
-          <a:noFill/>
-        </p:spPr>
-        <p:txBody>
-          <a:bodyPr wrap="none" lIns="0" rIns="0" tIns="0" bIns="0">
-            <a:spAutoFit/>
-          </a:bodyPr>
-          <a:lstStyle/>
-          <a:p>
-            <a:pPr>
-              <a:lnSpc>
-                <a:spcPct val="115000"/>
-              </a:lnSpc>
-              <a:spcAft>
-                <a:spcPts val="0"/>
-              </a:spcAft>
-              <a:defRPr sz="2100" b="1">
-                <a:solidFill>
                   <a:srgbClr val="F4F7FA"/>
                 </a:solidFill>
                 <a:latin typeface="Arial"/>
               </a:defRPr>
             </a:pPr>
             <a:r>
-              <a:t>Aluno</a:t>
-            </a:r>
-          </a:p>
-        </p:txBody>
-      </p:sp>
-      <p:sp>
-        <p:nvSpPr>
-          <p:cNvPr id="18" name="TextBox 17"/>
-          <p:cNvSpPr txBox="1"/>
-          <p:nvPr/>
-        </p:nvSpPr>
-        <p:spPr>
-          <a:xfrm>
-            <a:off x="4572000" y="4127500"/>
-            <a:ext cx="6985000" cy="408050"/>
-          </a:xfrm>
-          <a:prstGeom prst="rect">
-            <a:avLst/>
-          </a:prstGeom>
-          <a:noFill/>
-        </p:spPr>
-        <p:txBody>
-          <a:bodyPr wrap="none" lIns="0" rIns="0" tIns="0" bIns="0">
-            <a:spAutoFit/>
-          </a:bodyPr>
-          <a:lstStyle/>
+              <a:t>Entidades e relações</a:t>
+            </a:r>
+          </a:p>
           <a:p>
             <a:pPr>
               <a:lnSpc>
@@ -5516,122 +5936,15 @@
               </a:spcAft>
               <a:defRPr sz="1900" b="0">
                 <a:solidFill>
-                  <a:srgbClr val="B6C7D9"/>
-                </a:solidFill>
-                <a:latin typeface="Arial"/>
-              </a:defRPr>
-            </a:pPr>
-            <a:r>
-              <a:t>Conferir o extrato e resgatar a vantagem.</a:t>
-            </a:r>
-          </a:p>
-        </p:txBody>
-      </p:sp>
-      <p:sp>
-        <p:nvSpPr>
-          <p:cNvPr id="19" name="TextBox 18"/>
-          <p:cNvSpPr txBox="1"/>
-          <p:nvPr/>
-        </p:nvSpPr>
-        <p:spPr>
-          <a:xfrm>
-            <a:off x="508000" y="5041900"/>
-            <a:ext cx="698500" cy="520954"/>
-          </a:xfrm>
-          <a:prstGeom prst="rect">
-            <a:avLst/>
-          </a:prstGeom>
-          <a:noFill/>
-        </p:spPr>
-        <p:txBody>
-          <a:bodyPr wrap="none" lIns="0" rIns="0" tIns="0" bIns="0">
-            <a:spAutoFit/>
-          </a:bodyPr>
-          <a:lstStyle/>
-          <a:p>
-            <a:pPr>
-              <a:lnSpc>
-                <a:spcPct val="115000"/>
-              </a:lnSpc>
-              <a:spcAft>
-                <a:spcPts val="0"/>
-              </a:spcAft>
-              <a:defRPr sz="2600" b="1">
-                <a:solidFill>
-                  <a:srgbClr val="56D9B0"/>
-                </a:solidFill>
-                <a:latin typeface="Arial"/>
-              </a:defRPr>
-            </a:pPr>
-            <a:r>
-              <a:t>04</a:t>
-            </a:r>
-          </a:p>
-        </p:txBody>
-      </p:sp>
-      <p:sp>
-        <p:nvSpPr>
-          <p:cNvPr id="20" name="TextBox 19"/>
-          <p:cNvSpPr txBox="1"/>
-          <p:nvPr/>
-        </p:nvSpPr>
-        <p:spPr>
-          <a:xfrm>
-            <a:off x="1333500" y="5041900"/>
-            <a:ext cx="3111500" cy="440309"/>
-          </a:xfrm>
-          <a:prstGeom prst="rect">
-            <a:avLst/>
-          </a:prstGeom>
-          <a:noFill/>
-        </p:spPr>
-        <p:txBody>
-          <a:bodyPr wrap="none" lIns="0" rIns="0" tIns="0" bIns="0">
-            <a:spAutoFit/>
-          </a:bodyPr>
-          <a:lstStyle/>
-          <a:p>
-            <a:pPr>
-              <a:lnSpc>
-                <a:spcPct val="115000"/>
-              </a:lnSpc>
-              <a:spcAft>
-                <a:spcPts val="0"/>
-              </a:spcAft>
-              <a:defRPr sz="2100" b="1">
-                <a:solidFill>
                   <a:srgbClr val="F4F7FA"/>
                 </a:solidFill>
                 <a:latin typeface="Arial"/>
               </a:defRPr>
             </a:pPr>
             <a:r>
-              <a:t>Mailpit</a:t>
-            </a:r>
-          </a:p>
-        </p:txBody>
-      </p:sp>
-      <p:sp>
-        <p:nvSpPr>
-          <p:cNvPr id="21" name="TextBox 20"/>
-          <p:cNvSpPr txBox="1"/>
-          <p:nvPr/>
-        </p:nvSpPr>
-        <p:spPr>
-          <a:xfrm>
-            <a:off x="4572000" y="5041900"/>
-            <a:ext cx="6985000" cy="714502"/>
-          </a:xfrm>
-          <a:prstGeom prst="rect">
-            <a:avLst/>
-          </a:prstGeom>
-          <a:noFill/>
-        </p:spPr>
-        <p:txBody>
-          <a:bodyPr wrap="none" lIns="0" rIns="0" tIns="0" bIns="0">
-            <a:spAutoFit/>
-          </a:bodyPr>
-          <a:lstStyle/>
+              <a:t>acompanham as migrações</a:t>
+            </a:r>
+          </a:p>
           <a:p>
             <a:pPr>
               <a:lnSpc>
@@ -5642,32 +5955,13 @@
               </a:spcAft>
               <a:defRPr sz="1900" b="0">
                 <a:solidFill>
-                  <a:srgbClr val="B6C7D9"/>
-                </a:solidFill>
-                <a:latin typeface="Arial"/>
-              </a:defRPr>
-            </a:pPr>
-            <a:r>
-              <a:t>Abrir os emails do resgate e comparar o código do</a:t>
-            </a:r>
-          </a:p>
-          <a:p>
-            <a:pPr>
-              <a:lnSpc>
-                <a:spcPct val="115000"/>
-              </a:lnSpc>
-              <a:spcAft>
-                <a:spcPts val="0"/>
-              </a:spcAft>
-              <a:defRPr sz="1900" b="0">
-                <a:solidFill>
-                  <a:srgbClr val="B6C7D9"/>
-                </a:solidFill>
-                <a:latin typeface="Arial"/>
-              </a:defRPr>
-            </a:pPr>
-            <a:r>
-              <a:t>cupom.</a:t>
+                  <a:srgbClr val="F4F7FA"/>
+                </a:solidFill>
+                <a:latin typeface="Arial"/>
+              </a:defRPr>
+            </a:pPr>
+            <a:r>
+              <a:t>SQL em db/migration.</a:t>
             </a:r>
           </a:p>
         </p:txBody>
@@ -5813,7 +6107,7 @@
               </a:defRPr>
             </a:pPr>
             <a:r>
-              <a:t>VALIDAÇÃO E LIMITES</a:t>
+              <a:t>TUTORIAL / 1 DE 4</a:t>
             </a:r>
           </a:p>
         </p:txBody>
@@ -5855,7 +6149,7 @@
               </a:defRPr>
             </a:pPr>
             <a:r>
-              <a:t>O que foi verificado e o que falta</a:t>
+              <a:t>React: da tela à requisição</a:t>
             </a:r>
           </a:p>
         </p:txBody>
@@ -5897,7 +6191,7 @@
               </a:defRPr>
             </a:pPr>
             <a:r>
-              <a:t>Separar implementação entregue de validação ainda pendente.</a:t>
+              <a:t>Uma alteração de cadastro percorre componentes e cliente HTTP.</a:t>
             </a:r>
           </a:p>
         </p:txBody>
@@ -6038,7 +6332,7 @@
         <p:spPr>
           <a:xfrm>
             <a:off x="508000" y="2438400"/>
-            <a:ext cx="3589866" cy="3175000"/>
+            <a:ext cx="3589866" cy="3302000"/>
           </a:xfrm>
           <a:prstGeom prst="rect">
             <a:avLst/>
@@ -6081,7 +6375,7 @@
         <p:spPr>
           <a:xfrm>
             <a:off x="762000" y="2667000"/>
-            <a:ext cx="3081866" cy="811276"/>
+            <a:ext cx="3081866" cy="456438"/>
           </a:xfrm>
           <a:prstGeom prst="rect">
             <a:avLst/>
@@ -6109,26 +6403,7 @@
               </a:defRPr>
             </a:pPr>
             <a:r>
-              <a:t>Verificação</a:t>
-            </a:r>
-          </a:p>
-          <a:p>
-            <a:pPr>
-              <a:lnSpc>
-                <a:spcPct val="115000"/>
-              </a:lnSpc>
-              <a:spcAft>
-                <a:spcPts val="0"/>
-              </a:spcAft>
-              <a:defRPr sz="2200" b="1">
-                <a:solidFill>
-                  <a:srgbClr val="56D9B0"/>
-                </a:solidFill>
-                <a:latin typeface="Arial"/>
-              </a:defRPr>
-            </a:pPr>
-            <a:r>
-              <a:t>registrada</a:t>
+              <a:t>1. Localizar a tela</a:t>
             </a:r>
           </a:p>
         </p:txBody>
@@ -6170,7 +6445,7 @@
               </a:defRPr>
             </a:pPr>
             <a:r>
-              <a:t>A documentação registra</a:t>
+              <a:t>Abrir CadastroForm.tsx.</a:t>
             </a:r>
           </a:p>
           <a:p>
@@ -6189,7 +6464,7 @@
               </a:defRPr>
             </a:pPr>
             <a:r>
-              <a:t>compilação e uma</a:t>
+              <a:t>Identificar campos,</a:t>
             </a:r>
           </a:p>
           <a:p>
@@ -6208,7 +6483,7 @@
               </a:defRPr>
             </a:pPr>
             <a:r>
-              <a:t>verificação básica de</a:t>
+              <a:t>estado do formulário e</a:t>
             </a:r>
           </a:p>
           <a:p>
@@ -6227,7 +6502,7 @@
               </a:defRPr>
             </a:pPr>
             <a:r>
-              <a:t>integração.</a:t>
+              <a:t>ação de envio.</a:t>
             </a:r>
           </a:p>
         </p:txBody>
@@ -6241,7 +6516,7 @@
         <p:spPr>
           <a:xfrm>
             <a:off x="4301066" y="2438400"/>
-            <a:ext cx="3589866" cy="3175000"/>
+            <a:ext cx="3589866" cy="3302000"/>
           </a:xfrm>
           <a:prstGeom prst="rect">
             <a:avLst/>
@@ -6312,7 +6587,7 @@
               </a:defRPr>
             </a:pPr>
             <a:r>
-              <a:t>Próxima etapa</a:t>
+              <a:t>2. Seguir o envio</a:t>
             </a:r>
           </a:p>
         </p:txBody>
@@ -6354,7 +6629,7 @@
               </a:defRPr>
             </a:pPr>
             <a:r>
-              <a:t>Executar a campanha</a:t>
+              <a:t>Abrir api.ts.</a:t>
             </a:r>
           </a:p>
           <a:p>
@@ -6373,7 +6648,7 @@
               </a:defRPr>
             </a:pPr>
             <a:r>
-              <a:t>completa de testes e</a:t>
+              <a:t>Observar os tipos de</a:t>
             </a:r>
           </a:p>
           <a:p>
@@ -6392,7 +6667,7 @@
               </a:defRPr>
             </a:pPr>
             <a:r>
-              <a:t>ampliar a validação dos</a:t>
+              <a:t>dados, a chamada HTTP e</a:t>
             </a:r>
           </a:p>
           <a:p>
@@ -6411,7 +6686,7 @@
               </a:defRPr>
             </a:pPr>
             <a:r>
-              <a:t>fluxos.</a:t>
+              <a:t>o tratamento de erro.</a:t>
             </a:r>
           </a:p>
         </p:txBody>
@@ -6425,7 +6700,7 @@
         <p:spPr>
           <a:xfrm>
             <a:off x="8094133" y="2438400"/>
-            <a:ext cx="3589866" cy="3175000"/>
+            <a:ext cx="3589866" cy="3302000"/>
           </a:xfrm>
           <a:prstGeom prst="rect">
             <a:avLst/>
@@ -6468,7 +6743,7 @@
         <p:spPr>
           <a:xfrm>
             <a:off x="8348133" y="2667000"/>
-            <a:ext cx="3081866" cy="456438"/>
+            <a:ext cx="3081866" cy="811276"/>
           </a:xfrm>
           <a:prstGeom prst="rect">
             <a:avLst/>
@@ -6496,7 +6771,26 @@
               </a:defRPr>
             </a:pPr>
             <a:r>
-              <a:t>Limites atuais</a:t>
+              <a:t>3. Observar no</a:t>
+            </a:r>
+          </a:p>
+          <a:p>
+            <a:pPr>
+              <a:lnSpc>
+                <a:spcPct val="115000"/>
+              </a:lnSpc>
+              <a:spcAft>
+                <a:spcPts val="0"/>
+              </a:spcAft>
+              <a:defRPr sz="2200" b="1">
+                <a:solidFill>
+                  <a:srgbClr val="56D9B0"/>
+                </a:solidFill>
+                <a:latin typeface="Arial"/>
+              </a:defRPr>
+            </a:pPr>
+            <a:r>
+              <a:t>navegador</a:t>
             </a:r>
           </a:p>
         </p:txBody>
@@ -6510,7 +6804,7 @@
         <p:spPr>
           <a:xfrm>
             <a:off x="8348133" y="3327400"/>
-            <a:ext cx="3081866" cy="1633855"/>
+            <a:ext cx="3081866" cy="1327404"/>
           </a:xfrm>
           <a:prstGeom prst="rect">
             <a:avLst/>
@@ -6538,7 +6832,7 @@
               </a:defRPr>
             </a:pPr>
             <a:r>
-              <a:t>Mailpit captura emails</a:t>
+              <a:t>Editar um cadastro.</a:t>
             </a:r>
           </a:p>
           <a:p>
@@ -6557,7 +6851,7 @@
               </a:defRPr>
             </a:pPr>
             <a:r>
-              <a:t>locais.</a:t>
+              <a:t>Em Rede / Network,</a:t>
             </a:r>
           </a:p>
           <a:p>
@@ -6576,7 +6870,7 @@
               </a:defRPr>
             </a:pPr>
             <a:r>
-              <a:t>Cupom tem conferência</a:t>
+              <a:t>conferir a requisição, o</a:t>
             </a:r>
           </a:p>
           <a:p>
@@ -6595,26 +6889,7 @@
               </a:defRPr>
             </a:pPr>
             <a:r>
-              <a:t>presencial.</a:t>
-            </a:r>
-          </a:p>
-          <a:p>
-            <a:pPr>
-              <a:lnSpc>
-                <a:spcPct val="115000"/>
-              </a:lnSpc>
-              <a:spcAft>
-                <a:spcPts val="0"/>
-              </a:spcAft>
-              <a:defRPr sz="1900" b="0">
-                <a:solidFill>
-                  <a:srgbClr val="F4F7FA"/>
-                </a:solidFill>
-                <a:latin typeface="Arial"/>
-              </a:defRPr>
-            </a:pPr>
-            <a:r>
-              <a:t>Sem baixa digital.</a:t>
+              <a:t>status e a resposta.</a:t>
             </a:r>
           </a:p>
         </p:txBody>
@@ -6760,7 +7035,7 @@
               </a:defRPr>
             </a:pPr>
             <a:r>
-              <a:t>ENCERRAMENTO</a:t>
+              <a:t>TUTORIAL / 2 DE 4</a:t>
             </a:r>
           </a:p>
         </p:txBody>
@@ -6802,7 +7077,7 @@
               </a:defRPr>
             </a:pPr>
             <a:r>
-              <a:t>Do mérito ao benefício, com histórico</a:t>
+              <a:t>Spring Boot: da rota à regra</a:t>
             </a:r>
           </a:p>
         </p:txBody>
@@ -6844,7 +7119,7 @@
               </a:defRPr>
             </a:pPr>
             <a:r>
-              <a:t>Cadastro → reconhecimento → resgate → cupom → email</a:t>
+              <a:t>Seguir uma requisição pelo controller e pelo serviço.</a:t>
             </a:r>
           </a:p>
         </p:txBody>
@@ -6972,6 +7247,3698 @@
             </a:pPr>
             <a:r>
               <a:t>12</a:t>
+            </a:r>
+          </a:p>
+        </p:txBody>
+      </p:sp>
+      <p:sp>
+        <p:nvSpPr>
+          <p:cNvPr id="10" name="Rectangle 9"/>
+          <p:cNvSpPr/>
+          <p:nvPr/>
+        </p:nvSpPr>
+        <p:spPr>
+          <a:xfrm>
+            <a:off x="508000" y="2438400"/>
+            <a:ext cx="3589866" cy="3302000"/>
+          </a:xfrm>
+          <a:prstGeom prst="rect">
+            <a:avLst/>
+          </a:prstGeom>
+          <a:solidFill>
+            <a:srgbClr val="1B2D42"/>
+          </a:solidFill>
+          <a:ln>
+            <a:noFill/>
+          </a:ln>
+        </p:spPr>
+        <p:style>
+          <a:lnRef idx="1">
+            <a:schemeClr val="accent1"/>
+          </a:lnRef>
+          <a:fillRef idx="3">
+            <a:schemeClr val="accent1"/>
+          </a:fillRef>
+          <a:effectRef idx="2">
+            <a:schemeClr val="accent1"/>
+          </a:effectRef>
+          <a:fontRef idx="minor">
+            <a:schemeClr val="lt1"/>
+          </a:fontRef>
+        </p:style>
+        <p:txBody>
+          <a:bodyPr rtlCol="0" anchor="ctr"/>
+          <a:lstStyle/>
+          <a:p>
+            <a:pPr algn="ctr"/>
+          </a:p>
+        </p:txBody>
+      </p:sp>
+      <p:sp>
+        <p:nvSpPr>
+          <p:cNvPr id="11" name="TextBox 10"/>
+          <p:cNvSpPr txBox="1"/>
+          <p:nvPr/>
+        </p:nvSpPr>
+        <p:spPr>
+          <a:xfrm>
+            <a:off x="762000" y="2667000"/>
+            <a:ext cx="3081866" cy="456438"/>
+          </a:xfrm>
+          <a:prstGeom prst="rect">
+            <a:avLst/>
+          </a:prstGeom>
+          <a:noFill/>
+        </p:spPr>
+        <p:txBody>
+          <a:bodyPr wrap="none" lIns="0" rIns="0" tIns="0" bIns="0">
+            <a:spAutoFit/>
+          </a:bodyPr>
+          <a:lstStyle/>
+          <a:p>
+            <a:pPr>
+              <a:lnSpc>
+                <a:spcPct val="115000"/>
+              </a:lnSpc>
+              <a:spcAft>
+                <a:spcPts val="0"/>
+              </a:spcAft>
+              <a:defRPr sz="2200" b="1">
+                <a:solidFill>
+                  <a:srgbClr val="56D9B0"/>
+                </a:solidFill>
+                <a:latin typeface="Arial"/>
+              </a:defRPr>
+            </a:pPr>
+            <a:r>
+              <a:t>Rota HTTP</a:t>
+            </a:r>
+          </a:p>
+        </p:txBody>
+      </p:sp>
+      <p:sp>
+        <p:nvSpPr>
+          <p:cNvPr id="12" name="TextBox 11"/>
+          <p:cNvSpPr txBox="1"/>
+          <p:nvPr/>
+        </p:nvSpPr>
+        <p:spPr>
+          <a:xfrm>
+            <a:off x="762000" y="3327400"/>
+            <a:ext cx="3081866" cy="1327404"/>
+          </a:xfrm>
+          <a:prstGeom prst="rect">
+            <a:avLst/>
+          </a:prstGeom>
+          <a:noFill/>
+        </p:spPr>
+        <p:txBody>
+          <a:bodyPr wrap="none" lIns="0" rIns="0" tIns="0" bIns="0">
+            <a:spAutoFit/>
+          </a:bodyPr>
+          <a:lstStyle/>
+          <a:p>
+            <a:pPr>
+              <a:lnSpc>
+                <a:spcPct val="115000"/>
+              </a:lnSpc>
+              <a:spcAft>
+                <a:spcPts val="0"/>
+              </a:spcAft>
+              <a:defRPr sz="1900" b="0">
+                <a:solidFill>
+                  <a:srgbClr val="F4F7FA"/>
+                </a:solidFill>
+                <a:latin typeface="Arial"/>
+              </a:defRPr>
+            </a:pPr>
+            <a:r>
+              <a:t>Em CadastrosController,</a:t>
+            </a:r>
+          </a:p>
+          <a:p>
+            <a:pPr>
+              <a:lnSpc>
+                <a:spcPct val="115000"/>
+              </a:lnSpc>
+              <a:spcAft>
+                <a:spcPts val="0"/>
+              </a:spcAft>
+              <a:defRPr sz="1900" b="0">
+                <a:solidFill>
+                  <a:srgbClr val="F4F7FA"/>
+                </a:solidFill>
+                <a:latin typeface="Arial"/>
+              </a:defRPr>
+            </a:pPr>
+            <a:r>
+              <a:t>localizar</a:t>
+            </a:r>
+          </a:p>
+          <a:p>
+            <a:pPr>
+              <a:lnSpc>
+                <a:spcPct val="115000"/>
+              </a:lnSpc>
+              <a:spcAft>
+                <a:spcPts val="0"/>
+              </a:spcAft>
+              <a:defRPr sz="1900" b="0">
+                <a:solidFill>
+                  <a:srgbClr val="F4F7FA"/>
+                </a:solidFill>
+                <a:latin typeface="Arial"/>
+              </a:defRPr>
+            </a:pPr>
+            <a:r>
+              <a:t>@PostMapping("/alunos")</a:t>
+            </a:r>
+          </a:p>
+          <a:p>
+            <a:pPr>
+              <a:lnSpc>
+                <a:spcPct val="115000"/>
+              </a:lnSpc>
+              <a:spcAft>
+                <a:spcPts val="0"/>
+              </a:spcAft>
+              <a:defRPr sz="1900" b="0">
+                <a:solidFill>
+                  <a:srgbClr val="F4F7FA"/>
+                </a:solidFill>
+                <a:latin typeface="Arial"/>
+              </a:defRPr>
+            </a:pPr>
+            <a:r>
+              <a:t>e @RequestBody.</a:t>
+            </a:r>
+          </a:p>
+        </p:txBody>
+      </p:sp>
+      <p:sp>
+        <p:nvSpPr>
+          <p:cNvPr id="13" name="Rectangle 12"/>
+          <p:cNvSpPr/>
+          <p:nvPr/>
+        </p:nvSpPr>
+        <p:spPr>
+          <a:xfrm>
+            <a:off x="4301066" y="2438400"/>
+            <a:ext cx="3589866" cy="3302000"/>
+          </a:xfrm>
+          <a:prstGeom prst="rect">
+            <a:avLst/>
+          </a:prstGeom>
+          <a:solidFill>
+            <a:srgbClr val="1B2D42"/>
+          </a:solidFill>
+          <a:ln>
+            <a:noFill/>
+          </a:ln>
+        </p:spPr>
+        <p:style>
+          <a:lnRef idx="1">
+            <a:schemeClr val="accent1"/>
+          </a:lnRef>
+          <a:fillRef idx="3">
+            <a:schemeClr val="accent1"/>
+          </a:fillRef>
+          <a:effectRef idx="2">
+            <a:schemeClr val="accent1"/>
+          </a:effectRef>
+          <a:fontRef idx="minor">
+            <a:schemeClr val="lt1"/>
+          </a:fontRef>
+        </p:style>
+        <p:txBody>
+          <a:bodyPr rtlCol="0" anchor="ctr"/>
+          <a:lstStyle/>
+          <a:p>
+            <a:pPr algn="ctr"/>
+          </a:p>
+        </p:txBody>
+      </p:sp>
+      <p:sp>
+        <p:nvSpPr>
+          <p:cNvPr id="14" name="TextBox 13"/>
+          <p:cNvSpPr txBox="1"/>
+          <p:nvPr/>
+        </p:nvSpPr>
+        <p:spPr>
+          <a:xfrm>
+            <a:off x="4555066" y="2667000"/>
+            <a:ext cx="3081866" cy="456438"/>
+          </a:xfrm>
+          <a:prstGeom prst="rect">
+            <a:avLst/>
+          </a:prstGeom>
+          <a:noFill/>
+        </p:spPr>
+        <p:txBody>
+          <a:bodyPr wrap="none" lIns="0" rIns="0" tIns="0" bIns="0">
+            <a:spAutoFit/>
+          </a:bodyPr>
+          <a:lstStyle/>
+          <a:p>
+            <a:pPr>
+              <a:lnSpc>
+                <a:spcPct val="115000"/>
+              </a:lnSpc>
+              <a:spcAft>
+                <a:spcPts val="0"/>
+              </a:spcAft>
+              <a:defRPr sz="2200" b="1">
+                <a:solidFill>
+                  <a:srgbClr val="56D9B0"/>
+                </a:solidFill>
+                <a:latin typeface="Arial"/>
+              </a:defRPr>
+            </a:pPr>
+            <a:r>
+              <a:t>Validação e resposta</a:t>
+            </a:r>
+          </a:p>
+        </p:txBody>
+      </p:sp>
+      <p:sp>
+        <p:nvSpPr>
+          <p:cNvPr id="15" name="TextBox 14"/>
+          <p:cNvSpPr txBox="1"/>
+          <p:nvPr/>
+        </p:nvSpPr>
+        <p:spPr>
+          <a:xfrm>
+            <a:off x="4555066" y="3327400"/>
+            <a:ext cx="3081866" cy="1327404"/>
+          </a:xfrm>
+          <a:prstGeom prst="rect">
+            <a:avLst/>
+          </a:prstGeom>
+          <a:noFill/>
+        </p:spPr>
+        <p:txBody>
+          <a:bodyPr wrap="none" lIns="0" rIns="0" tIns="0" bIns="0">
+            <a:spAutoFit/>
+          </a:bodyPr>
+          <a:lstStyle/>
+          <a:p>
+            <a:pPr>
+              <a:lnSpc>
+                <a:spcPct val="115000"/>
+              </a:lnSpc>
+              <a:spcAft>
+                <a:spcPts val="0"/>
+              </a:spcAft>
+              <a:defRPr sz="1900" b="0">
+                <a:solidFill>
+                  <a:srgbClr val="F4F7FA"/>
+                </a:solidFill>
+                <a:latin typeface="Arial"/>
+              </a:defRPr>
+            </a:pPr>
+            <a:r>
+              <a:t>@Valid valida a entrada.</a:t>
+            </a:r>
+          </a:p>
+          <a:p>
+            <a:pPr>
+              <a:lnSpc>
+                <a:spcPct val="115000"/>
+              </a:lnSpc>
+              <a:spcAft>
+                <a:spcPts val="0"/>
+              </a:spcAft>
+              <a:defRPr sz="1900" b="0">
+                <a:solidFill>
+                  <a:srgbClr val="F4F7FA"/>
+                </a:solidFill>
+                <a:latin typeface="Arial"/>
+              </a:defRPr>
+            </a:pPr>
+            <a:r>
+              <a:t>ResponseEntity.created</a:t>
+            </a:r>
+          </a:p>
+          <a:p>
+            <a:pPr>
+              <a:lnSpc>
+                <a:spcPct val="115000"/>
+              </a:lnSpc>
+              <a:spcAft>
+                <a:spcPts val="0"/>
+              </a:spcAft>
+              <a:defRPr sz="1900" b="0">
+                <a:solidFill>
+                  <a:srgbClr val="F4F7FA"/>
+                </a:solidFill>
+                <a:latin typeface="Arial"/>
+              </a:defRPr>
+            </a:pPr>
+            <a:r>
+              <a:t>devolve 201 e o endereço</a:t>
+            </a:r>
+          </a:p>
+          <a:p>
+            <a:pPr>
+              <a:lnSpc>
+                <a:spcPct val="115000"/>
+              </a:lnSpc>
+              <a:spcAft>
+                <a:spcPts val="0"/>
+              </a:spcAft>
+              <a:defRPr sz="1900" b="0">
+                <a:solidFill>
+                  <a:srgbClr val="F4F7FA"/>
+                </a:solidFill>
+                <a:latin typeface="Arial"/>
+              </a:defRPr>
+            </a:pPr>
+            <a:r>
+              <a:t>do novo recurso.</a:t>
+            </a:r>
+          </a:p>
+        </p:txBody>
+      </p:sp>
+      <p:sp>
+        <p:nvSpPr>
+          <p:cNvPr id="16" name="Rectangle 15"/>
+          <p:cNvSpPr/>
+          <p:nvPr/>
+        </p:nvSpPr>
+        <p:spPr>
+          <a:xfrm>
+            <a:off x="8094133" y="2438400"/>
+            <a:ext cx="3589866" cy="3302000"/>
+          </a:xfrm>
+          <a:prstGeom prst="rect">
+            <a:avLst/>
+          </a:prstGeom>
+          <a:solidFill>
+            <a:srgbClr val="1B2D42"/>
+          </a:solidFill>
+          <a:ln>
+            <a:noFill/>
+          </a:ln>
+        </p:spPr>
+        <p:style>
+          <a:lnRef idx="1">
+            <a:schemeClr val="accent1"/>
+          </a:lnRef>
+          <a:fillRef idx="3">
+            <a:schemeClr val="accent1"/>
+          </a:fillRef>
+          <a:effectRef idx="2">
+            <a:schemeClr val="accent1"/>
+          </a:effectRef>
+          <a:fontRef idx="minor">
+            <a:schemeClr val="lt1"/>
+          </a:fontRef>
+        </p:style>
+        <p:txBody>
+          <a:bodyPr rtlCol="0" anchor="ctr"/>
+          <a:lstStyle/>
+          <a:p>
+            <a:pPr algn="ctr"/>
+          </a:p>
+        </p:txBody>
+      </p:sp>
+      <p:sp>
+        <p:nvSpPr>
+          <p:cNvPr id="17" name="TextBox 16"/>
+          <p:cNvSpPr txBox="1"/>
+          <p:nvPr/>
+        </p:nvSpPr>
+        <p:spPr>
+          <a:xfrm>
+            <a:off x="8348133" y="2667000"/>
+            <a:ext cx="3081866" cy="456438"/>
+          </a:xfrm>
+          <a:prstGeom prst="rect">
+            <a:avLst/>
+          </a:prstGeom>
+          <a:noFill/>
+        </p:spPr>
+        <p:txBody>
+          <a:bodyPr wrap="none" lIns="0" rIns="0" tIns="0" bIns="0">
+            <a:spAutoFit/>
+          </a:bodyPr>
+          <a:lstStyle/>
+          <a:p>
+            <a:pPr>
+              <a:lnSpc>
+                <a:spcPct val="115000"/>
+              </a:lnSpc>
+              <a:spcAft>
+                <a:spcPts val="0"/>
+              </a:spcAft>
+              <a:defRPr sz="2200" b="1">
+                <a:solidFill>
+                  <a:srgbClr val="56D9B0"/>
+                </a:solidFill>
+                <a:latin typeface="Arial"/>
+              </a:defRPr>
+            </a:pPr>
+            <a:r>
+              <a:t>Regra de negócio</a:t>
+            </a:r>
+          </a:p>
+        </p:txBody>
+      </p:sp>
+      <p:sp>
+        <p:nvSpPr>
+          <p:cNvPr id="18" name="TextBox 17"/>
+          <p:cNvSpPr txBox="1"/>
+          <p:nvPr/>
+        </p:nvSpPr>
+        <p:spPr>
+          <a:xfrm>
+            <a:off x="8348133" y="3327400"/>
+            <a:ext cx="3081866" cy="1327404"/>
+          </a:xfrm>
+          <a:prstGeom prst="rect">
+            <a:avLst/>
+          </a:prstGeom>
+          <a:noFill/>
+        </p:spPr>
+        <p:txBody>
+          <a:bodyPr wrap="none" lIns="0" rIns="0" tIns="0" bIns="0">
+            <a:spAutoFit/>
+          </a:bodyPr>
+          <a:lstStyle/>
+          <a:p>
+            <a:pPr>
+              <a:lnSpc>
+                <a:spcPct val="115000"/>
+              </a:lnSpc>
+              <a:spcAft>
+                <a:spcPts val="0"/>
+              </a:spcAft>
+              <a:defRPr sz="1900" b="0">
+                <a:solidFill>
+                  <a:srgbClr val="F4F7FA"/>
+                </a:solidFill>
+                <a:latin typeface="Arial"/>
+              </a:defRPr>
+            </a:pPr>
+            <a:r>
+              <a:t>Em CadastrosService,</a:t>
+            </a:r>
+          </a:p>
+          <a:p>
+            <a:pPr>
+              <a:lnSpc>
+                <a:spcPct val="115000"/>
+              </a:lnSpc>
+              <a:spcAft>
+                <a:spcPts val="0"/>
+              </a:spcAft>
+              <a:defRPr sz="1900" b="0">
+                <a:solidFill>
+                  <a:srgbClr val="F4F7FA"/>
+                </a:solidFill>
+                <a:latin typeface="Arial"/>
+              </a:defRPr>
+            </a:pPr>
+            <a:r>
+              <a:t>localizar cadastrarAluno</a:t>
+            </a:r>
+          </a:p>
+          <a:p>
+            <a:pPr>
+              <a:lnSpc>
+                <a:spcPct val="115000"/>
+              </a:lnSpc>
+              <a:spcAft>
+                <a:spcPts val="0"/>
+              </a:spcAft>
+              <a:defRPr sz="1900" b="0">
+                <a:solidFill>
+                  <a:srgbClr val="F4F7FA"/>
+                </a:solidFill>
+                <a:latin typeface="Arial"/>
+              </a:defRPr>
+            </a:pPr>
+            <a:r>
+              <a:t>e acompanhar a</a:t>
+            </a:r>
+          </a:p>
+          <a:p>
+            <a:pPr>
+              <a:lnSpc>
+                <a:spcPct val="115000"/>
+              </a:lnSpc>
+              <a:spcAft>
+                <a:spcPts val="0"/>
+              </a:spcAft>
+              <a:defRPr sz="1900" b="0">
+                <a:solidFill>
+                  <a:srgbClr val="F4F7FA"/>
+                </a:solidFill>
+                <a:latin typeface="Arial"/>
+              </a:defRPr>
+            </a:pPr>
+            <a:r>
+              <a:t>transação.</a:t>
+            </a:r>
+          </a:p>
+        </p:txBody>
+      </p:sp>
+    </p:spTree>
+  </p:cSld>
+  <p:clrMapOvr>
+    <a:masterClrMapping/>
+  </p:clrMapOvr>
+</p:sld>
+</file>
+
+<file path=ppt/slides/slide13.xml><?xml version="1.0" encoding="utf-8"?>
+<p:sld xmlns:a="http://schemas.openxmlformats.org/drawingml/2006/main" xmlns:p="http://schemas.openxmlformats.org/presentationml/2006/main" xmlns:r="http://schemas.openxmlformats.org/officeDocument/2006/relationships">
+  <p:cSld>
+    <p:spTree>
+      <p:nvGrpSpPr>
+        <p:cNvPr id="1" name=""/>
+        <p:cNvGrpSpPr/>
+        <p:nvPr/>
+      </p:nvGrpSpPr>
+      <p:grpSpPr/>
+      <p:sp>
+        <p:nvSpPr>
+          <p:cNvPr id="2" name="Rectangle 1"/>
+          <p:cNvSpPr/>
+          <p:nvPr/>
+        </p:nvSpPr>
+        <p:spPr>
+          <a:xfrm>
+            <a:off x="0" y="0"/>
+            <a:ext cx="12192000" cy="6858000"/>
+          </a:xfrm>
+          <a:prstGeom prst="rect">
+            <a:avLst/>
+          </a:prstGeom>
+          <a:solidFill>
+            <a:srgbClr val="101D2C"/>
+          </a:solidFill>
+          <a:ln>
+            <a:noFill/>
+          </a:ln>
+        </p:spPr>
+        <p:style>
+          <a:lnRef idx="1">
+            <a:schemeClr val="accent1"/>
+          </a:lnRef>
+          <a:fillRef idx="3">
+            <a:schemeClr val="accent1"/>
+          </a:fillRef>
+          <a:effectRef idx="2">
+            <a:schemeClr val="accent1"/>
+          </a:effectRef>
+          <a:fontRef idx="minor">
+            <a:schemeClr val="lt1"/>
+          </a:fontRef>
+        </p:style>
+        <p:txBody>
+          <a:bodyPr rtlCol="0" anchor="ctr"/>
+          <a:lstStyle/>
+          <a:p>
+            <a:pPr algn="ctr"/>
+          </a:p>
+        </p:txBody>
+      </p:sp>
+      <p:sp>
+        <p:nvSpPr>
+          <p:cNvPr id="3" name="Rectangle 2"/>
+          <p:cNvSpPr/>
+          <p:nvPr/>
+        </p:nvSpPr>
+        <p:spPr>
+          <a:xfrm>
+            <a:off x="508000" y="482600"/>
+            <a:ext cx="444500" cy="50800"/>
+          </a:xfrm>
+          <a:prstGeom prst="rect">
+            <a:avLst/>
+          </a:prstGeom>
+          <a:solidFill>
+            <a:srgbClr val="56D9B0"/>
+          </a:solidFill>
+          <a:ln>
+            <a:noFill/>
+          </a:ln>
+        </p:spPr>
+        <p:style>
+          <a:lnRef idx="1">
+            <a:schemeClr val="accent1"/>
+          </a:lnRef>
+          <a:fillRef idx="3">
+            <a:schemeClr val="accent1"/>
+          </a:fillRef>
+          <a:effectRef idx="2">
+            <a:schemeClr val="accent1"/>
+          </a:effectRef>
+          <a:fontRef idx="minor">
+            <a:schemeClr val="lt1"/>
+          </a:fontRef>
+        </p:style>
+        <p:txBody>
+          <a:bodyPr rtlCol="0" anchor="ctr"/>
+          <a:lstStyle/>
+          <a:p>
+            <a:pPr algn="ctr"/>
+          </a:p>
+        </p:txBody>
+      </p:sp>
+      <p:sp>
+        <p:nvSpPr>
+          <p:cNvPr id="4" name="TextBox 3"/>
+          <p:cNvSpPr txBox="1"/>
+          <p:nvPr/>
+        </p:nvSpPr>
+        <p:spPr>
+          <a:xfrm>
+            <a:off x="1092200" y="355600"/>
+            <a:ext cx="10287000" cy="295148"/>
+          </a:xfrm>
+          <a:prstGeom prst="rect">
+            <a:avLst/>
+          </a:prstGeom>
+          <a:noFill/>
+        </p:spPr>
+        <p:txBody>
+          <a:bodyPr wrap="none" lIns="0" rIns="0" tIns="0" bIns="0">
+            <a:spAutoFit/>
+          </a:bodyPr>
+          <a:lstStyle/>
+          <a:p>
+            <a:pPr>
+              <a:lnSpc>
+                <a:spcPct val="115000"/>
+              </a:lnSpc>
+              <a:spcAft>
+                <a:spcPts val="0"/>
+              </a:spcAft>
+              <a:defRPr sz="1200" b="1">
+                <a:solidFill>
+                  <a:srgbClr val="56D9B0"/>
+                </a:solidFill>
+                <a:latin typeface="Arial"/>
+              </a:defRPr>
+            </a:pPr>
+            <a:r>
+              <a:t>TUTORIAL / 3 DE 4</a:t>
+            </a:r>
+          </a:p>
+        </p:txBody>
+      </p:sp>
+      <p:sp>
+        <p:nvSpPr>
+          <p:cNvPr id="5" name="TextBox 4"/>
+          <p:cNvSpPr txBox="1"/>
+          <p:nvPr/>
+        </p:nvSpPr>
+        <p:spPr>
+          <a:xfrm>
+            <a:off x="508000" y="914400"/>
+            <a:ext cx="11176000" cy="649986"/>
+          </a:xfrm>
+          <a:prstGeom prst="rect">
+            <a:avLst/>
+          </a:prstGeom>
+          <a:noFill/>
+        </p:spPr>
+        <p:txBody>
+          <a:bodyPr wrap="none" lIns="0" rIns="0" tIns="0" bIns="0">
+            <a:spAutoFit/>
+          </a:bodyPr>
+          <a:lstStyle/>
+          <a:p>
+            <a:pPr>
+              <a:lnSpc>
+                <a:spcPct val="115000"/>
+              </a:lnSpc>
+              <a:spcAft>
+                <a:spcPts val="0"/>
+              </a:spcAft>
+              <a:defRPr sz="3400" b="1">
+                <a:solidFill>
+                  <a:srgbClr val="F4F7FA"/>
+                </a:solidFill>
+                <a:latin typeface="Arial"/>
+              </a:defRPr>
+            </a:pPr>
+            <a:r>
+              <a:t>JPA e Flyway: do objeto à tabela</a:t>
+            </a:r>
+          </a:p>
+        </p:txBody>
+      </p:sp>
+      <p:sp>
+        <p:nvSpPr>
+          <p:cNvPr id="6" name="TextBox 5"/>
+          <p:cNvSpPr txBox="1"/>
+          <p:nvPr/>
+        </p:nvSpPr>
+        <p:spPr>
+          <a:xfrm>
+            <a:off x="508000" y="1651000"/>
+            <a:ext cx="11176000" cy="391922"/>
+          </a:xfrm>
+          <a:prstGeom prst="rect">
+            <a:avLst/>
+          </a:prstGeom>
+          <a:noFill/>
+        </p:spPr>
+        <p:txBody>
+          <a:bodyPr wrap="none" lIns="0" rIns="0" tIns="0" bIns="0">
+            <a:spAutoFit/>
+          </a:bodyPr>
+          <a:lstStyle/>
+          <a:p>
+            <a:pPr>
+              <a:lnSpc>
+                <a:spcPct val="115000"/>
+              </a:lnSpc>
+              <a:spcAft>
+                <a:spcPts val="0"/>
+              </a:spcAft>
+              <a:defRPr sz="1800" b="0">
+                <a:solidFill>
+                  <a:srgbClr val="B6C7D9"/>
+                </a:solidFill>
+                <a:latin typeface="Arial"/>
+              </a:defRPr>
+            </a:pPr>
+            <a:r>
+              <a:t>O ORM acessa dados; as migrações definem o esquema.</a:t>
+            </a:r>
+          </a:p>
+        </p:txBody>
+      </p:sp>
+      <p:sp>
+        <p:nvSpPr>
+          <p:cNvPr id="7" name="Rectangle 6"/>
+          <p:cNvSpPr/>
+          <p:nvPr/>
+        </p:nvSpPr>
+        <p:spPr>
+          <a:xfrm>
+            <a:off x="508000" y="6299200"/>
+            <a:ext cx="11176000" cy="12700"/>
+          </a:xfrm>
+          <a:prstGeom prst="rect">
+            <a:avLst/>
+          </a:prstGeom>
+          <a:solidFill>
+            <a:srgbClr val="1B2D42"/>
+          </a:solidFill>
+          <a:ln>
+            <a:noFill/>
+          </a:ln>
+        </p:spPr>
+        <p:style>
+          <a:lnRef idx="1">
+            <a:schemeClr val="accent1"/>
+          </a:lnRef>
+          <a:fillRef idx="3">
+            <a:schemeClr val="accent1"/>
+          </a:fillRef>
+          <a:effectRef idx="2">
+            <a:schemeClr val="accent1"/>
+          </a:effectRef>
+          <a:fontRef idx="minor">
+            <a:schemeClr val="lt1"/>
+          </a:fontRef>
+        </p:style>
+        <p:txBody>
+          <a:bodyPr rtlCol="0" anchor="ctr"/>
+          <a:lstStyle/>
+          <a:p>
+            <a:pPr algn="ctr"/>
+          </a:p>
+        </p:txBody>
+      </p:sp>
+      <p:sp>
+        <p:nvSpPr>
+          <p:cNvPr id="8" name="TextBox 7"/>
+          <p:cNvSpPr txBox="1"/>
+          <p:nvPr/>
+        </p:nvSpPr>
+        <p:spPr>
+          <a:xfrm>
+            <a:off x="508000" y="6477000"/>
+            <a:ext cx="10414000" cy="262890"/>
+          </a:xfrm>
+          <a:prstGeom prst="rect">
+            <a:avLst/>
+          </a:prstGeom>
+          <a:noFill/>
+        </p:spPr>
+        <p:txBody>
+          <a:bodyPr wrap="none" lIns="0" rIns="0" tIns="0" bIns="0">
+            <a:spAutoFit/>
+          </a:bodyPr>
+          <a:lstStyle/>
+          <a:p>
+            <a:pPr>
+              <a:lnSpc>
+                <a:spcPct val="115000"/>
+              </a:lnSpc>
+              <a:spcAft>
+                <a:spcPts val="0"/>
+              </a:spcAft>
+              <a:defRPr sz="1000" b="0">
+                <a:solidFill>
+                  <a:srgbClr val="B6C7D9"/>
+                </a:solidFill>
+                <a:latin typeface="Arial"/>
+              </a:defRPr>
+            </a:pPr>
+            <a:r>
+              <a:t>PUC MINAS  /  PROJETO DE SOFTWARE  /  LABORATÓRIO 3</a:t>
+            </a:r>
+          </a:p>
+        </p:txBody>
+      </p:sp>
+      <p:sp>
+        <p:nvSpPr>
+          <p:cNvPr id="9" name="TextBox 8"/>
+          <p:cNvSpPr txBox="1"/>
+          <p:nvPr/>
+        </p:nvSpPr>
+        <p:spPr>
+          <a:xfrm>
+            <a:off x="11239500" y="6438900"/>
+            <a:ext cx="508000" cy="327406"/>
+          </a:xfrm>
+          <a:prstGeom prst="rect">
+            <a:avLst/>
+          </a:prstGeom>
+          <a:noFill/>
+        </p:spPr>
+        <p:txBody>
+          <a:bodyPr wrap="none" lIns="0" rIns="0" tIns="0" bIns="0">
+            <a:spAutoFit/>
+          </a:bodyPr>
+          <a:lstStyle/>
+          <a:p>
+            <a:pPr>
+              <a:lnSpc>
+                <a:spcPct val="115000"/>
+              </a:lnSpc>
+              <a:spcAft>
+                <a:spcPts val="0"/>
+              </a:spcAft>
+              <a:defRPr sz="1400" b="1">
+                <a:solidFill>
+                  <a:srgbClr val="56D9B0"/>
+                </a:solidFill>
+                <a:latin typeface="Arial"/>
+              </a:defRPr>
+            </a:pPr>
+            <a:r>
+              <a:t>13</a:t>
+            </a:r>
+          </a:p>
+        </p:txBody>
+      </p:sp>
+      <p:sp>
+        <p:nvSpPr>
+          <p:cNvPr id="10" name="Rectangle 9"/>
+          <p:cNvSpPr/>
+          <p:nvPr/>
+        </p:nvSpPr>
+        <p:spPr>
+          <a:xfrm>
+            <a:off x="508000" y="2438400"/>
+            <a:ext cx="3589866" cy="3302000"/>
+          </a:xfrm>
+          <a:prstGeom prst="rect">
+            <a:avLst/>
+          </a:prstGeom>
+          <a:solidFill>
+            <a:srgbClr val="1B2D42"/>
+          </a:solidFill>
+          <a:ln>
+            <a:noFill/>
+          </a:ln>
+        </p:spPr>
+        <p:style>
+          <a:lnRef idx="1">
+            <a:schemeClr val="accent1"/>
+          </a:lnRef>
+          <a:fillRef idx="3">
+            <a:schemeClr val="accent1"/>
+          </a:fillRef>
+          <a:effectRef idx="2">
+            <a:schemeClr val="accent1"/>
+          </a:effectRef>
+          <a:fontRef idx="minor">
+            <a:schemeClr val="lt1"/>
+          </a:fontRef>
+        </p:style>
+        <p:txBody>
+          <a:bodyPr rtlCol="0" anchor="ctr"/>
+          <a:lstStyle/>
+          <a:p>
+            <a:pPr algn="ctr"/>
+          </a:p>
+        </p:txBody>
+      </p:sp>
+      <p:sp>
+        <p:nvSpPr>
+          <p:cNvPr id="11" name="TextBox 10"/>
+          <p:cNvSpPr txBox="1"/>
+          <p:nvPr/>
+        </p:nvSpPr>
+        <p:spPr>
+          <a:xfrm>
+            <a:off x="762000" y="2667000"/>
+            <a:ext cx="3081866" cy="456438"/>
+          </a:xfrm>
+          <a:prstGeom prst="rect">
+            <a:avLst/>
+          </a:prstGeom>
+          <a:noFill/>
+        </p:spPr>
+        <p:txBody>
+          <a:bodyPr wrap="none" lIns="0" rIns="0" tIns="0" bIns="0">
+            <a:spAutoFit/>
+          </a:bodyPr>
+          <a:lstStyle/>
+          <a:p>
+            <a:pPr>
+              <a:lnSpc>
+                <a:spcPct val="115000"/>
+              </a:lnSpc>
+              <a:spcAft>
+                <a:spcPts val="0"/>
+              </a:spcAft>
+              <a:defRPr sz="2200" b="1">
+                <a:solidFill>
+                  <a:srgbClr val="56D9B0"/>
+                </a:solidFill>
+                <a:latin typeface="Arial"/>
+              </a:defRPr>
+            </a:pPr>
+            <a:r>
+              <a:t>Entidade JPA</a:t>
+            </a:r>
+          </a:p>
+        </p:txBody>
+      </p:sp>
+      <p:sp>
+        <p:nvSpPr>
+          <p:cNvPr id="12" name="TextBox 11"/>
+          <p:cNvSpPr txBox="1"/>
+          <p:nvPr/>
+        </p:nvSpPr>
+        <p:spPr>
+          <a:xfrm>
+            <a:off x="762000" y="3327400"/>
+            <a:ext cx="3081866" cy="1633855"/>
+          </a:xfrm>
+          <a:prstGeom prst="rect">
+            <a:avLst/>
+          </a:prstGeom>
+          <a:noFill/>
+        </p:spPr>
+        <p:txBody>
+          <a:bodyPr wrap="none" lIns="0" rIns="0" tIns="0" bIns="0">
+            <a:spAutoFit/>
+          </a:bodyPr>
+          <a:lstStyle/>
+          <a:p>
+            <a:pPr>
+              <a:lnSpc>
+                <a:spcPct val="115000"/>
+              </a:lnSpc>
+              <a:spcAft>
+                <a:spcPts val="0"/>
+              </a:spcAft>
+              <a:defRPr sz="1900" b="0">
+                <a:solidFill>
+                  <a:srgbClr val="F4F7FA"/>
+                </a:solidFill>
+                <a:latin typeface="Arial"/>
+              </a:defRPr>
+            </a:pPr>
+            <a:r>
+              <a:t>Abrir Aluno.java.</a:t>
+            </a:r>
+          </a:p>
+          <a:p>
+            <a:pPr>
+              <a:lnSpc>
+                <a:spcPct val="115000"/>
+              </a:lnSpc>
+              <a:spcAft>
+                <a:spcPts val="0"/>
+              </a:spcAft>
+              <a:defRPr sz="1900" b="0">
+                <a:solidFill>
+                  <a:srgbClr val="F4F7FA"/>
+                </a:solidFill>
+                <a:latin typeface="Arial"/>
+              </a:defRPr>
+            </a:pPr>
+            <a:r>
+              <a:t>Localizar @Entity,</a:t>
+            </a:r>
+          </a:p>
+          <a:p>
+            <a:pPr>
+              <a:lnSpc>
+                <a:spcPct val="115000"/>
+              </a:lnSpc>
+              <a:spcAft>
+                <a:spcPts val="0"/>
+              </a:spcAft>
+              <a:defRPr sz="1900" b="0">
+                <a:solidFill>
+                  <a:srgbClr val="F4F7FA"/>
+                </a:solidFill>
+                <a:latin typeface="Arial"/>
+              </a:defRPr>
+            </a:pPr>
+            <a:r>
+              <a:t>identificador e relações</a:t>
+            </a:r>
+          </a:p>
+          <a:p>
+            <a:pPr>
+              <a:lnSpc>
+                <a:spcPct val="115000"/>
+              </a:lnSpc>
+              <a:spcAft>
+                <a:spcPts val="0"/>
+              </a:spcAft>
+              <a:defRPr sz="1900" b="0">
+                <a:solidFill>
+                  <a:srgbClr val="F4F7FA"/>
+                </a:solidFill>
+                <a:latin typeface="Arial"/>
+              </a:defRPr>
+            </a:pPr>
+            <a:r>
+              <a:t>com usuário e</a:t>
+            </a:r>
+          </a:p>
+          <a:p>
+            <a:pPr>
+              <a:lnSpc>
+                <a:spcPct val="115000"/>
+              </a:lnSpc>
+              <a:spcAft>
+                <a:spcPts val="0"/>
+              </a:spcAft>
+              <a:defRPr sz="1900" b="0">
+                <a:solidFill>
+                  <a:srgbClr val="F4F7FA"/>
+                </a:solidFill>
+                <a:latin typeface="Arial"/>
+              </a:defRPr>
+            </a:pPr>
+            <a:r>
+              <a:t>instituição.</a:t>
+            </a:r>
+          </a:p>
+        </p:txBody>
+      </p:sp>
+      <p:sp>
+        <p:nvSpPr>
+          <p:cNvPr id="13" name="Rectangle 12"/>
+          <p:cNvSpPr/>
+          <p:nvPr/>
+        </p:nvSpPr>
+        <p:spPr>
+          <a:xfrm>
+            <a:off x="4301066" y="2438400"/>
+            <a:ext cx="3589866" cy="3302000"/>
+          </a:xfrm>
+          <a:prstGeom prst="rect">
+            <a:avLst/>
+          </a:prstGeom>
+          <a:solidFill>
+            <a:srgbClr val="1B2D42"/>
+          </a:solidFill>
+          <a:ln>
+            <a:noFill/>
+          </a:ln>
+        </p:spPr>
+        <p:style>
+          <a:lnRef idx="1">
+            <a:schemeClr val="accent1"/>
+          </a:lnRef>
+          <a:fillRef idx="3">
+            <a:schemeClr val="accent1"/>
+          </a:fillRef>
+          <a:effectRef idx="2">
+            <a:schemeClr val="accent1"/>
+          </a:effectRef>
+          <a:fontRef idx="minor">
+            <a:schemeClr val="lt1"/>
+          </a:fontRef>
+        </p:style>
+        <p:txBody>
+          <a:bodyPr rtlCol="0" anchor="ctr"/>
+          <a:lstStyle/>
+          <a:p>
+            <a:pPr algn="ctr"/>
+          </a:p>
+        </p:txBody>
+      </p:sp>
+      <p:sp>
+        <p:nvSpPr>
+          <p:cNvPr id="14" name="TextBox 13"/>
+          <p:cNvSpPr txBox="1"/>
+          <p:nvPr/>
+        </p:nvSpPr>
+        <p:spPr>
+          <a:xfrm>
+            <a:off x="4555066" y="2667000"/>
+            <a:ext cx="3081866" cy="456438"/>
+          </a:xfrm>
+          <a:prstGeom prst="rect">
+            <a:avLst/>
+          </a:prstGeom>
+          <a:noFill/>
+        </p:spPr>
+        <p:txBody>
+          <a:bodyPr wrap="none" lIns="0" rIns="0" tIns="0" bIns="0">
+            <a:spAutoFit/>
+          </a:bodyPr>
+          <a:lstStyle/>
+          <a:p>
+            <a:pPr>
+              <a:lnSpc>
+                <a:spcPct val="115000"/>
+              </a:lnSpc>
+              <a:spcAft>
+                <a:spcPts val="0"/>
+              </a:spcAft>
+              <a:defRPr sz="2200" b="1">
+                <a:solidFill>
+                  <a:srgbClr val="56D9B0"/>
+                </a:solidFill>
+                <a:latin typeface="Arial"/>
+              </a:defRPr>
+            </a:pPr>
+            <a:r>
+              <a:t>Repository</a:t>
+            </a:r>
+          </a:p>
+        </p:txBody>
+      </p:sp>
+      <p:sp>
+        <p:nvSpPr>
+          <p:cNvPr id="15" name="TextBox 14"/>
+          <p:cNvSpPr txBox="1"/>
+          <p:nvPr/>
+        </p:nvSpPr>
+        <p:spPr>
+          <a:xfrm>
+            <a:off x="4555066" y="3327400"/>
+            <a:ext cx="3081866" cy="1327404"/>
+          </a:xfrm>
+          <a:prstGeom prst="rect">
+            <a:avLst/>
+          </a:prstGeom>
+          <a:noFill/>
+        </p:spPr>
+        <p:txBody>
+          <a:bodyPr wrap="none" lIns="0" rIns="0" tIns="0" bIns="0">
+            <a:spAutoFit/>
+          </a:bodyPr>
+          <a:lstStyle/>
+          <a:p>
+            <a:pPr>
+              <a:lnSpc>
+                <a:spcPct val="115000"/>
+              </a:lnSpc>
+              <a:spcAft>
+                <a:spcPts val="0"/>
+              </a:spcAft>
+              <a:defRPr sz="1900" b="0">
+                <a:solidFill>
+                  <a:srgbClr val="F4F7FA"/>
+                </a:solidFill>
+                <a:latin typeface="Arial"/>
+              </a:defRPr>
+            </a:pPr>
+            <a:r>
+              <a:t>Abrir AlunoRepository.</a:t>
+            </a:r>
+          </a:p>
+          <a:p>
+            <a:pPr>
+              <a:lnSpc>
+                <a:spcPct val="115000"/>
+              </a:lnSpc>
+              <a:spcAft>
+                <a:spcPts val="0"/>
+              </a:spcAft>
+              <a:defRPr sz="1900" b="0">
+                <a:solidFill>
+                  <a:srgbClr val="F4F7FA"/>
+                </a:solidFill>
+                <a:latin typeface="Arial"/>
+              </a:defRPr>
+            </a:pPr>
+            <a:r>
+              <a:t>JpaRepository fornece</a:t>
+            </a:r>
+          </a:p>
+          <a:p>
+            <a:pPr>
+              <a:lnSpc>
+                <a:spcPct val="115000"/>
+              </a:lnSpc>
+              <a:spcAft>
+                <a:spcPts val="0"/>
+              </a:spcAft>
+              <a:defRPr sz="1900" b="0">
+                <a:solidFill>
+                  <a:srgbClr val="F4F7FA"/>
+                </a:solidFill>
+                <a:latin typeface="Arial"/>
+              </a:defRPr>
+            </a:pPr>
+            <a:r>
+              <a:t>operações básicas sobre</a:t>
+            </a:r>
+          </a:p>
+          <a:p>
+            <a:pPr>
+              <a:lnSpc>
+                <a:spcPct val="115000"/>
+              </a:lnSpc>
+              <a:spcAft>
+                <a:spcPts val="0"/>
+              </a:spcAft>
+              <a:defRPr sz="1900" b="0">
+                <a:solidFill>
+                  <a:srgbClr val="F4F7FA"/>
+                </a:solidFill>
+                <a:latin typeface="Arial"/>
+              </a:defRPr>
+            </a:pPr>
+            <a:r>
+              <a:t>Aluno e UUID.</a:t>
+            </a:r>
+          </a:p>
+        </p:txBody>
+      </p:sp>
+      <p:sp>
+        <p:nvSpPr>
+          <p:cNvPr id="16" name="Rectangle 15"/>
+          <p:cNvSpPr/>
+          <p:nvPr/>
+        </p:nvSpPr>
+        <p:spPr>
+          <a:xfrm>
+            <a:off x="8094133" y="2438400"/>
+            <a:ext cx="3589866" cy="3302000"/>
+          </a:xfrm>
+          <a:prstGeom prst="rect">
+            <a:avLst/>
+          </a:prstGeom>
+          <a:solidFill>
+            <a:srgbClr val="1B2D42"/>
+          </a:solidFill>
+          <a:ln>
+            <a:noFill/>
+          </a:ln>
+        </p:spPr>
+        <p:style>
+          <a:lnRef idx="1">
+            <a:schemeClr val="accent1"/>
+          </a:lnRef>
+          <a:fillRef idx="3">
+            <a:schemeClr val="accent1"/>
+          </a:fillRef>
+          <a:effectRef idx="2">
+            <a:schemeClr val="accent1"/>
+          </a:effectRef>
+          <a:fontRef idx="minor">
+            <a:schemeClr val="lt1"/>
+          </a:fontRef>
+        </p:style>
+        <p:txBody>
+          <a:bodyPr rtlCol="0" anchor="ctr"/>
+          <a:lstStyle/>
+          <a:p>
+            <a:pPr algn="ctr"/>
+          </a:p>
+        </p:txBody>
+      </p:sp>
+      <p:sp>
+        <p:nvSpPr>
+          <p:cNvPr id="17" name="TextBox 16"/>
+          <p:cNvSpPr txBox="1"/>
+          <p:nvPr/>
+        </p:nvSpPr>
+        <p:spPr>
+          <a:xfrm>
+            <a:off x="8348133" y="2667000"/>
+            <a:ext cx="3081866" cy="456438"/>
+          </a:xfrm>
+          <a:prstGeom prst="rect">
+            <a:avLst/>
+          </a:prstGeom>
+          <a:noFill/>
+        </p:spPr>
+        <p:txBody>
+          <a:bodyPr wrap="none" lIns="0" rIns="0" tIns="0" bIns="0">
+            <a:spAutoFit/>
+          </a:bodyPr>
+          <a:lstStyle/>
+          <a:p>
+            <a:pPr>
+              <a:lnSpc>
+                <a:spcPct val="115000"/>
+              </a:lnSpc>
+              <a:spcAft>
+                <a:spcPts val="0"/>
+              </a:spcAft>
+              <a:defRPr sz="2200" b="1">
+                <a:solidFill>
+                  <a:srgbClr val="56D9B0"/>
+                </a:solidFill>
+                <a:latin typeface="Arial"/>
+              </a:defRPr>
+            </a:pPr>
+            <a:r>
+              <a:t>Migração SQL</a:t>
+            </a:r>
+          </a:p>
+        </p:txBody>
+      </p:sp>
+      <p:sp>
+        <p:nvSpPr>
+          <p:cNvPr id="18" name="TextBox 17"/>
+          <p:cNvSpPr txBox="1"/>
+          <p:nvPr/>
+        </p:nvSpPr>
+        <p:spPr>
+          <a:xfrm>
+            <a:off x="8348133" y="3327400"/>
+            <a:ext cx="3081866" cy="1327404"/>
+          </a:xfrm>
+          <a:prstGeom prst="rect">
+            <a:avLst/>
+          </a:prstGeom>
+          <a:noFill/>
+        </p:spPr>
+        <p:txBody>
+          <a:bodyPr wrap="none" lIns="0" rIns="0" tIns="0" bIns="0">
+            <a:spAutoFit/>
+          </a:bodyPr>
+          <a:lstStyle/>
+          <a:p>
+            <a:pPr>
+              <a:lnSpc>
+                <a:spcPct val="115000"/>
+              </a:lnSpc>
+              <a:spcAft>
+                <a:spcPts val="0"/>
+              </a:spcAft>
+              <a:defRPr sz="1900" b="0">
+                <a:solidFill>
+                  <a:srgbClr val="F4F7FA"/>
+                </a:solidFill>
+                <a:latin typeface="Arial"/>
+              </a:defRPr>
+            </a:pPr>
+            <a:r>
+              <a:t>Abrir V1__cadastros.sql.</a:t>
+            </a:r>
+          </a:p>
+          <a:p>
+            <a:pPr>
+              <a:lnSpc>
+                <a:spcPct val="115000"/>
+              </a:lnSpc>
+              <a:spcAft>
+                <a:spcPts val="0"/>
+              </a:spcAft>
+              <a:defRPr sz="1900" b="0">
+                <a:solidFill>
+                  <a:srgbClr val="F4F7FA"/>
+                </a:solidFill>
+                <a:latin typeface="Arial"/>
+              </a:defRPr>
+            </a:pPr>
+            <a:r>
+              <a:t>Comparar tabelas, chaves</a:t>
+            </a:r>
+          </a:p>
+          <a:p>
+            <a:pPr>
+              <a:lnSpc>
+                <a:spcPct val="115000"/>
+              </a:lnSpc>
+              <a:spcAft>
+                <a:spcPts val="0"/>
+              </a:spcAft>
+              <a:defRPr sz="1900" b="0">
+                <a:solidFill>
+                  <a:srgbClr val="F4F7FA"/>
+                </a:solidFill>
+                <a:latin typeface="Arial"/>
+              </a:defRPr>
+            </a:pPr>
+            <a:r>
+              <a:t>e restrições com as</a:t>
+            </a:r>
+          </a:p>
+          <a:p>
+            <a:pPr>
+              <a:lnSpc>
+                <a:spcPct val="115000"/>
+              </a:lnSpc>
+              <a:spcAft>
+                <a:spcPts val="0"/>
+              </a:spcAft>
+              <a:defRPr sz="1900" b="0">
+                <a:solidFill>
+                  <a:srgbClr val="F4F7FA"/>
+                </a:solidFill>
+                <a:latin typeface="Arial"/>
+              </a:defRPr>
+            </a:pPr>
+            <a:r>
+              <a:t>entidades.</a:t>
+            </a:r>
+          </a:p>
+        </p:txBody>
+      </p:sp>
+    </p:spTree>
+  </p:cSld>
+  <p:clrMapOvr>
+    <a:masterClrMapping/>
+  </p:clrMapOvr>
+</p:sld>
+</file>
+
+<file path=ppt/slides/slide14.xml><?xml version="1.0" encoding="utf-8"?>
+<p:sld xmlns:a="http://schemas.openxmlformats.org/drawingml/2006/main" xmlns:p="http://schemas.openxmlformats.org/presentationml/2006/main" xmlns:r="http://schemas.openxmlformats.org/officeDocument/2006/relationships">
+  <p:cSld>
+    <p:spTree>
+      <p:nvGrpSpPr>
+        <p:cNvPr id="1" name=""/>
+        <p:cNvGrpSpPr/>
+        <p:nvPr/>
+      </p:nvGrpSpPr>
+      <p:grpSpPr/>
+      <p:sp>
+        <p:nvSpPr>
+          <p:cNvPr id="2" name="Rectangle 1"/>
+          <p:cNvSpPr/>
+          <p:nvPr/>
+        </p:nvSpPr>
+        <p:spPr>
+          <a:xfrm>
+            <a:off x="0" y="0"/>
+            <a:ext cx="12192000" cy="6858000"/>
+          </a:xfrm>
+          <a:prstGeom prst="rect">
+            <a:avLst/>
+          </a:prstGeom>
+          <a:solidFill>
+            <a:srgbClr val="101D2C"/>
+          </a:solidFill>
+          <a:ln>
+            <a:noFill/>
+          </a:ln>
+        </p:spPr>
+        <p:style>
+          <a:lnRef idx="1">
+            <a:schemeClr val="accent1"/>
+          </a:lnRef>
+          <a:fillRef idx="3">
+            <a:schemeClr val="accent1"/>
+          </a:fillRef>
+          <a:effectRef idx="2">
+            <a:schemeClr val="accent1"/>
+          </a:effectRef>
+          <a:fontRef idx="minor">
+            <a:schemeClr val="lt1"/>
+          </a:fontRef>
+        </p:style>
+        <p:txBody>
+          <a:bodyPr rtlCol="0" anchor="ctr"/>
+          <a:lstStyle/>
+          <a:p>
+            <a:pPr algn="ctr"/>
+          </a:p>
+        </p:txBody>
+      </p:sp>
+      <p:sp>
+        <p:nvSpPr>
+          <p:cNvPr id="3" name="Rectangle 2"/>
+          <p:cNvSpPr/>
+          <p:nvPr/>
+        </p:nvSpPr>
+        <p:spPr>
+          <a:xfrm>
+            <a:off x="508000" y="482600"/>
+            <a:ext cx="444500" cy="50800"/>
+          </a:xfrm>
+          <a:prstGeom prst="rect">
+            <a:avLst/>
+          </a:prstGeom>
+          <a:solidFill>
+            <a:srgbClr val="56D9B0"/>
+          </a:solidFill>
+          <a:ln>
+            <a:noFill/>
+          </a:ln>
+        </p:spPr>
+        <p:style>
+          <a:lnRef idx="1">
+            <a:schemeClr val="accent1"/>
+          </a:lnRef>
+          <a:fillRef idx="3">
+            <a:schemeClr val="accent1"/>
+          </a:fillRef>
+          <a:effectRef idx="2">
+            <a:schemeClr val="accent1"/>
+          </a:effectRef>
+          <a:fontRef idx="minor">
+            <a:schemeClr val="lt1"/>
+          </a:fontRef>
+        </p:style>
+        <p:txBody>
+          <a:bodyPr rtlCol="0" anchor="ctr"/>
+          <a:lstStyle/>
+          <a:p>
+            <a:pPr algn="ctr"/>
+          </a:p>
+        </p:txBody>
+      </p:sp>
+      <p:sp>
+        <p:nvSpPr>
+          <p:cNvPr id="4" name="TextBox 3"/>
+          <p:cNvSpPr txBox="1"/>
+          <p:nvPr/>
+        </p:nvSpPr>
+        <p:spPr>
+          <a:xfrm>
+            <a:off x="1092200" y="355600"/>
+            <a:ext cx="10287000" cy="295148"/>
+          </a:xfrm>
+          <a:prstGeom prst="rect">
+            <a:avLst/>
+          </a:prstGeom>
+          <a:noFill/>
+        </p:spPr>
+        <p:txBody>
+          <a:bodyPr wrap="none" lIns="0" rIns="0" tIns="0" bIns="0">
+            <a:spAutoFit/>
+          </a:bodyPr>
+          <a:lstStyle/>
+          <a:p>
+            <a:pPr>
+              <a:lnSpc>
+                <a:spcPct val="115000"/>
+              </a:lnSpc>
+              <a:spcAft>
+                <a:spcPts val="0"/>
+              </a:spcAft>
+              <a:defRPr sz="1200" b="1">
+                <a:solidFill>
+                  <a:srgbClr val="56D9B0"/>
+                </a:solidFill>
+                <a:latin typeface="Arial"/>
+              </a:defRPr>
+            </a:pPr>
+            <a:r>
+              <a:t>TUTORIAL / 4 DE 4</a:t>
+            </a:r>
+          </a:p>
+        </p:txBody>
+      </p:sp>
+      <p:sp>
+        <p:nvSpPr>
+          <p:cNvPr id="5" name="TextBox 4"/>
+          <p:cNvSpPr txBox="1"/>
+          <p:nvPr/>
+        </p:nvSpPr>
+        <p:spPr>
+          <a:xfrm>
+            <a:off x="508000" y="914400"/>
+            <a:ext cx="11176000" cy="649986"/>
+          </a:xfrm>
+          <a:prstGeom prst="rect">
+            <a:avLst/>
+          </a:prstGeom>
+          <a:noFill/>
+        </p:spPr>
+        <p:txBody>
+          <a:bodyPr wrap="none" lIns="0" rIns="0" tIns="0" bIns="0">
+            <a:spAutoFit/>
+          </a:bodyPr>
+          <a:lstStyle/>
+          <a:p>
+            <a:pPr>
+              <a:lnSpc>
+                <a:spcPct val="115000"/>
+              </a:lnSpc>
+              <a:spcAft>
+                <a:spcPts val="0"/>
+              </a:spcAft>
+              <a:defRPr sz="3400" b="1">
+                <a:solidFill>
+                  <a:srgbClr val="F4F7FA"/>
+                </a:solidFill>
+                <a:latin typeface="Arial"/>
+              </a:defRPr>
+            </a:pPr>
+            <a:r>
+              <a:t>Docker e Mailpit: observar o email</a:t>
+            </a:r>
+          </a:p>
+        </p:txBody>
+      </p:sp>
+      <p:sp>
+        <p:nvSpPr>
+          <p:cNvPr id="6" name="TextBox 5"/>
+          <p:cNvSpPr txBox="1"/>
+          <p:nvPr/>
+        </p:nvSpPr>
+        <p:spPr>
+          <a:xfrm>
+            <a:off x="508000" y="1651000"/>
+            <a:ext cx="11176000" cy="391922"/>
+          </a:xfrm>
+          <a:prstGeom prst="rect">
+            <a:avLst/>
+          </a:prstGeom>
+          <a:noFill/>
+        </p:spPr>
+        <p:txBody>
+          <a:bodyPr wrap="none" lIns="0" rIns="0" tIns="0" bIns="0">
+            <a:spAutoFit/>
+          </a:bodyPr>
+          <a:lstStyle/>
+          <a:p>
+            <a:pPr>
+              <a:lnSpc>
+                <a:spcPct val="115000"/>
+              </a:lnSpc>
+              <a:spcAft>
+                <a:spcPts val="0"/>
+              </a:spcAft>
+              <a:defRPr sz="1800" b="0">
+                <a:solidFill>
+                  <a:srgbClr val="B6C7D9"/>
+                </a:solidFill>
+                <a:latin typeface="Arial"/>
+              </a:defRPr>
+            </a:pPr>
+            <a:r>
+              <a:t>Um ambiente local reproduzível para a demonstração.</a:t>
+            </a:r>
+          </a:p>
+        </p:txBody>
+      </p:sp>
+      <p:sp>
+        <p:nvSpPr>
+          <p:cNvPr id="7" name="Rectangle 6"/>
+          <p:cNvSpPr/>
+          <p:nvPr/>
+        </p:nvSpPr>
+        <p:spPr>
+          <a:xfrm>
+            <a:off x="508000" y="6299200"/>
+            <a:ext cx="11176000" cy="12700"/>
+          </a:xfrm>
+          <a:prstGeom prst="rect">
+            <a:avLst/>
+          </a:prstGeom>
+          <a:solidFill>
+            <a:srgbClr val="1B2D42"/>
+          </a:solidFill>
+          <a:ln>
+            <a:noFill/>
+          </a:ln>
+        </p:spPr>
+        <p:style>
+          <a:lnRef idx="1">
+            <a:schemeClr val="accent1"/>
+          </a:lnRef>
+          <a:fillRef idx="3">
+            <a:schemeClr val="accent1"/>
+          </a:fillRef>
+          <a:effectRef idx="2">
+            <a:schemeClr val="accent1"/>
+          </a:effectRef>
+          <a:fontRef idx="minor">
+            <a:schemeClr val="lt1"/>
+          </a:fontRef>
+        </p:style>
+        <p:txBody>
+          <a:bodyPr rtlCol="0" anchor="ctr"/>
+          <a:lstStyle/>
+          <a:p>
+            <a:pPr algn="ctr"/>
+          </a:p>
+        </p:txBody>
+      </p:sp>
+      <p:sp>
+        <p:nvSpPr>
+          <p:cNvPr id="8" name="TextBox 7"/>
+          <p:cNvSpPr txBox="1"/>
+          <p:nvPr/>
+        </p:nvSpPr>
+        <p:spPr>
+          <a:xfrm>
+            <a:off x="508000" y="6477000"/>
+            <a:ext cx="10414000" cy="262890"/>
+          </a:xfrm>
+          <a:prstGeom prst="rect">
+            <a:avLst/>
+          </a:prstGeom>
+          <a:noFill/>
+        </p:spPr>
+        <p:txBody>
+          <a:bodyPr wrap="none" lIns="0" rIns="0" tIns="0" bIns="0">
+            <a:spAutoFit/>
+          </a:bodyPr>
+          <a:lstStyle/>
+          <a:p>
+            <a:pPr>
+              <a:lnSpc>
+                <a:spcPct val="115000"/>
+              </a:lnSpc>
+              <a:spcAft>
+                <a:spcPts val="0"/>
+              </a:spcAft>
+              <a:defRPr sz="1000" b="0">
+                <a:solidFill>
+                  <a:srgbClr val="B6C7D9"/>
+                </a:solidFill>
+                <a:latin typeface="Arial"/>
+              </a:defRPr>
+            </a:pPr>
+            <a:r>
+              <a:t>PUC MINAS  /  PROJETO DE SOFTWARE  /  LABORATÓRIO 3</a:t>
+            </a:r>
+          </a:p>
+        </p:txBody>
+      </p:sp>
+      <p:sp>
+        <p:nvSpPr>
+          <p:cNvPr id="9" name="TextBox 8"/>
+          <p:cNvSpPr txBox="1"/>
+          <p:nvPr/>
+        </p:nvSpPr>
+        <p:spPr>
+          <a:xfrm>
+            <a:off x="11239500" y="6438900"/>
+            <a:ext cx="508000" cy="327406"/>
+          </a:xfrm>
+          <a:prstGeom prst="rect">
+            <a:avLst/>
+          </a:prstGeom>
+          <a:noFill/>
+        </p:spPr>
+        <p:txBody>
+          <a:bodyPr wrap="none" lIns="0" rIns="0" tIns="0" bIns="0">
+            <a:spAutoFit/>
+          </a:bodyPr>
+          <a:lstStyle/>
+          <a:p>
+            <a:pPr>
+              <a:lnSpc>
+                <a:spcPct val="115000"/>
+              </a:lnSpc>
+              <a:spcAft>
+                <a:spcPts val="0"/>
+              </a:spcAft>
+              <a:defRPr sz="1400" b="1">
+                <a:solidFill>
+                  <a:srgbClr val="56D9B0"/>
+                </a:solidFill>
+                <a:latin typeface="Arial"/>
+              </a:defRPr>
+            </a:pPr>
+            <a:r>
+              <a:t>14</a:t>
+            </a:r>
+          </a:p>
+        </p:txBody>
+      </p:sp>
+      <p:sp>
+        <p:nvSpPr>
+          <p:cNvPr id="10" name="Rectangle 9"/>
+          <p:cNvSpPr/>
+          <p:nvPr/>
+        </p:nvSpPr>
+        <p:spPr>
+          <a:xfrm>
+            <a:off x="508000" y="2349500"/>
+            <a:ext cx="11176000" cy="952500"/>
+          </a:xfrm>
+          <a:prstGeom prst="rect">
+            <a:avLst/>
+          </a:prstGeom>
+          <a:solidFill>
+            <a:srgbClr val="1B2D42"/>
+          </a:solidFill>
+          <a:ln>
+            <a:noFill/>
+          </a:ln>
+        </p:spPr>
+        <p:style>
+          <a:lnRef idx="1">
+            <a:schemeClr val="accent1"/>
+          </a:lnRef>
+          <a:fillRef idx="3">
+            <a:schemeClr val="accent1"/>
+          </a:fillRef>
+          <a:effectRef idx="2">
+            <a:schemeClr val="accent1"/>
+          </a:effectRef>
+          <a:fontRef idx="minor">
+            <a:schemeClr val="lt1"/>
+          </a:fontRef>
+        </p:style>
+        <p:txBody>
+          <a:bodyPr rtlCol="0" anchor="ctr"/>
+          <a:lstStyle/>
+          <a:p>
+            <a:pPr algn="ctr"/>
+          </a:p>
+        </p:txBody>
+      </p:sp>
+      <p:sp>
+        <p:nvSpPr>
+          <p:cNvPr id="11" name="TextBox 10"/>
+          <p:cNvSpPr txBox="1"/>
+          <p:nvPr/>
+        </p:nvSpPr>
+        <p:spPr>
+          <a:xfrm>
+            <a:off x="762000" y="2628900"/>
+            <a:ext cx="10668000" cy="504825"/>
+          </a:xfrm>
+          <a:prstGeom prst="rect">
+            <a:avLst/>
+          </a:prstGeom>
+          <a:noFill/>
+        </p:spPr>
+        <p:txBody>
+          <a:bodyPr wrap="none" lIns="0" rIns="0" tIns="0" bIns="0">
+            <a:spAutoFit/>
+          </a:bodyPr>
+          <a:lstStyle/>
+          <a:p>
+            <a:pPr>
+              <a:lnSpc>
+                <a:spcPct val="115000"/>
+              </a:lnSpc>
+              <a:spcAft>
+                <a:spcPts val="0"/>
+              </a:spcAft>
+              <a:defRPr sz="2500" b="1">
+                <a:solidFill>
+                  <a:srgbClr val="56D9B0"/>
+                </a:solidFill>
+                <a:latin typeface="Arial"/>
+              </a:defRPr>
+            </a:pPr>
+            <a:r>
+              <a:t>docker compose up -d db mailpit</a:t>
+            </a:r>
+          </a:p>
+        </p:txBody>
+      </p:sp>
+      <p:sp>
+        <p:nvSpPr>
+          <p:cNvPr id="12" name="Rectangle 11"/>
+          <p:cNvSpPr/>
+          <p:nvPr/>
+        </p:nvSpPr>
+        <p:spPr>
+          <a:xfrm>
+            <a:off x="508000" y="3581400"/>
+            <a:ext cx="3589866" cy="2501900"/>
+          </a:xfrm>
+          <a:prstGeom prst="rect">
+            <a:avLst/>
+          </a:prstGeom>
+          <a:solidFill>
+            <a:srgbClr val="1B2D42"/>
+          </a:solidFill>
+          <a:ln>
+            <a:noFill/>
+          </a:ln>
+        </p:spPr>
+        <p:style>
+          <a:lnRef idx="1">
+            <a:schemeClr val="accent1"/>
+          </a:lnRef>
+          <a:fillRef idx="3">
+            <a:schemeClr val="accent1"/>
+          </a:fillRef>
+          <a:effectRef idx="2">
+            <a:schemeClr val="accent1"/>
+          </a:effectRef>
+          <a:fontRef idx="minor">
+            <a:schemeClr val="lt1"/>
+          </a:fontRef>
+        </p:style>
+        <p:txBody>
+          <a:bodyPr rtlCol="0" anchor="ctr"/>
+          <a:lstStyle/>
+          <a:p>
+            <a:pPr algn="ctr"/>
+          </a:p>
+        </p:txBody>
+      </p:sp>
+      <p:sp>
+        <p:nvSpPr>
+          <p:cNvPr id="13" name="TextBox 12"/>
+          <p:cNvSpPr txBox="1"/>
+          <p:nvPr/>
+        </p:nvSpPr>
+        <p:spPr>
+          <a:xfrm>
+            <a:off x="762000" y="3810000"/>
+            <a:ext cx="3081866" cy="456438"/>
+          </a:xfrm>
+          <a:prstGeom prst="rect">
+            <a:avLst/>
+          </a:prstGeom>
+          <a:noFill/>
+        </p:spPr>
+        <p:txBody>
+          <a:bodyPr wrap="none" lIns="0" rIns="0" tIns="0" bIns="0">
+            <a:spAutoFit/>
+          </a:bodyPr>
+          <a:lstStyle/>
+          <a:p>
+            <a:pPr>
+              <a:lnSpc>
+                <a:spcPct val="115000"/>
+              </a:lnSpc>
+              <a:spcAft>
+                <a:spcPts val="0"/>
+              </a:spcAft>
+              <a:defRPr sz="2200" b="1">
+                <a:solidFill>
+                  <a:srgbClr val="56D9B0"/>
+                </a:solidFill>
+                <a:latin typeface="Arial"/>
+              </a:defRPr>
+            </a:pPr>
+            <a:r>
+              <a:t>Serviços locais</a:t>
+            </a:r>
+          </a:p>
+        </p:txBody>
+      </p:sp>
+      <p:sp>
+        <p:nvSpPr>
+          <p:cNvPr id="14" name="TextBox 13"/>
+          <p:cNvSpPr txBox="1"/>
+          <p:nvPr/>
+        </p:nvSpPr>
+        <p:spPr>
+          <a:xfrm>
+            <a:off x="762000" y="4470400"/>
+            <a:ext cx="3081866" cy="1020953"/>
+          </a:xfrm>
+          <a:prstGeom prst="rect">
+            <a:avLst/>
+          </a:prstGeom>
+          <a:noFill/>
+        </p:spPr>
+        <p:txBody>
+          <a:bodyPr wrap="none" lIns="0" rIns="0" tIns="0" bIns="0">
+            <a:spAutoFit/>
+          </a:bodyPr>
+          <a:lstStyle/>
+          <a:p>
+            <a:pPr>
+              <a:lnSpc>
+                <a:spcPct val="115000"/>
+              </a:lnSpc>
+              <a:spcAft>
+                <a:spcPts val="0"/>
+              </a:spcAft>
+              <a:defRPr sz="1900" b="0">
+                <a:solidFill>
+                  <a:srgbClr val="F4F7FA"/>
+                </a:solidFill>
+                <a:latin typeface="Arial"/>
+              </a:defRPr>
+            </a:pPr>
+            <a:r>
+              <a:t>compose.yaml define</a:t>
+            </a:r>
+          </a:p>
+          <a:p>
+            <a:pPr>
+              <a:lnSpc>
+                <a:spcPct val="115000"/>
+              </a:lnSpc>
+              <a:spcAft>
+                <a:spcPts val="0"/>
+              </a:spcAft>
+              <a:defRPr sz="1900" b="0">
+                <a:solidFill>
+                  <a:srgbClr val="F4F7FA"/>
+                </a:solidFill>
+                <a:latin typeface="Arial"/>
+              </a:defRPr>
+            </a:pPr>
+            <a:r>
+              <a:t>PostgreSQL e Mailpit.</a:t>
+            </a:r>
+          </a:p>
+          <a:p>
+            <a:pPr>
+              <a:lnSpc>
+                <a:spcPct val="115000"/>
+              </a:lnSpc>
+              <a:spcAft>
+                <a:spcPts val="0"/>
+              </a:spcAft>
+              <a:defRPr sz="1900" b="0">
+                <a:solidFill>
+                  <a:srgbClr val="F4F7FA"/>
+                </a:solidFill>
+                <a:latin typeface="Arial"/>
+              </a:defRPr>
+            </a:pPr>
+            <a:r>
+              <a:t>SMTP local: porta 1025.</a:t>
+            </a:r>
+          </a:p>
+        </p:txBody>
+      </p:sp>
+      <p:sp>
+        <p:nvSpPr>
+          <p:cNvPr id="15" name="Rectangle 14"/>
+          <p:cNvSpPr/>
+          <p:nvPr/>
+        </p:nvSpPr>
+        <p:spPr>
+          <a:xfrm>
+            <a:off x="4301066" y="3581400"/>
+            <a:ext cx="3589866" cy="2501900"/>
+          </a:xfrm>
+          <a:prstGeom prst="rect">
+            <a:avLst/>
+          </a:prstGeom>
+          <a:solidFill>
+            <a:srgbClr val="1B2D42"/>
+          </a:solidFill>
+          <a:ln>
+            <a:noFill/>
+          </a:ln>
+        </p:spPr>
+        <p:style>
+          <a:lnRef idx="1">
+            <a:schemeClr val="accent1"/>
+          </a:lnRef>
+          <a:fillRef idx="3">
+            <a:schemeClr val="accent1"/>
+          </a:fillRef>
+          <a:effectRef idx="2">
+            <a:schemeClr val="accent1"/>
+          </a:effectRef>
+          <a:fontRef idx="minor">
+            <a:schemeClr val="lt1"/>
+          </a:fontRef>
+        </p:style>
+        <p:txBody>
+          <a:bodyPr rtlCol="0" anchor="ctr"/>
+          <a:lstStyle/>
+          <a:p>
+            <a:pPr algn="ctr"/>
+          </a:p>
+        </p:txBody>
+      </p:sp>
+      <p:sp>
+        <p:nvSpPr>
+          <p:cNvPr id="16" name="TextBox 15"/>
+          <p:cNvSpPr txBox="1"/>
+          <p:nvPr/>
+        </p:nvSpPr>
+        <p:spPr>
+          <a:xfrm>
+            <a:off x="4555066" y="3810000"/>
+            <a:ext cx="3081866" cy="456438"/>
+          </a:xfrm>
+          <a:prstGeom prst="rect">
+            <a:avLst/>
+          </a:prstGeom>
+          <a:noFill/>
+        </p:spPr>
+        <p:txBody>
+          <a:bodyPr wrap="none" lIns="0" rIns="0" tIns="0" bIns="0">
+            <a:spAutoFit/>
+          </a:bodyPr>
+          <a:lstStyle/>
+          <a:p>
+            <a:pPr>
+              <a:lnSpc>
+                <a:spcPct val="115000"/>
+              </a:lnSpc>
+              <a:spcAft>
+                <a:spcPts val="0"/>
+              </a:spcAft>
+              <a:defRPr sz="2200" b="1">
+                <a:solidFill>
+                  <a:srgbClr val="56D9B0"/>
+                </a:solidFill>
+                <a:latin typeface="Arial"/>
+              </a:defRPr>
+            </a:pPr>
+            <a:r>
+              <a:t>Configuração</a:t>
+            </a:r>
+          </a:p>
+        </p:txBody>
+      </p:sp>
+      <p:sp>
+        <p:nvSpPr>
+          <p:cNvPr id="17" name="TextBox 16"/>
+          <p:cNvSpPr txBox="1"/>
+          <p:nvPr/>
+        </p:nvSpPr>
+        <p:spPr>
+          <a:xfrm>
+            <a:off x="4555066" y="4470400"/>
+            <a:ext cx="3081866" cy="1020953"/>
+          </a:xfrm>
+          <a:prstGeom prst="rect">
+            <a:avLst/>
+          </a:prstGeom>
+          <a:noFill/>
+        </p:spPr>
+        <p:txBody>
+          <a:bodyPr wrap="none" lIns="0" rIns="0" tIns="0" bIns="0">
+            <a:spAutoFit/>
+          </a:bodyPr>
+          <a:lstStyle/>
+          <a:p>
+            <a:pPr>
+              <a:lnSpc>
+                <a:spcPct val="115000"/>
+              </a:lnSpc>
+              <a:spcAft>
+                <a:spcPts val="0"/>
+              </a:spcAft>
+              <a:defRPr sz="1900" b="0">
+                <a:solidFill>
+                  <a:srgbClr val="F4F7FA"/>
+                </a:solidFill>
+                <a:latin typeface="Arial"/>
+              </a:defRPr>
+            </a:pPr>
+            <a:r>
+              <a:t>O backend usa SMTP_HOST</a:t>
+            </a:r>
+          </a:p>
+          <a:p>
+            <a:pPr>
+              <a:lnSpc>
+                <a:spcPct val="115000"/>
+              </a:lnSpc>
+              <a:spcAft>
+                <a:spcPts val="0"/>
+              </a:spcAft>
+              <a:defRPr sz="1900" b="0">
+                <a:solidFill>
+                  <a:srgbClr val="F4F7FA"/>
+                </a:solidFill>
+                <a:latin typeface="Arial"/>
+              </a:defRPr>
+            </a:pPr>
+            <a:r>
+              <a:t>e SMTP_PORT do ambiente.</a:t>
+            </a:r>
+          </a:p>
+          <a:p>
+            <a:pPr>
+              <a:lnSpc>
+                <a:spcPct val="115000"/>
+              </a:lnSpc>
+              <a:spcAft>
+                <a:spcPts val="0"/>
+              </a:spcAft>
+              <a:defRPr sz="1900" b="0">
+                <a:solidFill>
+                  <a:srgbClr val="F4F7FA"/>
+                </a:solidFill>
+                <a:latin typeface="Arial"/>
+              </a:defRPr>
+            </a:pPr>
+            <a:r>
+              <a:t>Não exibir senhas.</a:t>
+            </a:r>
+          </a:p>
+        </p:txBody>
+      </p:sp>
+      <p:sp>
+        <p:nvSpPr>
+          <p:cNvPr id="18" name="Rectangle 17"/>
+          <p:cNvSpPr/>
+          <p:nvPr/>
+        </p:nvSpPr>
+        <p:spPr>
+          <a:xfrm>
+            <a:off x="8094133" y="3581400"/>
+            <a:ext cx="3589866" cy="2501900"/>
+          </a:xfrm>
+          <a:prstGeom prst="rect">
+            <a:avLst/>
+          </a:prstGeom>
+          <a:solidFill>
+            <a:srgbClr val="1B2D42"/>
+          </a:solidFill>
+          <a:ln>
+            <a:noFill/>
+          </a:ln>
+        </p:spPr>
+        <p:style>
+          <a:lnRef idx="1">
+            <a:schemeClr val="accent1"/>
+          </a:lnRef>
+          <a:fillRef idx="3">
+            <a:schemeClr val="accent1"/>
+          </a:fillRef>
+          <a:effectRef idx="2">
+            <a:schemeClr val="accent1"/>
+          </a:effectRef>
+          <a:fontRef idx="minor">
+            <a:schemeClr val="lt1"/>
+          </a:fontRef>
+        </p:style>
+        <p:txBody>
+          <a:bodyPr rtlCol="0" anchor="ctr"/>
+          <a:lstStyle/>
+          <a:p>
+            <a:pPr algn="ctr"/>
+          </a:p>
+        </p:txBody>
+      </p:sp>
+      <p:sp>
+        <p:nvSpPr>
+          <p:cNvPr id="19" name="TextBox 18"/>
+          <p:cNvSpPr txBox="1"/>
+          <p:nvPr/>
+        </p:nvSpPr>
+        <p:spPr>
+          <a:xfrm>
+            <a:off x="8348133" y="3810000"/>
+            <a:ext cx="3081866" cy="456438"/>
+          </a:xfrm>
+          <a:prstGeom prst="rect">
+            <a:avLst/>
+          </a:prstGeom>
+          <a:noFill/>
+        </p:spPr>
+        <p:txBody>
+          <a:bodyPr wrap="none" lIns="0" rIns="0" tIns="0" bIns="0">
+            <a:spAutoFit/>
+          </a:bodyPr>
+          <a:lstStyle/>
+          <a:p>
+            <a:pPr>
+              <a:lnSpc>
+                <a:spcPct val="115000"/>
+              </a:lnSpc>
+              <a:spcAft>
+                <a:spcPts val="0"/>
+              </a:spcAft>
+              <a:defRPr sz="2200" b="1">
+                <a:solidFill>
+                  <a:srgbClr val="56D9B0"/>
+                </a:solidFill>
+                <a:latin typeface="Arial"/>
+              </a:defRPr>
+            </a:pPr>
+            <a:r>
+              <a:t>Conferência</a:t>
+            </a:r>
+          </a:p>
+        </p:txBody>
+      </p:sp>
+      <p:sp>
+        <p:nvSpPr>
+          <p:cNvPr id="20" name="TextBox 19"/>
+          <p:cNvSpPr txBox="1"/>
+          <p:nvPr/>
+        </p:nvSpPr>
+        <p:spPr>
+          <a:xfrm>
+            <a:off x="8348133" y="4470400"/>
+            <a:ext cx="3081866" cy="1327404"/>
+          </a:xfrm>
+          <a:prstGeom prst="rect">
+            <a:avLst/>
+          </a:prstGeom>
+          <a:noFill/>
+        </p:spPr>
+        <p:txBody>
+          <a:bodyPr wrap="none" lIns="0" rIns="0" tIns="0" bIns="0">
+            <a:spAutoFit/>
+          </a:bodyPr>
+          <a:lstStyle/>
+          <a:p>
+            <a:pPr>
+              <a:lnSpc>
+                <a:spcPct val="115000"/>
+              </a:lnSpc>
+              <a:spcAft>
+                <a:spcPts val="0"/>
+              </a:spcAft>
+              <a:defRPr sz="1900" b="0">
+                <a:solidFill>
+                  <a:srgbClr val="F4F7FA"/>
+                </a:solidFill>
+                <a:latin typeface="Arial"/>
+              </a:defRPr>
+            </a:pPr>
+            <a:r>
+              <a:t>Abrir localhost:8025.</a:t>
+            </a:r>
+          </a:p>
+          <a:p>
+            <a:pPr>
+              <a:lnSpc>
+                <a:spcPct val="115000"/>
+              </a:lnSpc>
+              <a:spcAft>
+                <a:spcPts val="0"/>
+              </a:spcAft>
+              <a:defRPr sz="1900" b="0">
+                <a:solidFill>
+                  <a:srgbClr val="F4F7FA"/>
+                </a:solidFill>
+                <a:latin typeface="Arial"/>
+              </a:defRPr>
+            </a:pPr>
+            <a:r>
+              <a:t>Reconhecer um aluno e</a:t>
+            </a:r>
+          </a:p>
+          <a:p>
+            <a:pPr>
+              <a:lnSpc>
+                <a:spcPct val="115000"/>
+              </a:lnSpc>
+              <a:spcAft>
+                <a:spcPts val="0"/>
+              </a:spcAft>
+              <a:defRPr sz="1900" b="0">
+                <a:solidFill>
+                  <a:srgbClr val="F4F7FA"/>
+                </a:solidFill>
+                <a:latin typeface="Arial"/>
+              </a:defRPr>
+            </a:pPr>
+            <a:r>
+              <a:t>observar a notificação</a:t>
+            </a:r>
+          </a:p>
+          <a:p>
+            <a:pPr>
+              <a:lnSpc>
+                <a:spcPct val="115000"/>
+              </a:lnSpc>
+              <a:spcAft>
+                <a:spcPts val="0"/>
+              </a:spcAft>
+              <a:defRPr sz="1900" b="0">
+                <a:solidFill>
+                  <a:srgbClr val="F4F7FA"/>
+                </a:solidFill>
+                <a:latin typeface="Arial"/>
+              </a:defRPr>
+            </a:pPr>
+            <a:r>
+              <a:t>recebida.</a:t>
+            </a:r>
+          </a:p>
+        </p:txBody>
+      </p:sp>
+    </p:spTree>
+  </p:cSld>
+  <p:clrMapOvr>
+    <a:masterClrMapping/>
+  </p:clrMapOvr>
+</p:sld>
+</file>
+
+<file path=ppt/slides/slide15.xml><?xml version="1.0" encoding="utf-8"?>
+<p:sld xmlns:a="http://schemas.openxmlformats.org/drawingml/2006/main" xmlns:p="http://schemas.openxmlformats.org/presentationml/2006/main" xmlns:r="http://schemas.openxmlformats.org/officeDocument/2006/relationships">
+  <p:cSld>
+    <p:spTree>
+      <p:nvGrpSpPr>
+        <p:cNvPr id="1" name=""/>
+        <p:cNvGrpSpPr/>
+        <p:nvPr/>
+      </p:nvGrpSpPr>
+      <p:grpSpPr/>
+      <p:sp>
+        <p:nvSpPr>
+          <p:cNvPr id="2" name="Rectangle 1"/>
+          <p:cNvSpPr/>
+          <p:nvPr/>
+        </p:nvSpPr>
+        <p:spPr>
+          <a:xfrm>
+            <a:off x="0" y="0"/>
+            <a:ext cx="12192000" cy="6858000"/>
+          </a:xfrm>
+          <a:prstGeom prst="rect">
+            <a:avLst/>
+          </a:prstGeom>
+          <a:solidFill>
+            <a:srgbClr val="101D2C"/>
+          </a:solidFill>
+          <a:ln>
+            <a:noFill/>
+          </a:ln>
+        </p:spPr>
+        <p:style>
+          <a:lnRef idx="1">
+            <a:schemeClr val="accent1"/>
+          </a:lnRef>
+          <a:fillRef idx="3">
+            <a:schemeClr val="accent1"/>
+          </a:fillRef>
+          <a:effectRef idx="2">
+            <a:schemeClr val="accent1"/>
+          </a:effectRef>
+          <a:fontRef idx="minor">
+            <a:schemeClr val="lt1"/>
+          </a:fontRef>
+        </p:style>
+        <p:txBody>
+          <a:bodyPr rtlCol="0" anchor="ctr"/>
+          <a:lstStyle/>
+          <a:p>
+            <a:pPr algn="ctr"/>
+          </a:p>
+        </p:txBody>
+      </p:sp>
+      <p:sp>
+        <p:nvSpPr>
+          <p:cNvPr id="3" name="Rectangle 2"/>
+          <p:cNvSpPr/>
+          <p:nvPr/>
+        </p:nvSpPr>
+        <p:spPr>
+          <a:xfrm>
+            <a:off x="508000" y="482600"/>
+            <a:ext cx="444500" cy="50800"/>
+          </a:xfrm>
+          <a:prstGeom prst="rect">
+            <a:avLst/>
+          </a:prstGeom>
+          <a:solidFill>
+            <a:srgbClr val="56D9B0"/>
+          </a:solidFill>
+          <a:ln>
+            <a:noFill/>
+          </a:ln>
+        </p:spPr>
+        <p:style>
+          <a:lnRef idx="1">
+            <a:schemeClr val="accent1"/>
+          </a:lnRef>
+          <a:fillRef idx="3">
+            <a:schemeClr val="accent1"/>
+          </a:fillRef>
+          <a:effectRef idx="2">
+            <a:schemeClr val="accent1"/>
+          </a:effectRef>
+          <a:fontRef idx="minor">
+            <a:schemeClr val="lt1"/>
+          </a:fontRef>
+        </p:style>
+        <p:txBody>
+          <a:bodyPr rtlCol="0" anchor="ctr"/>
+          <a:lstStyle/>
+          <a:p>
+            <a:pPr algn="ctr"/>
+          </a:p>
+        </p:txBody>
+      </p:sp>
+      <p:sp>
+        <p:nvSpPr>
+          <p:cNvPr id="4" name="TextBox 3"/>
+          <p:cNvSpPr txBox="1"/>
+          <p:nvPr/>
+        </p:nvSpPr>
+        <p:spPr>
+          <a:xfrm>
+            <a:off x="1092200" y="355600"/>
+            <a:ext cx="10287000" cy="295148"/>
+          </a:xfrm>
+          <a:prstGeom prst="rect">
+            <a:avLst/>
+          </a:prstGeom>
+          <a:noFill/>
+        </p:spPr>
+        <p:txBody>
+          <a:bodyPr wrap="none" lIns="0" rIns="0" tIns="0" bIns="0">
+            <a:spAutoFit/>
+          </a:bodyPr>
+          <a:lstStyle/>
+          <a:p>
+            <a:pPr>
+              <a:lnSpc>
+                <a:spcPct val="115000"/>
+              </a:lnSpc>
+              <a:spcAft>
+                <a:spcPts val="0"/>
+              </a:spcAft>
+              <a:defRPr sz="1200" b="1">
+                <a:solidFill>
+                  <a:srgbClr val="56D9B0"/>
+                </a:solidFill>
+                <a:latin typeface="Arial"/>
+              </a:defRPr>
+            </a:pPr>
+            <a:r>
+              <a:t>DEMONSTRAÇÃO AO VIVO</a:t>
+            </a:r>
+          </a:p>
+        </p:txBody>
+      </p:sp>
+      <p:sp>
+        <p:nvSpPr>
+          <p:cNvPr id="5" name="TextBox 4"/>
+          <p:cNvSpPr txBox="1"/>
+          <p:nvPr/>
+        </p:nvSpPr>
+        <p:spPr>
+          <a:xfrm>
+            <a:off x="508000" y="914400"/>
+            <a:ext cx="11176000" cy="649986"/>
+          </a:xfrm>
+          <a:prstGeom prst="rect">
+            <a:avLst/>
+          </a:prstGeom>
+          <a:noFill/>
+        </p:spPr>
+        <p:txBody>
+          <a:bodyPr wrap="none" lIns="0" rIns="0" tIns="0" bIns="0">
+            <a:spAutoFit/>
+          </a:bodyPr>
+          <a:lstStyle/>
+          <a:p>
+            <a:pPr>
+              <a:lnSpc>
+                <a:spcPct val="115000"/>
+              </a:lnSpc>
+              <a:spcAft>
+                <a:spcPts val="0"/>
+              </a:spcAft>
+              <a:defRPr sz="3400" b="1">
+                <a:solidFill>
+                  <a:srgbClr val="F4F7FA"/>
+                </a:solidFill>
+                <a:latin typeface="Arial"/>
+              </a:defRPr>
+            </a:pPr>
+            <a:r>
+              <a:t>Percorrer o ciclo na aplicação</a:t>
+            </a:r>
+          </a:p>
+        </p:txBody>
+      </p:sp>
+      <p:sp>
+        <p:nvSpPr>
+          <p:cNvPr id="6" name="TextBox 5"/>
+          <p:cNvSpPr txBox="1"/>
+          <p:nvPr/>
+        </p:nvSpPr>
+        <p:spPr>
+          <a:xfrm>
+            <a:off x="508000" y="1651000"/>
+            <a:ext cx="11176000" cy="391922"/>
+          </a:xfrm>
+          <a:prstGeom prst="rect">
+            <a:avLst/>
+          </a:prstGeom>
+          <a:noFill/>
+        </p:spPr>
+        <p:txBody>
+          <a:bodyPr wrap="none" lIns="0" rIns="0" tIns="0" bIns="0">
+            <a:spAutoFit/>
+          </a:bodyPr>
+          <a:lstStyle/>
+          <a:p>
+            <a:pPr>
+              <a:lnSpc>
+                <a:spcPct val="115000"/>
+              </a:lnSpc>
+              <a:spcAft>
+                <a:spcPts val="0"/>
+              </a:spcAft>
+              <a:defRPr sz="1800" b="0">
+                <a:solidFill>
+                  <a:srgbClr val="B6C7D9"/>
+                </a:solidFill>
+                <a:latin typeface="Arial"/>
+              </a:defRPr>
+            </a:pPr>
+            <a:r>
+              <a:t>Aplicação: localhost:5173  ·  Emails: localhost:8025</a:t>
+            </a:r>
+          </a:p>
+        </p:txBody>
+      </p:sp>
+      <p:sp>
+        <p:nvSpPr>
+          <p:cNvPr id="7" name="Rectangle 6"/>
+          <p:cNvSpPr/>
+          <p:nvPr/>
+        </p:nvSpPr>
+        <p:spPr>
+          <a:xfrm>
+            <a:off x="508000" y="6299200"/>
+            <a:ext cx="11176000" cy="12700"/>
+          </a:xfrm>
+          <a:prstGeom prst="rect">
+            <a:avLst/>
+          </a:prstGeom>
+          <a:solidFill>
+            <a:srgbClr val="1B2D42"/>
+          </a:solidFill>
+          <a:ln>
+            <a:noFill/>
+          </a:ln>
+        </p:spPr>
+        <p:style>
+          <a:lnRef idx="1">
+            <a:schemeClr val="accent1"/>
+          </a:lnRef>
+          <a:fillRef idx="3">
+            <a:schemeClr val="accent1"/>
+          </a:fillRef>
+          <a:effectRef idx="2">
+            <a:schemeClr val="accent1"/>
+          </a:effectRef>
+          <a:fontRef idx="minor">
+            <a:schemeClr val="lt1"/>
+          </a:fontRef>
+        </p:style>
+        <p:txBody>
+          <a:bodyPr rtlCol="0" anchor="ctr"/>
+          <a:lstStyle/>
+          <a:p>
+            <a:pPr algn="ctr"/>
+          </a:p>
+        </p:txBody>
+      </p:sp>
+      <p:sp>
+        <p:nvSpPr>
+          <p:cNvPr id="8" name="TextBox 7"/>
+          <p:cNvSpPr txBox="1"/>
+          <p:nvPr/>
+        </p:nvSpPr>
+        <p:spPr>
+          <a:xfrm>
+            <a:off x="508000" y="6477000"/>
+            <a:ext cx="10414000" cy="262890"/>
+          </a:xfrm>
+          <a:prstGeom prst="rect">
+            <a:avLst/>
+          </a:prstGeom>
+          <a:noFill/>
+        </p:spPr>
+        <p:txBody>
+          <a:bodyPr wrap="none" lIns="0" rIns="0" tIns="0" bIns="0">
+            <a:spAutoFit/>
+          </a:bodyPr>
+          <a:lstStyle/>
+          <a:p>
+            <a:pPr>
+              <a:lnSpc>
+                <a:spcPct val="115000"/>
+              </a:lnSpc>
+              <a:spcAft>
+                <a:spcPts val="0"/>
+              </a:spcAft>
+              <a:defRPr sz="1000" b="0">
+                <a:solidFill>
+                  <a:srgbClr val="B6C7D9"/>
+                </a:solidFill>
+                <a:latin typeface="Arial"/>
+              </a:defRPr>
+            </a:pPr>
+            <a:r>
+              <a:t>PUC MINAS  /  PROJETO DE SOFTWARE  /  LABORATÓRIO 3</a:t>
+            </a:r>
+          </a:p>
+        </p:txBody>
+      </p:sp>
+      <p:sp>
+        <p:nvSpPr>
+          <p:cNvPr id="9" name="TextBox 8"/>
+          <p:cNvSpPr txBox="1"/>
+          <p:nvPr/>
+        </p:nvSpPr>
+        <p:spPr>
+          <a:xfrm>
+            <a:off x="11239500" y="6438900"/>
+            <a:ext cx="508000" cy="327406"/>
+          </a:xfrm>
+          <a:prstGeom prst="rect">
+            <a:avLst/>
+          </a:prstGeom>
+          <a:noFill/>
+        </p:spPr>
+        <p:txBody>
+          <a:bodyPr wrap="none" lIns="0" rIns="0" tIns="0" bIns="0">
+            <a:spAutoFit/>
+          </a:bodyPr>
+          <a:lstStyle/>
+          <a:p>
+            <a:pPr>
+              <a:lnSpc>
+                <a:spcPct val="115000"/>
+              </a:lnSpc>
+              <a:spcAft>
+                <a:spcPts val="0"/>
+              </a:spcAft>
+              <a:defRPr sz="1400" b="1">
+                <a:solidFill>
+                  <a:srgbClr val="56D9B0"/>
+                </a:solidFill>
+                <a:latin typeface="Arial"/>
+              </a:defRPr>
+            </a:pPr>
+            <a:r>
+              <a:t>15</a:t>
+            </a:r>
+          </a:p>
+        </p:txBody>
+      </p:sp>
+      <p:sp>
+        <p:nvSpPr>
+          <p:cNvPr id="10" name="TextBox 9"/>
+          <p:cNvSpPr txBox="1"/>
+          <p:nvPr/>
+        </p:nvSpPr>
+        <p:spPr>
+          <a:xfrm>
+            <a:off x="508000" y="2298700"/>
+            <a:ext cx="698500" cy="520954"/>
+          </a:xfrm>
+          <a:prstGeom prst="rect">
+            <a:avLst/>
+          </a:prstGeom>
+          <a:noFill/>
+        </p:spPr>
+        <p:txBody>
+          <a:bodyPr wrap="none" lIns="0" rIns="0" tIns="0" bIns="0">
+            <a:spAutoFit/>
+          </a:bodyPr>
+          <a:lstStyle/>
+          <a:p>
+            <a:pPr>
+              <a:lnSpc>
+                <a:spcPct val="115000"/>
+              </a:lnSpc>
+              <a:spcAft>
+                <a:spcPts val="0"/>
+              </a:spcAft>
+              <a:defRPr sz="2600" b="1">
+                <a:solidFill>
+                  <a:srgbClr val="56D9B0"/>
+                </a:solidFill>
+                <a:latin typeface="Arial"/>
+              </a:defRPr>
+            </a:pPr>
+            <a:r>
+              <a:t>01</a:t>
+            </a:r>
+          </a:p>
+        </p:txBody>
+      </p:sp>
+      <p:sp>
+        <p:nvSpPr>
+          <p:cNvPr id="11" name="TextBox 10"/>
+          <p:cNvSpPr txBox="1"/>
+          <p:nvPr/>
+        </p:nvSpPr>
+        <p:spPr>
+          <a:xfrm>
+            <a:off x="1333500" y="2298700"/>
+            <a:ext cx="3111500" cy="440309"/>
+          </a:xfrm>
+          <a:prstGeom prst="rect">
+            <a:avLst/>
+          </a:prstGeom>
+          <a:noFill/>
+        </p:spPr>
+        <p:txBody>
+          <a:bodyPr wrap="none" lIns="0" rIns="0" tIns="0" bIns="0">
+            <a:spAutoFit/>
+          </a:bodyPr>
+          <a:lstStyle/>
+          <a:p>
+            <a:pPr>
+              <a:lnSpc>
+                <a:spcPct val="115000"/>
+              </a:lnSpc>
+              <a:spcAft>
+                <a:spcPts val="0"/>
+              </a:spcAft>
+              <a:defRPr sz="2100" b="1">
+                <a:solidFill>
+                  <a:srgbClr val="F4F7FA"/>
+                </a:solidFill>
+                <a:latin typeface="Arial"/>
+              </a:defRPr>
+            </a:pPr>
+            <a:r>
+              <a:t>Aluno e empresa</a:t>
+            </a:r>
+          </a:p>
+        </p:txBody>
+      </p:sp>
+      <p:sp>
+        <p:nvSpPr>
+          <p:cNvPr id="12" name="TextBox 11"/>
+          <p:cNvSpPr txBox="1"/>
+          <p:nvPr/>
+        </p:nvSpPr>
+        <p:spPr>
+          <a:xfrm>
+            <a:off x="4572000" y="2298700"/>
+            <a:ext cx="6985000" cy="714502"/>
+          </a:xfrm>
+          <a:prstGeom prst="rect">
+            <a:avLst/>
+          </a:prstGeom>
+          <a:noFill/>
+        </p:spPr>
+        <p:txBody>
+          <a:bodyPr wrap="none" lIns="0" rIns="0" tIns="0" bIns="0">
+            <a:spAutoFit/>
+          </a:bodyPr>
+          <a:lstStyle/>
+          <a:p>
+            <a:pPr>
+              <a:lnSpc>
+                <a:spcPct val="115000"/>
+              </a:lnSpc>
+              <a:spcAft>
+                <a:spcPts val="0"/>
+              </a:spcAft>
+              <a:defRPr sz="1900" b="0">
+                <a:solidFill>
+                  <a:srgbClr val="B6C7D9"/>
+                </a:solidFill>
+                <a:latin typeface="Arial"/>
+              </a:defRPr>
+            </a:pPr>
+            <a:r>
+              <a:t>Criar, consultar e editar os dois perfis; publicar</a:t>
+            </a:r>
+          </a:p>
+          <a:p>
+            <a:pPr>
+              <a:lnSpc>
+                <a:spcPct val="115000"/>
+              </a:lnSpc>
+              <a:spcAft>
+                <a:spcPts val="0"/>
+              </a:spcAft>
+              <a:defRPr sz="1900" b="0">
+                <a:solidFill>
+                  <a:srgbClr val="B6C7D9"/>
+                </a:solidFill>
+                <a:latin typeface="Arial"/>
+              </a:defRPr>
+            </a:pPr>
+            <a:r>
+              <a:t>vantagem.</a:t>
+            </a:r>
+          </a:p>
+        </p:txBody>
+      </p:sp>
+      <p:sp>
+        <p:nvSpPr>
+          <p:cNvPr id="13" name="TextBox 12"/>
+          <p:cNvSpPr txBox="1"/>
+          <p:nvPr/>
+        </p:nvSpPr>
+        <p:spPr>
+          <a:xfrm>
+            <a:off x="508000" y="3213100"/>
+            <a:ext cx="698500" cy="520954"/>
+          </a:xfrm>
+          <a:prstGeom prst="rect">
+            <a:avLst/>
+          </a:prstGeom>
+          <a:noFill/>
+        </p:spPr>
+        <p:txBody>
+          <a:bodyPr wrap="none" lIns="0" rIns="0" tIns="0" bIns="0">
+            <a:spAutoFit/>
+          </a:bodyPr>
+          <a:lstStyle/>
+          <a:p>
+            <a:pPr>
+              <a:lnSpc>
+                <a:spcPct val="115000"/>
+              </a:lnSpc>
+              <a:spcAft>
+                <a:spcPts val="0"/>
+              </a:spcAft>
+              <a:defRPr sz="2600" b="1">
+                <a:solidFill>
+                  <a:srgbClr val="56D9B0"/>
+                </a:solidFill>
+                <a:latin typeface="Arial"/>
+              </a:defRPr>
+            </a:pPr>
+            <a:r>
+              <a:t>02</a:t>
+            </a:r>
+          </a:p>
+        </p:txBody>
+      </p:sp>
+      <p:sp>
+        <p:nvSpPr>
+          <p:cNvPr id="14" name="TextBox 13"/>
+          <p:cNvSpPr txBox="1"/>
+          <p:nvPr/>
+        </p:nvSpPr>
+        <p:spPr>
+          <a:xfrm>
+            <a:off x="1333500" y="3213100"/>
+            <a:ext cx="3111500" cy="440309"/>
+          </a:xfrm>
+          <a:prstGeom prst="rect">
+            <a:avLst/>
+          </a:prstGeom>
+          <a:noFill/>
+        </p:spPr>
+        <p:txBody>
+          <a:bodyPr wrap="none" lIns="0" rIns="0" tIns="0" bIns="0">
+            <a:spAutoFit/>
+          </a:bodyPr>
+          <a:lstStyle/>
+          <a:p>
+            <a:pPr>
+              <a:lnSpc>
+                <a:spcPct val="115000"/>
+              </a:lnSpc>
+              <a:spcAft>
+                <a:spcPts val="0"/>
+              </a:spcAft>
+              <a:defRPr sz="2100" b="1">
+                <a:solidFill>
+                  <a:srgbClr val="F4F7FA"/>
+                </a:solidFill>
+                <a:latin typeface="Arial"/>
+              </a:defRPr>
+            </a:pPr>
+            <a:r>
+              <a:t>Professor</a:t>
+            </a:r>
+          </a:p>
+        </p:txBody>
+      </p:sp>
+      <p:sp>
+        <p:nvSpPr>
+          <p:cNvPr id="15" name="TextBox 14"/>
+          <p:cNvSpPr txBox="1"/>
+          <p:nvPr/>
+        </p:nvSpPr>
+        <p:spPr>
+          <a:xfrm>
+            <a:off x="4572000" y="3213100"/>
+            <a:ext cx="6985000" cy="408050"/>
+          </a:xfrm>
+          <a:prstGeom prst="rect">
+            <a:avLst/>
+          </a:prstGeom>
+          <a:noFill/>
+        </p:spPr>
+        <p:txBody>
+          <a:bodyPr wrap="none" lIns="0" rIns="0" tIns="0" bIns="0">
+            <a:spAutoFit/>
+          </a:bodyPr>
+          <a:lstStyle/>
+          <a:p>
+            <a:pPr>
+              <a:lnSpc>
+                <a:spcPct val="115000"/>
+              </a:lnSpc>
+              <a:spcAft>
+                <a:spcPts val="0"/>
+              </a:spcAft>
+              <a:defRPr sz="1900" b="0">
+                <a:solidFill>
+                  <a:srgbClr val="B6C7D9"/>
+                </a:solidFill>
+                <a:latin typeface="Arial"/>
+              </a:defRPr>
+            </a:pPr>
+            <a:r>
+              <a:t>Entrar, escolher aluno e enviar moedas com um motivo.</a:t>
+            </a:r>
+          </a:p>
+        </p:txBody>
+      </p:sp>
+      <p:sp>
+        <p:nvSpPr>
+          <p:cNvPr id="16" name="TextBox 15"/>
+          <p:cNvSpPr txBox="1"/>
+          <p:nvPr/>
+        </p:nvSpPr>
+        <p:spPr>
+          <a:xfrm>
+            <a:off x="508000" y="4127500"/>
+            <a:ext cx="698500" cy="520954"/>
+          </a:xfrm>
+          <a:prstGeom prst="rect">
+            <a:avLst/>
+          </a:prstGeom>
+          <a:noFill/>
+        </p:spPr>
+        <p:txBody>
+          <a:bodyPr wrap="none" lIns="0" rIns="0" tIns="0" bIns="0">
+            <a:spAutoFit/>
+          </a:bodyPr>
+          <a:lstStyle/>
+          <a:p>
+            <a:pPr>
+              <a:lnSpc>
+                <a:spcPct val="115000"/>
+              </a:lnSpc>
+              <a:spcAft>
+                <a:spcPts val="0"/>
+              </a:spcAft>
+              <a:defRPr sz="2600" b="1">
+                <a:solidFill>
+                  <a:srgbClr val="56D9B0"/>
+                </a:solidFill>
+                <a:latin typeface="Arial"/>
+              </a:defRPr>
+            </a:pPr>
+            <a:r>
+              <a:t>03</a:t>
+            </a:r>
+          </a:p>
+        </p:txBody>
+      </p:sp>
+      <p:sp>
+        <p:nvSpPr>
+          <p:cNvPr id="17" name="TextBox 16"/>
+          <p:cNvSpPr txBox="1"/>
+          <p:nvPr/>
+        </p:nvSpPr>
+        <p:spPr>
+          <a:xfrm>
+            <a:off x="1333500" y="4127500"/>
+            <a:ext cx="3111500" cy="440309"/>
+          </a:xfrm>
+          <a:prstGeom prst="rect">
+            <a:avLst/>
+          </a:prstGeom>
+          <a:noFill/>
+        </p:spPr>
+        <p:txBody>
+          <a:bodyPr wrap="none" lIns="0" rIns="0" tIns="0" bIns="0">
+            <a:spAutoFit/>
+          </a:bodyPr>
+          <a:lstStyle/>
+          <a:p>
+            <a:pPr>
+              <a:lnSpc>
+                <a:spcPct val="115000"/>
+              </a:lnSpc>
+              <a:spcAft>
+                <a:spcPts val="0"/>
+              </a:spcAft>
+              <a:defRPr sz="2100" b="1">
+                <a:solidFill>
+                  <a:srgbClr val="F4F7FA"/>
+                </a:solidFill>
+                <a:latin typeface="Arial"/>
+              </a:defRPr>
+            </a:pPr>
+            <a:r>
+              <a:t>Aluno</a:t>
+            </a:r>
+          </a:p>
+        </p:txBody>
+      </p:sp>
+      <p:sp>
+        <p:nvSpPr>
+          <p:cNvPr id="18" name="TextBox 17"/>
+          <p:cNvSpPr txBox="1"/>
+          <p:nvPr/>
+        </p:nvSpPr>
+        <p:spPr>
+          <a:xfrm>
+            <a:off x="4572000" y="4127500"/>
+            <a:ext cx="6985000" cy="408050"/>
+          </a:xfrm>
+          <a:prstGeom prst="rect">
+            <a:avLst/>
+          </a:prstGeom>
+          <a:noFill/>
+        </p:spPr>
+        <p:txBody>
+          <a:bodyPr wrap="none" lIns="0" rIns="0" tIns="0" bIns="0">
+            <a:spAutoFit/>
+          </a:bodyPr>
+          <a:lstStyle/>
+          <a:p>
+            <a:pPr>
+              <a:lnSpc>
+                <a:spcPct val="115000"/>
+              </a:lnSpc>
+              <a:spcAft>
+                <a:spcPts val="0"/>
+              </a:spcAft>
+              <a:defRPr sz="1900" b="0">
+                <a:solidFill>
+                  <a:srgbClr val="B6C7D9"/>
+                </a:solidFill>
+                <a:latin typeface="Arial"/>
+              </a:defRPr>
+            </a:pPr>
+            <a:r>
+              <a:t>Conferir o extrato e resgatar a vantagem.</a:t>
+            </a:r>
+          </a:p>
+        </p:txBody>
+      </p:sp>
+      <p:sp>
+        <p:nvSpPr>
+          <p:cNvPr id="19" name="TextBox 18"/>
+          <p:cNvSpPr txBox="1"/>
+          <p:nvPr/>
+        </p:nvSpPr>
+        <p:spPr>
+          <a:xfrm>
+            <a:off x="508000" y="5041900"/>
+            <a:ext cx="698500" cy="520954"/>
+          </a:xfrm>
+          <a:prstGeom prst="rect">
+            <a:avLst/>
+          </a:prstGeom>
+          <a:noFill/>
+        </p:spPr>
+        <p:txBody>
+          <a:bodyPr wrap="none" lIns="0" rIns="0" tIns="0" bIns="0">
+            <a:spAutoFit/>
+          </a:bodyPr>
+          <a:lstStyle/>
+          <a:p>
+            <a:pPr>
+              <a:lnSpc>
+                <a:spcPct val="115000"/>
+              </a:lnSpc>
+              <a:spcAft>
+                <a:spcPts val="0"/>
+              </a:spcAft>
+              <a:defRPr sz="2600" b="1">
+                <a:solidFill>
+                  <a:srgbClr val="56D9B0"/>
+                </a:solidFill>
+                <a:latin typeface="Arial"/>
+              </a:defRPr>
+            </a:pPr>
+            <a:r>
+              <a:t>04</a:t>
+            </a:r>
+          </a:p>
+        </p:txBody>
+      </p:sp>
+      <p:sp>
+        <p:nvSpPr>
+          <p:cNvPr id="20" name="TextBox 19"/>
+          <p:cNvSpPr txBox="1"/>
+          <p:nvPr/>
+        </p:nvSpPr>
+        <p:spPr>
+          <a:xfrm>
+            <a:off x="1333500" y="5041900"/>
+            <a:ext cx="3111500" cy="440309"/>
+          </a:xfrm>
+          <a:prstGeom prst="rect">
+            <a:avLst/>
+          </a:prstGeom>
+          <a:noFill/>
+        </p:spPr>
+        <p:txBody>
+          <a:bodyPr wrap="none" lIns="0" rIns="0" tIns="0" bIns="0">
+            <a:spAutoFit/>
+          </a:bodyPr>
+          <a:lstStyle/>
+          <a:p>
+            <a:pPr>
+              <a:lnSpc>
+                <a:spcPct val="115000"/>
+              </a:lnSpc>
+              <a:spcAft>
+                <a:spcPts val="0"/>
+              </a:spcAft>
+              <a:defRPr sz="2100" b="1">
+                <a:solidFill>
+                  <a:srgbClr val="F4F7FA"/>
+                </a:solidFill>
+                <a:latin typeface="Arial"/>
+              </a:defRPr>
+            </a:pPr>
+            <a:r>
+              <a:t>Mailpit</a:t>
+            </a:r>
+          </a:p>
+        </p:txBody>
+      </p:sp>
+      <p:sp>
+        <p:nvSpPr>
+          <p:cNvPr id="21" name="TextBox 20"/>
+          <p:cNvSpPr txBox="1"/>
+          <p:nvPr/>
+        </p:nvSpPr>
+        <p:spPr>
+          <a:xfrm>
+            <a:off x="4572000" y="5041900"/>
+            <a:ext cx="6985000" cy="714502"/>
+          </a:xfrm>
+          <a:prstGeom prst="rect">
+            <a:avLst/>
+          </a:prstGeom>
+          <a:noFill/>
+        </p:spPr>
+        <p:txBody>
+          <a:bodyPr wrap="none" lIns="0" rIns="0" tIns="0" bIns="0">
+            <a:spAutoFit/>
+          </a:bodyPr>
+          <a:lstStyle/>
+          <a:p>
+            <a:pPr>
+              <a:lnSpc>
+                <a:spcPct val="115000"/>
+              </a:lnSpc>
+              <a:spcAft>
+                <a:spcPts val="0"/>
+              </a:spcAft>
+              <a:defRPr sz="1900" b="0">
+                <a:solidFill>
+                  <a:srgbClr val="B6C7D9"/>
+                </a:solidFill>
+                <a:latin typeface="Arial"/>
+              </a:defRPr>
+            </a:pPr>
+            <a:r>
+              <a:t>Abrir os emails do resgate e comparar o código do</a:t>
+            </a:r>
+          </a:p>
+          <a:p>
+            <a:pPr>
+              <a:lnSpc>
+                <a:spcPct val="115000"/>
+              </a:lnSpc>
+              <a:spcAft>
+                <a:spcPts val="0"/>
+              </a:spcAft>
+              <a:defRPr sz="1900" b="0">
+                <a:solidFill>
+                  <a:srgbClr val="B6C7D9"/>
+                </a:solidFill>
+                <a:latin typeface="Arial"/>
+              </a:defRPr>
+            </a:pPr>
+            <a:r>
+              <a:t>cupom.</a:t>
+            </a:r>
+          </a:p>
+        </p:txBody>
+      </p:sp>
+    </p:spTree>
+  </p:cSld>
+  <p:clrMapOvr>
+    <a:masterClrMapping/>
+  </p:clrMapOvr>
+</p:sld>
+</file>
+
+<file path=ppt/slides/slide16.xml><?xml version="1.0" encoding="utf-8"?>
+<p:sld xmlns:a="http://schemas.openxmlformats.org/drawingml/2006/main" xmlns:p="http://schemas.openxmlformats.org/presentationml/2006/main" xmlns:r="http://schemas.openxmlformats.org/officeDocument/2006/relationships">
+  <p:cSld>
+    <p:spTree>
+      <p:nvGrpSpPr>
+        <p:cNvPr id="1" name=""/>
+        <p:cNvGrpSpPr/>
+        <p:nvPr/>
+      </p:nvGrpSpPr>
+      <p:grpSpPr/>
+      <p:sp>
+        <p:nvSpPr>
+          <p:cNvPr id="2" name="Rectangle 1"/>
+          <p:cNvSpPr/>
+          <p:nvPr/>
+        </p:nvSpPr>
+        <p:spPr>
+          <a:xfrm>
+            <a:off x="0" y="0"/>
+            <a:ext cx="12192000" cy="6858000"/>
+          </a:xfrm>
+          <a:prstGeom prst="rect">
+            <a:avLst/>
+          </a:prstGeom>
+          <a:solidFill>
+            <a:srgbClr val="101D2C"/>
+          </a:solidFill>
+          <a:ln>
+            <a:noFill/>
+          </a:ln>
+        </p:spPr>
+        <p:style>
+          <a:lnRef idx="1">
+            <a:schemeClr val="accent1"/>
+          </a:lnRef>
+          <a:fillRef idx="3">
+            <a:schemeClr val="accent1"/>
+          </a:fillRef>
+          <a:effectRef idx="2">
+            <a:schemeClr val="accent1"/>
+          </a:effectRef>
+          <a:fontRef idx="minor">
+            <a:schemeClr val="lt1"/>
+          </a:fontRef>
+        </p:style>
+        <p:txBody>
+          <a:bodyPr rtlCol="0" anchor="ctr"/>
+          <a:lstStyle/>
+          <a:p>
+            <a:pPr algn="ctr"/>
+          </a:p>
+        </p:txBody>
+      </p:sp>
+      <p:sp>
+        <p:nvSpPr>
+          <p:cNvPr id="3" name="Rectangle 2"/>
+          <p:cNvSpPr/>
+          <p:nvPr/>
+        </p:nvSpPr>
+        <p:spPr>
+          <a:xfrm>
+            <a:off x="508000" y="482600"/>
+            <a:ext cx="444500" cy="50800"/>
+          </a:xfrm>
+          <a:prstGeom prst="rect">
+            <a:avLst/>
+          </a:prstGeom>
+          <a:solidFill>
+            <a:srgbClr val="56D9B0"/>
+          </a:solidFill>
+          <a:ln>
+            <a:noFill/>
+          </a:ln>
+        </p:spPr>
+        <p:style>
+          <a:lnRef idx="1">
+            <a:schemeClr val="accent1"/>
+          </a:lnRef>
+          <a:fillRef idx="3">
+            <a:schemeClr val="accent1"/>
+          </a:fillRef>
+          <a:effectRef idx="2">
+            <a:schemeClr val="accent1"/>
+          </a:effectRef>
+          <a:fontRef idx="minor">
+            <a:schemeClr val="lt1"/>
+          </a:fontRef>
+        </p:style>
+        <p:txBody>
+          <a:bodyPr rtlCol="0" anchor="ctr"/>
+          <a:lstStyle/>
+          <a:p>
+            <a:pPr algn="ctr"/>
+          </a:p>
+        </p:txBody>
+      </p:sp>
+      <p:sp>
+        <p:nvSpPr>
+          <p:cNvPr id="4" name="TextBox 3"/>
+          <p:cNvSpPr txBox="1"/>
+          <p:nvPr/>
+        </p:nvSpPr>
+        <p:spPr>
+          <a:xfrm>
+            <a:off x="1092200" y="355600"/>
+            <a:ext cx="10287000" cy="295148"/>
+          </a:xfrm>
+          <a:prstGeom prst="rect">
+            <a:avLst/>
+          </a:prstGeom>
+          <a:noFill/>
+        </p:spPr>
+        <p:txBody>
+          <a:bodyPr wrap="none" lIns="0" rIns="0" tIns="0" bIns="0">
+            <a:spAutoFit/>
+          </a:bodyPr>
+          <a:lstStyle/>
+          <a:p>
+            <a:pPr>
+              <a:lnSpc>
+                <a:spcPct val="115000"/>
+              </a:lnSpc>
+              <a:spcAft>
+                <a:spcPts val="0"/>
+              </a:spcAft>
+              <a:defRPr sz="1200" b="1">
+                <a:solidFill>
+                  <a:srgbClr val="56D9B0"/>
+                </a:solidFill>
+                <a:latin typeface="Arial"/>
+              </a:defRPr>
+            </a:pPr>
+            <a:r>
+              <a:t>ENCERRAMENTO</a:t>
+            </a:r>
+          </a:p>
+        </p:txBody>
+      </p:sp>
+      <p:sp>
+        <p:nvSpPr>
+          <p:cNvPr id="5" name="TextBox 4"/>
+          <p:cNvSpPr txBox="1"/>
+          <p:nvPr/>
+        </p:nvSpPr>
+        <p:spPr>
+          <a:xfrm>
+            <a:off x="508000" y="914400"/>
+            <a:ext cx="11176000" cy="649986"/>
+          </a:xfrm>
+          <a:prstGeom prst="rect">
+            <a:avLst/>
+          </a:prstGeom>
+          <a:noFill/>
+        </p:spPr>
+        <p:txBody>
+          <a:bodyPr wrap="none" lIns="0" rIns="0" tIns="0" bIns="0">
+            <a:spAutoFit/>
+          </a:bodyPr>
+          <a:lstStyle/>
+          <a:p>
+            <a:pPr>
+              <a:lnSpc>
+                <a:spcPct val="115000"/>
+              </a:lnSpc>
+              <a:spcAft>
+                <a:spcPts val="0"/>
+              </a:spcAft>
+              <a:defRPr sz="3400" b="1">
+                <a:solidFill>
+                  <a:srgbClr val="F4F7FA"/>
+                </a:solidFill>
+                <a:latin typeface="Arial"/>
+              </a:defRPr>
+            </a:pPr>
+            <a:r>
+              <a:t>Do mérito ao benefício, com histórico</a:t>
+            </a:r>
+          </a:p>
+        </p:txBody>
+      </p:sp>
+      <p:sp>
+        <p:nvSpPr>
+          <p:cNvPr id="6" name="TextBox 5"/>
+          <p:cNvSpPr txBox="1"/>
+          <p:nvPr/>
+        </p:nvSpPr>
+        <p:spPr>
+          <a:xfrm>
+            <a:off x="508000" y="1651000"/>
+            <a:ext cx="11176000" cy="391922"/>
+          </a:xfrm>
+          <a:prstGeom prst="rect">
+            <a:avLst/>
+          </a:prstGeom>
+          <a:noFill/>
+        </p:spPr>
+        <p:txBody>
+          <a:bodyPr wrap="none" lIns="0" rIns="0" tIns="0" bIns="0">
+            <a:spAutoFit/>
+          </a:bodyPr>
+          <a:lstStyle/>
+          <a:p>
+            <a:pPr>
+              <a:lnSpc>
+                <a:spcPct val="115000"/>
+              </a:lnSpc>
+              <a:spcAft>
+                <a:spcPts val="0"/>
+              </a:spcAft>
+              <a:defRPr sz="1800" b="0">
+                <a:solidFill>
+                  <a:srgbClr val="B6C7D9"/>
+                </a:solidFill>
+                <a:latin typeface="Arial"/>
+              </a:defRPr>
+            </a:pPr>
+            <a:r>
+              <a:t>Cadastro → reconhecimento → resgate → cupom → email</a:t>
+            </a:r>
+          </a:p>
+        </p:txBody>
+      </p:sp>
+      <p:sp>
+        <p:nvSpPr>
+          <p:cNvPr id="7" name="Rectangle 6"/>
+          <p:cNvSpPr/>
+          <p:nvPr/>
+        </p:nvSpPr>
+        <p:spPr>
+          <a:xfrm>
+            <a:off x="508000" y="6299200"/>
+            <a:ext cx="11176000" cy="12700"/>
+          </a:xfrm>
+          <a:prstGeom prst="rect">
+            <a:avLst/>
+          </a:prstGeom>
+          <a:solidFill>
+            <a:srgbClr val="1B2D42"/>
+          </a:solidFill>
+          <a:ln>
+            <a:noFill/>
+          </a:ln>
+        </p:spPr>
+        <p:style>
+          <a:lnRef idx="1">
+            <a:schemeClr val="accent1"/>
+          </a:lnRef>
+          <a:fillRef idx="3">
+            <a:schemeClr val="accent1"/>
+          </a:fillRef>
+          <a:effectRef idx="2">
+            <a:schemeClr val="accent1"/>
+          </a:effectRef>
+          <a:fontRef idx="minor">
+            <a:schemeClr val="lt1"/>
+          </a:fontRef>
+        </p:style>
+        <p:txBody>
+          <a:bodyPr rtlCol="0" anchor="ctr"/>
+          <a:lstStyle/>
+          <a:p>
+            <a:pPr algn="ctr"/>
+          </a:p>
+        </p:txBody>
+      </p:sp>
+      <p:sp>
+        <p:nvSpPr>
+          <p:cNvPr id="8" name="TextBox 7"/>
+          <p:cNvSpPr txBox="1"/>
+          <p:nvPr/>
+        </p:nvSpPr>
+        <p:spPr>
+          <a:xfrm>
+            <a:off x="508000" y="6477000"/>
+            <a:ext cx="10414000" cy="262890"/>
+          </a:xfrm>
+          <a:prstGeom prst="rect">
+            <a:avLst/>
+          </a:prstGeom>
+          <a:noFill/>
+        </p:spPr>
+        <p:txBody>
+          <a:bodyPr wrap="none" lIns="0" rIns="0" tIns="0" bIns="0">
+            <a:spAutoFit/>
+          </a:bodyPr>
+          <a:lstStyle/>
+          <a:p>
+            <a:pPr>
+              <a:lnSpc>
+                <a:spcPct val="115000"/>
+              </a:lnSpc>
+              <a:spcAft>
+                <a:spcPts val="0"/>
+              </a:spcAft>
+              <a:defRPr sz="1000" b="0">
+                <a:solidFill>
+                  <a:srgbClr val="B6C7D9"/>
+                </a:solidFill>
+                <a:latin typeface="Arial"/>
+              </a:defRPr>
+            </a:pPr>
+            <a:r>
+              <a:t>PUC MINAS  /  PROJETO DE SOFTWARE  /  LABORATÓRIO 3</a:t>
+            </a:r>
+          </a:p>
+        </p:txBody>
+      </p:sp>
+      <p:sp>
+        <p:nvSpPr>
+          <p:cNvPr id="9" name="TextBox 8"/>
+          <p:cNvSpPr txBox="1"/>
+          <p:nvPr/>
+        </p:nvSpPr>
+        <p:spPr>
+          <a:xfrm>
+            <a:off x="11239500" y="6438900"/>
+            <a:ext cx="508000" cy="327406"/>
+          </a:xfrm>
+          <a:prstGeom prst="rect">
+            <a:avLst/>
+          </a:prstGeom>
+          <a:noFill/>
+        </p:spPr>
+        <p:txBody>
+          <a:bodyPr wrap="none" lIns="0" rIns="0" tIns="0" bIns="0">
+            <a:spAutoFit/>
+          </a:bodyPr>
+          <a:lstStyle/>
+          <a:p>
+            <a:pPr>
+              <a:lnSpc>
+                <a:spcPct val="115000"/>
+              </a:lnSpc>
+              <a:spcAft>
+                <a:spcPts val="0"/>
+              </a:spcAft>
+              <a:defRPr sz="1400" b="1">
+                <a:solidFill>
+                  <a:srgbClr val="56D9B0"/>
+                </a:solidFill>
+                <a:latin typeface="Arial"/>
+              </a:defRPr>
+            </a:pPr>
+            <a:r>
+              <a:t>16</a:t>
             </a:r>
           </a:p>
         </p:txBody>
@@ -8114,7 +12081,7 @@
               </a:defRPr>
             </a:pPr>
             <a:r>
-              <a:t>ESCOPO IMPLEMENTADO</a:t>
+              <a:t>REGRAS DE NEGÓCIO</a:t>
             </a:r>
           </a:p>
         </p:txBody>
@@ -8156,7 +12123,7 @@
               </a:defRPr>
             </a:pPr>
             <a:r>
-              <a:t>Um fluxo completo de ponta a ponta</a:t>
+              <a:t>Como as moedas circulam</a:t>
             </a:r>
           </a:p>
         </p:txBody>
@@ -8198,7 +12165,7 @@
               </a:defRPr>
             </a:pPr>
             <a:r>
-              <a:t>Da criação do cadastro ao cupom enviado por email.</a:t>
+              <a:t>Exemplo ilustrativo de reconhecimento e resgate.</a:t>
             </a:r>
           </a:p>
         </p:txBody>
@@ -8339,7 +12306,7 @@
         <p:spPr>
           <a:xfrm>
             <a:off x="508000" y="2438400"/>
-            <a:ext cx="3589866" cy="3048000"/>
+            <a:ext cx="3589866" cy="3175000"/>
           </a:xfrm>
           <a:prstGeom prst="rect">
             <a:avLst/>
@@ -8410,7 +12377,7 @@
               </a:defRPr>
             </a:pPr>
             <a:r>
-              <a:t>01 / Acesso</a:t>
+              <a:t>1.000 moedas</a:t>
             </a:r>
           </a:p>
         </p:txBody>
@@ -8452,7 +12419,7 @@
               </a:defRPr>
             </a:pPr>
             <a:r>
-              <a:t>Cadastros de aluno e</a:t>
+              <a:t>O professor recebe</a:t>
             </a:r>
           </a:p>
           <a:p>
@@ -8471,7 +12438,7 @@
               </a:defRPr>
             </a:pPr>
             <a:r>
-              <a:t>empresa.</a:t>
+              <a:t>crédito a cada semestre,</a:t>
             </a:r>
           </a:p>
           <a:p>
@@ -8490,7 +12457,7 @@
               </a:defRPr>
             </a:pPr>
             <a:r>
-              <a:t>Login e permissões por</a:t>
+              <a:t>somado ao saldo</a:t>
             </a:r>
           </a:p>
           <a:p>
@@ -8509,7 +12476,7 @@
               </a:defRPr>
             </a:pPr>
             <a:r>
-              <a:t>perfil.</a:t>
+              <a:t>restante.</a:t>
             </a:r>
           </a:p>
         </p:txBody>
@@ -8523,7 +12490,7 @@
         <p:spPr>
           <a:xfrm>
             <a:off x="4301066" y="2438400"/>
-            <a:ext cx="3589866" cy="3048000"/>
+            <a:ext cx="3589866" cy="3175000"/>
           </a:xfrm>
           <a:prstGeom prst="rect">
             <a:avLst/>
@@ -8594,7 +12561,7 @@
               </a:defRPr>
             </a:pPr>
             <a:r>
-              <a:t>02 / Mérito</a:t>
+              <a:t>Reconhecimento</a:t>
             </a:r>
           </a:p>
         </p:txBody>
@@ -8608,7 +12575,7 @@
         <p:spPr>
           <a:xfrm>
             <a:off x="4555066" y="3327400"/>
-            <a:ext cx="3081866" cy="1020953"/>
+            <a:ext cx="3081866" cy="1327404"/>
           </a:xfrm>
           <a:prstGeom prst="rect">
             <a:avLst/>
@@ -8636,7 +12603,7 @@
               </a:defRPr>
             </a:pPr>
             <a:r>
-              <a:t>Crédito semestral.</a:t>
+              <a:t>O professor envia 100</a:t>
             </a:r>
           </a:p>
           <a:p>
@@ -8655,7 +12622,7 @@
               </a:defRPr>
             </a:pPr>
             <a:r>
-              <a:t>Envio com motivo.</a:t>
+              <a:t>moedas e informa o</a:t>
             </a:r>
           </a:p>
           <a:p>
@@ -8674,7 +12641,26 @@
               </a:defRPr>
             </a:pPr>
             <a:r>
-              <a:t>Saldo e extrato.</a:t>
+              <a:t>motivo. O aluno recebe o</a:t>
+            </a:r>
+          </a:p>
+          <a:p>
+            <a:pPr>
+              <a:lnSpc>
+                <a:spcPct val="115000"/>
+              </a:lnSpc>
+              <a:spcAft>
+                <a:spcPts val="0"/>
+              </a:spcAft>
+              <a:defRPr sz="1900" b="0">
+                <a:solidFill>
+                  <a:srgbClr val="F4F7FA"/>
+                </a:solidFill>
+                <a:latin typeface="Arial"/>
+              </a:defRPr>
+            </a:pPr>
+            <a:r>
+              <a:t>crédito.</a:t>
             </a:r>
           </a:p>
         </p:txBody>
@@ -8688,7 +12674,7 @@
         <p:spPr>
           <a:xfrm>
             <a:off x="8094133" y="2438400"/>
-            <a:ext cx="3589866" cy="3048000"/>
+            <a:ext cx="3589866" cy="3175000"/>
           </a:xfrm>
           <a:prstGeom prst="rect">
             <a:avLst/>
@@ -8759,7 +12745,7 @@
               </a:defRPr>
             </a:pPr>
             <a:r>
-              <a:t>03 / Benefícios</a:t>
+              <a:t>Resgate</a:t>
             </a:r>
           </a:p>
         </p:txBody>
@@ -8773,7 +12759,7 @@
         <p:spPr>
           <a:xfrm>
             <a:off x="8348133" y="3327400"/>
-            <a:ext cx="3081866" cy="1020953"/>
+            <a:ext cx="3081866" cy="1327404"/>
           </a:xfrm>
           <a:prstGeom prst="rect">
             <a:avLst/>
@@ -8801,7 +12787,7 @@
               </a:defRPr>
             </a:pPr>
             <a:r>
-              <a:t>Vantagens com foto.</a:t>
+              <a:t>Uma vantagem de 60</a:t>
             </a:r>
           </a:p>
           <a:p>
@@ -8820,7 +12806,7 @@
               </a:defRPr>
             </a:pPr>
             <a:r>
-              <a:t>Resgate com cupom.</a:t>
+              <a:t>moedas gera um cupom. O</a:t>
             </a:r>
           </a:p>
           <a:p>
@@ -8839,7 +12825,26 @@
               </a:defRPr>
             </a:pPr>
             <a:r>
-              <a:t>Notificações por email.</a:t>
+              <a:t>aluno fica com 40</a:t>
+            </a:r>
+          </a:p>
+          <a:p>
+            <a:pPr>
+              <a:lnSpc>
+                <a:spcPct val="115000"/>
+              </a:lnSpc>
+              <a:spcAft>
+                <a:spcPts val="0"/>
+              </a:spcAft>
+              <a:defRPr sz="1900" b="0">
+                <a:solidFill>
+                  <a:srgbClr val="F4F7FA"/>
+                </a:solidFill>
+                <a:latin typeface="Arial"/>
+              </a:defRPr>
+            </a:pPr>
+            <a:r>
+              <a:t>moedas.</a:t>
             </a:r>
           </a:p>
         </p:txBody>
@@ -8985,7 +12990,7 @@
               </a:defRPr>
             </a:pPr>
             <a:r>
-              <a:t>REGRAS DE NEGÓCIO</a:t>
+              <a:t>ARQUITETURA MVC</a:t>
             </a:r>
           </a:p>
         </p:txBody>
@@ -9027,7 +13032,7 @@
               </a:defRPr>
             </a:pPr>
             <a:r>
-              <a:t>Como as moedas circulam</a:t>
+              <a:t>Responsabilidades bem definidas</a:t>
             </a:r>
           </a:p>
         </p:txBody>
@@ -9069,7 +13074,7 @@
               </a:defRPr>
             </a:pPr>
             <a:r>
-              <a:t>Exemplo ilustrativo de reconhecimento e resgate.</a:t>
+              <a:t>A interface apresenta; os serviços aplicam as regras de negócio.</a:t>
             </a:r>
           </a:p>
         </p:txBody>
@@ -9209,8 +13214,8 @@
         </p:nvSpPr>
         <p:spPr>
           <a:xfrm>
-            <a:off x="508000" y="2438400"/>
-            <a:ext cx="3589866" cy="3175000"/>
+            <a:off x="508000" y="2667000"/>
+            <a:ext cx="2641600" cy="1905000"/>
           </a:xfrm>
           <a:prstGeom prst="rect">
             <a:avLst/>
@@ -9252,8 +13257,8 @@
         </p:nvSpPr>
         <p:spPr>
           <a:xfrm>
-            <a:off x="762000" y="2667000"/>
-            <a:ext cx="3081866" cy="456438"/>
+            <a:off x="685800" y="2921000"/>
+            <a:ext cx="2286000" cy="779018"/>
           </a:xfrm>
           <a:prstGeom prst="rect">
             <a:avLst/>
@@ -9273,7 +13278,7 @@
               <a:spcAft>
                 <a:spcPts val="0"/>
               </a:spcAft>
-              <a:defRPr sz="2200" b="1">
+              <a:defRPr sz="2100" b="1">
                 <a:solidFill>
                   <a:srgbClr val="56D9B0"/>
                 </a:solidFill>
@@ -9281,7 +13286,26 @@
               </a:defRPr>
             </a:pPr>
             <a:r>
-              <a:t>1.000 moedas</a:t>
+              <a:t>React +</a:t>
+            </a:r>
+          </a:p>
+          <a:p>
+            <a:pPr>
+              <a:lnSpc>
+                <a:spcPct val="115000"/>
+              </a:lnSpc>
+              <a:spcAft>
+                <a:spcPts val="0"/>
+              </a:spcAft>
+              <a:defRPr sz="2100" b="1">
+                <a:solidFill>
+                  <a:srgbClr val="56D9B0"/>
+                </a:solidFill>
+                <a:latin typeface="Arial"/>
+              </a:defRPr>
+            </a:pPr>
+            <a:r>
+              <a:t>TypeScript</a:t>
             </a:r>
           </a:p>
         </p:txBody>
@@ -9294,8 +13318,8 @@
         </p:nvSpPr>
         <p:spPr>
           <a:xfrm>
-            <a:off x="762000" y="3327400"/>
-            <a:ext cx="3081866" cy="1327404"/>
+            <a:off x="685800" y="3708400"/>
+            <a:ext cx="2286000" cy="649986"/>
           </a:xfrm>
           <a:prstGeom prst="rect">
             <a:avLst/>
@@ -9315,7 +13339,7 @@
               <a:spcAft>
                 <a:spcPts val="0"/>
               </a:spcAft>
-              <a:defRPr sz="1900" b="0">
+              <a:defRPr sz="1700" b="0">
                 <a:solidFill>
                   <a:srgbClr val="F4F7FA"/>
                 </a:solidFill>
@@ -9323,18 +13347,18 @@
               </a:defRPr>
             </a:pPr>
             <a:r>
-              <a:t>O professor recebe</a:t>
-            </a:r>
-          </a:p>
-          <a:p>
-            <a:pPr>
-              <a:lnSpc>
-                <a:spcPct val="115000"/>
-              </a:lnSpc>
-              <a:spcAft>
-                <a:spcPts val="0"/>
-              </a:spcAft>
-              <a:defRPr sz="1900" b="0">
+              <a:t>Telas e chamadas</a:t>
+            </a:r>
+          </a:p>
+          <a:p>
+            <a:pPr>
+              <a:lnSpc>
+                <a:spcPct val="115000"/>
+              </a:lnSpc>
+              <a:spcAft>
+                <a:spcPts val="0"/>
+              </a:spcAft>
+              <a:defRPr sz="1700" b="0">
                 <a:solidFill>
                   <a:srgbClr val="F4F7FA"/>
                 </a:solidFill>
@@ -9342,59 +13366,63 @@
               </a:defRPr>
             </a:pPr>
             <a:r>
-              <a:t>crédito a cada semestre,</a:t>
-            </a:r>
-          </a:p>
-          <a:p>
-            <a:pPr>
-              <a:lnSpc>
-                <a:spcPct val="115000"/>
-              </a:lnSpc>
-              <a:spcAft>
-                <a:spcPts val="0"/>
-              </a:spcAft>
-              <a:defRPr sz="1900" b="0">
-                <a:solidFill>
-                  <a:srgbClr val="F4F7FA"/>
-                </a:solidFill>
-                <a:latin typeface="Arial"/>
-              </a:defRPr>
-            </a:pPr>
-            <a:r>
-              <a:t>somado ao saldo</a:t>
-            </a:r>
-          </a:p>
-          <a:p>
-            <a:pPr>
-              <a:lnSpc>
-                <a:spcPct val="115000"/>
-              </a:lnSpc>
-              <a:spcAft>
-                <a:spcPts val="0"/>
-              </a:spcAft>
-              <a:defRPr sz="1900" b="0">
-                <a:solidFill>
-                  <a:srgbClr val="F4F7FA"/>
-                </a:solidFill>
-                <a:latin typeface="Arial"/>
-              </a:defRPr>
-            </a:pPr>
-            <a:r>
-              <a:t>restante.</a:t>
-            </a:r>
-          </a:p>
-        </p:txBody>
-      </p:sp>
-      <p:sp>
-        <p:nvSpPr>
-          <p:cNvPr id="13" name="Rectangle 12"/>
+              <a:t>HTTP</a:t>
+            </a:r>
+          </a:p>
+        </p:txBody>
+      </p:sp>
+      <p:sp>
+        <p:nvSpPr>
+          <p:cNvPr id="13" name="TextBox 12"/>
+          <p:cNvSpPr txBox="1"/>
+          <p:nvPr/>
+        </p:nvSpPr>
+        <p:spPr>
+          <a:xfrm>
+            <a:off x="3149600" y="3390900"/>
+            <a:ext cx="254000" cy="408050"/>
+          </a:xfrm>
+          <a:prstGeom prst="rect">
+            <a:avLst/>
+          </a:prstGeom>
+          <a:noFill/>
+        </p:spPr>
+        <p:txBody>
+          <a:bodyPr wrap="none" lIns="0" rIns="0" tIns="0" bIns="0">
+            <a:spAutoFit/>
+          </a:bodyPr>
+          <a:lstStyle/>
+          <a:p>
+            <a:pPr>
+              <a:lnSpc>
+                <a:spcPct val="115000"/>
+              </a:lnSpc>
+              <a:spcAft>
+                <a:spcPts val="0"/>
+              </a:spcAft>
+              <a:defRPr sz="1900" b="1">
+                <a:solidFill>
+                  <a:srgbClr val="56D9B0"/>
+                </a:solidFill>
+                <a:latin typeface="Arial"/>
+              </a:defRPr>
+            </a:pPr>
+            <a:r>
+              <a:t>›</a:t>
+            </a:r>
+          </a:p>
+        </p:txBody>
+      </p:sp>
+      <p:sp>
+        <p:nvSpPr>
+          <p:cNvPr id="14" name="Rectangle 13"/>
           <p:cNvSpPr/>
           <p:nvPr/>
         </p:nvSpPr>
         <p:spPr>
           <a:xfrm>
-            <a:off x="4301066" y="2438400"/>
-            <a:ext cx="3589866" cy="3175000"/>
+            <a:off x="3352800" y="2667000"/>
+            <a:ext cx="2641600" cy="1905000"/>
           </a:xfrm>
           <a:prstGeom prst="rect">
             <a:avLst/>
@@ -9430,14 +13458,14 @@
       </p:sp>
       <p:sp>
         <p:nvSpPr>
-          <p:cNvPr id="14" name="TextBox 13"/>
+          <p:cNvPr id="15" name="TextBox 14"/>
           <p:cNvSpPr txBox="1"/>
           <p:nvPr/>
         </p:nvSpPr>
         <p:spPr>
           <a:xfrm>
-            <a:off x="4555066" y="2667000"/>
-            <a:ext cx="3081866" cy="456438"/>
+            <a:off x="3530600" y="2921000"/>
+            <a:ext cx="2286000" cy="440309"/>
           </a:xfrm>
           <a:prstGeom prst="rect">
             <a:avLst/>
@@ -9457,7 +13485,7 @@
               <a:spcAft>
                 <a:spcPts val="0"/>
               </a:spcAft>
-              <a:defRPr sz="2200" b="1">
+              <a:defRPr sz="2100" b="1">
                 <a:solidFill>
                   <a:srgbClr val="56D9B0"/>
                 </a:solidFill>
@@ -9465,21 +13493,21 @@
               </a:defRPr>
             </a:pPr>
             <a:r>
-              <a:t>Reconhecimento</a:t>
-            </a:r>
-          </a:p>
-        </p:txBody>
-      </p:sp>
-      <p:sp>
-        <p:nvSpPr>
-          <p:cNvPr id="15" name="TextBox 14"/>
+              <a:t>Controllers</a:t>
+            </a:r>
+          </a:p>
+        </p:txBody>
+      </p:sp>
+      <p:sp>
+        <p:nvSpPr>
+          <p:cNvPr id="16" name="TextBox 15"/>
           <p:cNvSpPr txBox="1"/>
           <p:nvPr/>
         </p:nvSpPr>
         <p:spPr>
           <a:xfrm>
-            <a:off x="4555066" y="3327400"/>
-            <a:ext cx="3081866" cy="1327404"/>
+            <a:off x="3530600" y="3708400"/>
+            <a:ext cx="2286000" cy="649986"/>
           </a:xfrm>
           <a:prstGeom prst="rect">
             <a:avLst/>
@@ -9499,7 +13527,7 @@
               <a:spcAft>
                 <a:spcPts val="0"/>
               </a:spcAft>
-              <a:defRPr sz="1900" b="0">
+              <a:defRPr sz="1700" b="0">
                 <a:solidFill>
                   <a:srgbClr val="F4F7FA"/>
                 </a:solidFill>
@@ -9507,18 +13535,18 @@
               </a:defRPr>
             </a:pPr>
             <a:r>
-              <a:t>O professor envia 100</a:t>
-            </a:r>
-          </a:p>
-          <a:p>
-            <a:pPr>
-              <a:lnSpc>
-                <a:spcPct val="115000"/>
-              </a:lnSpc>
-              <a:spcAft>
-                <a:spcPts val="0"/>
-              </a:spcAft>
-              <a:defRPr sz="1900" b="0">
+              <a:t>HTTP, DTOs e</a:t>
+            </a:r>
+          </a:p>
+          <a:p>
+            <a:pPr>
+              <a:lnSpc>
+                <a:spcPct val="115000"/>
+              </a:lnSpc>
+              <a:spcAft>
+                <a:spcPts val="0"/>
+              </a:spcAft>
+              <a:defRPr sz="1700" b="0">
                 <a:solidFill>
                   <a:srgbClr val="F4F7FA"/>
                 </a:solidFill>
@@ -9526,59 +13554,63 @@
               </a:defRPr>
             </a:pPr>
             <a:r>
-              <a:t>moedas e informa o</a:t>
-            </a:r>
-          </a:p>
-          <a:p>
-            <a:pPr>
-              <a:lnSpc>
-                <a:spcPct val="115000"/>
-              </a:lnSpc>
-              <a:spcAft>
-                <a:spcPts val="0"/>
-              </a:spcAft>
-              <a:defRPr sz="1900" b="0">
-                <a:solidFill>
-                  <a:srgbClr val="F4F7FA"/>
-                </a:solidFill>
-                <a:latin typeface="Arial"/>
-              </a:defRPr>
-            </a:pPr>
-            <a:r>
-              <a:t>motivo. O aluno recebe o</a:t>
-            </a:r>
-          </a:p>
-          <a:p>
-            <a:pPr>
-              <a:lnSpc>
-                <a:spcPct val="115000"/>
-              </a:lnSpc>
-              <a:spcAft>
-                <a:spcPts val="0"/>
-              </a:spcAft>
-              <a:defRPr sz="1900" b="0">
-                <a:solidFill>
-                  <a:srgbClr val="F4F7FA"/>
-                </a:solidFill>
-                <a:latin typeface="Arial"/>
-              </a:defRPr>
-            </a:pPr>
-            <a:r>
-              <a:t>crédito.</a:t>
-            </a:r>
-          </a:p>
-        </p:txBody>
-      </p:sp>
-      <p:sp>
-        <p:nvSpPr>
-          <p:cNvPr id="16" name="Rectangle 15"/>
+              <a:t>validação</a:t>
+            </a:r>
+          </a:p>
+        </p:txBody>
+      </p:sp>
+      <p:sp>
+        <p:nvSpPr>
+          <p:cNvPr id="17" name="TextBox 16"/>
+          <p:cNvSpPr txBox="1"/>
+          <p:nvPr/>
+        </p:nvSpPr>
+        <p:spPr>
+          <a:xfrm>
+            <a:off x="5994400" y="3390900"/>
+            <a:ext cx="254000" cy="408050"/>
+          </a:xfrm>
+          <a:prstGeom prst="rect">
+            <a:avLst/>
+          </a:prstGeom>
+          <a:noFill/>
+        </p:spPr>
+        <p:txBody>
+          <a:bodyPr wrap="none" lIns="0" rIns="0" tIns="0" bIns="0">
+            <a:spAutoFit/>
+          </a:bodyPr>
+          <a:lstStyle/>
+          <a:p>
+            <a:pPr>
+              <a:lnSpc>
+                <a:spcPct val="115000"/>
+              </a:lnSpc>
+              <a:spcAft>
+                <a:spcPts val="0"/>
+              </a:spcAft>
+              <a:defRPr sz="1900" b="1">
+                <a:solidFill>
+                  <a:srgbClr val="56D9B0"/>
+                </a:solidFill>
+                <a:latin typeface="Arial"/>
+              </a:defRPr>
+            </a:pPr>
+            <a:r>
+              <a:t>›</a:t>
+            </a:r>
+          </a:p>
+        </p:txBody>
+      </p:sp>
+      <p:sp>
+        <p:nvSpPr>
+          <p:cNvPr id="18" name="Rectangle 17"/>
           <p:cNvSpPr/>
           <p:nvPr/>
         </p:nvSpPr>
         <p:spPr>
           <a:xfrm>
-            <a:off x="8094133" y="2438400"/>
-            <a:ext cx="3589866" cy="3175000"/>
+            <a:off x="6197600" y="2667000"/>
+            <a:ext cx="2641600" cy="1905000"/>
           </a:xfrm>
           <a:prstGeom prst="rect">
             <a:avLst/>
@@ -9614,14 +13646,14 @@
       </p:sp>
       <p:sp>
         <p:nvSpPr>
-          <p:cNvPr id="17" name="TextBox 16"/>
+          <p:cNvPr id="19" name="TextBox 18"/>
           <p:cNvSpPr txBox="1"/>
           <p:nvPr/>
         </p:nvSpPr>
         <p:spPr>
           <a:xfrm>
-            <a:off x="8348133" y="2667000"/>
-            <a:ext cx="3081866" cy="456438"/>
+            <a:off x="6375400" y="2921000"/>
+            <a:ext cx="2286000" cy="440309"/>
           </a:xfrm>
           <a:prstGeom prst="rect">
             <a:avLst/>
@@ -9641,7 +13673,7 @@
               <a:spcAft>
                 <a:spcPts val="0"/>
               </a:spcAft>
-              <a:defRPr sz="2200" b="1">
+              <a:defRPr sz="2100" b="1">
                 <a:solidFill>
                   <a:srgbClr val="56D9B0"/>
                 </a:solidFill>
@@ -9649,21 +13681,21 @@
               </a:defRPr>
             </a:pPr>
             <a:r>
-              <a:t>Resgate</a:t>
-            </a:r>
-          </a:p>
-        </p:txBody>
-      </p:sp>
-      <p:sp>
-        <p:nvSpPr>
-          <p:cNvPr id="18" name="TextBox 17"/>
+              <a:t>Services</a:t>
+            </a:r>
+          </a:p>
+        </p:txBody>
+      </p:sp>
+      <p:sp>
+        <p:nvSpPr>
+          <p:cNvPr id="20" name="TextBox 19"/>
           <p:cNvSpPr txBox="1"/>
           <p:nvPr/>
         </p:nvSpPr>
         <p:spPr>
           <a:xfrm>
-            <a:off x="8348133" y="3327400"/>
-            <a:ext cx="3081866" cy="1327404"/>
+            <a:off x="6375400" y="3708400"/>
+            <a:ext cx="2286000" cy="375793"/>
           </a:xfrm>
           <a:prstGeom prst="rect">
             <a:avLst/>
@@ -9683,7 +13715,7 @@
               <a:spcAft>
                 <a:spcPts val="0"/>
               </a:spcAft>
-              <a:defRPr sz="1900" b="0">
+              <a:defRPr sz="1700" b="0">
                 <a:solidFill>
                   <a:srgbClr val="F4F7FA"/>
                 </a:solidFill>
@@ -9691,18 +13723,168 @@
               </a:defRPr>
             </a:pPr>
             <a:r>
-              <a:t>Uma vantagem de 60</a:t>
-            </a:r>
-          </a:p>
-          <a:p>
-            <a:pPr>
-              <a:lnSpc>
-                <a:spcPct val="115000"/>
-              </a:lnSpc>
-              <a:spcAft>
-                <a:spcPts val="0"/>
-              </a:spcAft>
-              <a:defRPr sz="1900" b="0">
+              <a:t>Regras e transações</a:t>
+            </a:r>
+          </a:p>
+        </p:txBody>
+      </p:sp>
+      <p:sp>
+        <p:nvSpPr>
+          <p:cNvPr id="21" name="TextBox 20"/>
+          <p:cNvSpPr txBox="1"/>
+          <p:nvPr/>
+        </p:nvSpPr>
+        <p:spPr>
+          <a:xfrm>
+            <a:off x="8839200" y="3390900"/>
+            <a:ext cx="254000" cy="408050"/>
+          </a:xfrm>
+          <a:prstGeom prst="rect">
+            <a:avLst/>
+          </a:prstGeom>
+          <a:noFill/>
+        </p:spPr>
+        <p:txBody>
+          <a:bodyPr wrap="none" lIns="0" rIns="0" tIns="0" bIns="0">
+            <a:spAutoFit/>
+          </a:bodyPr>
+          <a:lstStyle/>
+          <a:p>
+            <a:pPr>
+              <a:lnSpc>
+                <a:spcPct val="115000"/>
+              </a:lnSpc>
+              <a:spcAft>
+                <a:spcPts val="0"/>
+              </a:spcAft>
+              <a:defRPr sz="1900" b="1">
+                <a:solidFill>
+                  <a:srgbClr val="56D9B0"/>
+                </a:solidFill>
+                <a:latin typeface="Arial"/>
+              </a:defRPr>
+            </a:pPr>
+            <a:r>
+              <a:t>›</a:t>
+            </a:r>
+          </a:p>
+        </p:txBody>
+      </p:sp>
+      <p:sp>
+        <p:nvSpPr>
+          <p:cNvPr id="22" name="Rectangle 21"/>
+          <p:cNvSpPr/>
+          <p:nvPr/>
+        </p:nvSpPr>
+        <p:spPr>
+          <a:xfrm>
+            <a:off x="9042400" y="2667000"/>
+            <a:ext cx="2641600" cy="1905000"/>
+          </a:xfrm>
+          <a:prstGeom prst="rect">
+            <a:avLst/>
+          </a:prstGeom>
+          <a:solidFill>
+            <a:srgbClr val="1B2D42"/>
+          </a:solidFill>
+          <a:ln>
+            <a:noFill/>
+          </a:ln>
+        </p:spPr>
+        <p:style>
+          <a:lnRef idx="1">
+            <a:schemeClr val="accent1"/>
+          </a:lnRef>
+          <a:fillRef idx="3">
+            <a:schemeClr val="accent1"/>
+          </a:fillRef>
+          <a:effectRef idx="2">
+            <a:schemeClr val="accent1"/>
+          </a:effectRef>
+          <a:fontRef idx="minor">
+            <a:schemeClr val="lt1"/>
+          </a:fontRef>
+        </p:style>
+        <p:txBody>
+          <a:bodyPr rtlCol="0" anchor="ctr"/>
+          <a:lstStyle/>
+          <a:p>
+            <a:pPr algn="ctr"/>
+          </a:p>
+        </p:txBody>
+      </p:sp>
+      <p:sp>
+        <p:nvSpPr>
+          <p:cNvPr id="23" name="TextBox 22"/>
+          <p:cNvSpPr txBox="1"/>
+          <p:nvPr/>
+        </p:nvSpPr>
+        <p:spPr>
+          <a:xfrm>
+            <a:off x="9220200" y="2921000"/>
+            <a:ext cx="2286000" cy="440309"/>
+          </a:xfrm>
+          <a:prstGeom prst="rect">
+            <a:avLst/>
+          </a:prstGeom>
+          <a:noFill/>
+        </p:spPr>
+        <p:txBody>
+          <a:bodyPr wrap="none" lIns="0" rIns="0" tIns="0" bIns="0">
+            <a:spAutoFit/>
+          </a:bodyPr>
+          <a:lstStyle/>
+          <a:p>
+            <a:pPr>
+              <a:lnSpc>
+                <a:spcPct val="115000"/>
+              </a:lnSpc>
+              <a:spcAft>
+                <a:spcPts val="0"/>
+              </a:spcAft>
+              <a:defRPr sz="2100" b="1">
+                <a:solidFill>
+                  <a:srgbClr val="56D9B0"/>
+                </a:solidFill>
+                <a:latin typeface="Arial"/>
+              </a:defRPr>
+            </a:pPr>
+            <a:r>
+              <a:t>JPA + PostgreSQL</a:t>
+            </a:r>
+          </a:p>
+        </p:txBody>
+      </p:sp>
+      <p:sp>
+        <p:nvSpPr>
+          <p:cNvPr id="24" name="TextBox 23"/>
+          <p:cNvSpPr txBox="1"/>
+          <p:nvPr/>
+        </p:nvSpPr>
+        <p:spPr>
+          <a:xfrm>
+            <a:off x="9220200" y="3708400"/>
+            <a:ext cx="2286000" cy="649986"/>
+          </a:xfrm>
+          <a:prstGeom prst="rect">
+            <a:avLst/>
+          </a:prstGeom>
+          <a:noFill/>
+        </p:spPr>
+        <p:txBody>
+          <a:bodyPr wrap="none" lIns="0" rIns="0" tIns="0" bIns="0">
+            <a:spAutoFit/>
+          </a:bodyPr>
+          <a:lstStyle/>
+          <a:p>
+            <a:pPr>
+              <a:lnSpc>
+                <a:spcPct val="115000"/>
+              </a:lnSpc>
+              <a:spcAft>
+                <a:spcPts val="0"/>
+              </a:spcAft>
+              <a:defRPr sz="1700" b="0">
                 <a:solidFill>
                   <a:srgbClr val="F4F7FA"/>
                 </a:solidFill>
@@ -9710,18 +13892,18 @@
               </a:defRPr>
             </a:pPr>
             <a:r>
-              <a:t>moedas gera um cupom. O</a:t>
-            </a:r>
-          </a:p>
-          <a:p>
-            <a:pPr>
-              <a:lnSpc>
-                <a:spcPct val="115000"/>
-              </a:lnSpc>
-              <a:spcAft>
-                <a:spcPts val="0"/>
-              </a:spcAft>
-              <a:defRPr sz="1900" b="0">
+              <a:t>Entidades e</a:t>
+            </a:r>
+          </a:p>
+          <a:p>
+            <a:pPr>
+              <a:lnSpc>
+                <a:spcPct val="115000"/>
+              </a:lnSpc>
+              <a:spcAft>
+                <a:spcPts val="0"/>
+              </a:spcAft>
+              <a:defRPr sz="1700" b="0">
                 <a:solidFill>
                   <a:srgbClr val="F4F7FA"/>
                 </a:solidFill>
@@ -9729,26 +13911,49 @@
               </a:defRPr>
             </a:pPr>
             <a:r>
-              <a:t>aluno fica com 40</a:t>
-            </a:r>
-          </a:p>
-          <a:p>
-            <a:pPr>
-              <a:lnSpc>
-                <a:spcPct val="115000"/>
-              </a:lnSpc>
-              <a:spcAft>
-                <a:spcPts val="0"/>
-              </a:spcAft>
-              <a:defRPr sz="1900" b="0">
-                <a:solidFill>
-                  <a:srgbClr val="F4F7FA"/>
-                </a:solidFill>
-                <a:latin typeface="Arial"/>
-              </a:defRPr>
-            </a:pPr>
-            <a:r>
-              <a:t>moedas.</a:t>
+              <a:t>persistência</a:t>
+            </a:r>
+          </a:p>
+        </p:txBody>
+      </p:sp>
+      <p:sp>
+        <p:nvSpPr>
+          <p:cNvPr id="25" name="TextBox 24"/>
+          <p:cNvSpPr txBox="1"/>
+          <p:nvPr/>
+        </p:nvSpPr>
+        <p:spPr>
+          <a:xfrm>
+            <a:off x="508000" y="5080000"/>
+            <a:ext cx="11049000" cy="440309"/>
+          </a:xfrm>
+          <a:prstGeom prst="rect">
+            <a:avLst/>
+          </a:prstGeom>
+          <a:noFill/>
+        </p:spPr>
+        <p:txBody>
+          <a:bodyPr wrap="none" lIns="0" rIns="0" tIns="0" bIns="0">
+            <a:spAutoFit/>
+          </a:bodyPr>
+          <a:lstStyle/>
+          <a:p>
+            <a:pPr>
+              <a:lnSpc>
+                <a:spcPct val="115000"/>
+              </a:lnSpc>
+              <a:spcAft>
+                <a:spcPts val="0"/>
+              </a:spcAft>
+              <a:defRPr sz="2100" b="0">
+                <a:solidFill>
+                  <a:srgbClr val="B6C7D9"/>
+                </a:solidFill>
+                <a:latin typeface="Arial"/>
+              </a:defRPr>
+            </a:pPr>
+            <a:r>
+              <a:t>Spring Boot no backend · Flyway versiona o esquema do banco.</a:t>
             </a:r>
           </a:p>
         </p:txBody>
@@ -9894,7 +14099,7 @@
               </a:defRPr>
             </a:pPr>
             <a:r>
-              <a:t>ARQUITETURA MVC</a:t>
+              <a:t>MODELO DE DADOS</a:t>
             </a:r>
           </a:p>
         </p:txBody>
@@ -9936,7 +14141,7 @@
               </a:defRPr>
             </a:pPr>
             <a:r>
-              <a:t>Responsabilidades bem definidas</a:t>
+              <a:t>Identidade, saldo e histórico</a:t>
             </a:r>
           </a:p>
         </p:txBody>
@@ -9978,7 +14183,7 @@
               </a:defRPr>
             </a:pPr>
             <a:r>
-              <a:t>A interface apresenta; os serviços aplicam as regras de negócio.</a:t>
+              <a:t>Visão resumida das relações; o ER completo está na documentação.</a:t>
             </a:r>
           </a:p>
         </p:txBody>
@@ -10118,8 +14323,8 @@
         </p:nvSpPr>
         <p:spPr>
           <a:xfrm>
-            <a:off x="508000" y="2667000"/>
-            <a:ext cx="2641600" cy="1905000"/>
+            <a:off x="508000" y="2438400"/>
+            <a:ext cx="3589866" cy="3352800"/>
           </a:xfrm>
           <a:prstGeom prst="rect">
             <a:avLst/>
@@ -10161,8 +14366,8 @@
         </p:nvSpPr>
         <p:spPr>
           <a:xfrm>
-            <a:off x="685800" y="2921000"/>
-            <a:ext cx="2286000" cy="779018"/>
+            <a:off x="762000" y="2667000"/>
+            <a:ext cx="3081866" cy="456438"/>
           </a:xfrm>
           <a:prstGeom prst="rect">
             <a:avLst/>
@@ -10182,7 +14387,7 @@
               <a:spcAft>
                 <a:spcPts val="0"/>
               </a:spcAft>
-              <a:defRPr sz="2100" b="1">
+              <a:defRPr sz="2200" b="1">
                 <a:solidFill>
                   <a:srgbClr val="56D9B0"/>
                 </a:solidFill>
@@ -10190,26 +14395,7 @@
               </a:defRPr>
             </a:pPr>
             <a:r>
-              <a:t>React +</a:t>
-            </a:r>
-          </a:p>
-          <a:p>
-            <a:pPr>
-              <a:lnSpc>
-                <a:spcPct val="115000"/>
-              </a:lnSpc>
-              <a:spcAft>
-                <a:spcPts val="0"/>
-              </a:spcAft>
-              <a:defRPr sz="2100" b="1">
-                <a:solidFill>
-                  <a:srgbClr val="56D9B0"/>
-                </a:solidFill>
-                <a:latin typeface="Arial"/>
-              </a:defRPr>
-            </a:pPr>
-            <a:r>
-              <a:t>TypeScript</a:t>
+              <a:t>Identidade</a:t>
             </a:r>
           </a:p>
         </p:txBody>
@@ -10222,8 +14408,8 @@
         </p:nvSpPr>
         <p:spPr>
           <a:xfrm>
-            <a:off x="685800" y="3708400"/>
-            <a:ext cx="2286000" cy="649986"/>
+            <a:off x="762000" y="3327400"/>
+            <a:ext cx="3081866" cy="1327404"/>
           </a:xfrm>
           <a:prstGeom prst="rect">
             <a:avLst/>
@@ -10243,7 +14429,7 @@
               <a:spcAft>
                 <a:spcPts val="0"/>
               </a:spcAft>
-              <a:defRPr sz="1700" b="0">
+              <a:defRPr sz="1900" b="0">
                 <a:solidFill>
                   <a:srgbClr val="F4F7FA"/>
                 </a:solidFill>
@@ -10251,18 +14437,18 @@
               </a:defRPr>
             </a:pPr>
             <a:r>
-              <a:t>Telas e chamadas</a:t>
-            </a:r>
-          </a:p>
-          <a:p>
-            <a:pPr>
-              <a:lnSpc>
-                <a:spcPct val="115000"/>
-              </a:lnSpc>
-              <a:spcAft>
-                <a:spcPts val="0"/>
-              </a:spcAft>
-              <a:defRPr sz="1700" b="0">
+              <a:t>Usuário vincula aluno,</a:t>
+            </a:r>
+          </a:p>
+          <a:p>
+            <a:pPr>
+              <a:lnSpc>
+                <a:spcPct val="115000"/>
+              </a:lnSpc>
+              <a:spcAft>
+                <a:spcPts val="0"/>
+              </a:spcAft>
+              <a:defRPr sz="1900" b="0">
                 <a:solidFill>
                   <a:srgbClr val="F4F7FA"/>
                 </a:solidFill>
@@ -10270,63 +14456,59 @@
               </a:defRPr>
             </a:pPr>
             <a:r>
-              <a:t>HTTP</a:t>
-            </a:r>
-          </a:p>
-        </p:txBody>
-      </p:sp>
-      <p:sp>
-        <p:nvSpPr>
-          <p:cNvPr id="13" name="TextBox 12"/>
-          <p:cNvSpPr txBox="1"/>
-          <p:nvPr/>
-        </p:nvSpPr>
-        <p:spPr>
-          <a:xfrm>
-            <a:off x="3149600" y="3390900"/>
-            <a:ext cx="254000" cy="408050"/>
-          </a:xfrm>
-          <a:prstGeom prst="rect">
-            <a:avLst/>
-          </a:prstGeom>
-          <a:noFill/>
-        </p:spPr>
-        <p:txBody>
-          <a:bodyPr wrap="none" lIns="0" rIns="0" tIns="0" bIns="0">
-            <a:spAutoFit/>
-          </a:bodyPr>
-          <a:lstStyle/>
-          <a:p>
-            <a:pPr>
-              <a:lnSpc>
-                <a:spcPct val="115000"/>
-              </a:lnSpc>
-              <a:spcAft>
-                <a:spcPts val="0"/>
-              </a:spcAft>
-              <a:defRPr sz="1900" b="1">
-                <a:solidFill>
-                  <a:srgbClr val="56D9B0"/>
-                </a:solidFill>
-                <a:latin typeface="Arial"/>
-              </a:defRPr>
-            </a:pPr>
-            <a:r>
-              <a:t>›</a:t>
-            </a:r>
-          </a:p>
-        </p:txBody>
-      </p:sp>
-      <p:sp>
-        <p:nvSpPr>
-          <p:cNvPr id="14" name="Rectangle 13"/>
+              <a:t>professor ou empresa.</a:t>
+            </a:r>
+          </a:p>
+          <a:p>
+            <a:pPr>
+              <a:lnSpc>
+                <a:spcPct val="115000"/>
+              </a:lnSpc>
+              <a:spcAft>
+                <a:spcPts val="0"/>
+              </a:spcAft>
+              <a:defRPr sz="1900" b="0">
+                <a:solidFill>
+                  <a:srgbClr val="F4F7FA"/>
+                </a:solidFill>
+                <a:latin typeface="Arial"/>
+              </a:defRPr>
+            </a:pPr>
+            <a:r>
+              <a:t>Aluno e professor têm</a:t>
+            </a:r>
+          </a:p>
+          <a:p>
+            <a:pPr>
+              <a:lnSpc>
+                <a:spcPct val="115000"/>
+              </a:lnSpc>
+              <a:spcAft>
+                <a:spcPts val="0"/>
+              </a:spcAft>
+              <a:defRPr sz="1900" b="0">
+                <a:solidFill>
+                  <a:srgbClr val="F4F7FA"/>
+                </a:solidFill>
+                <a:latin typeface="Arial"/>
+              </a:defRPr>
+            </a:pPr>
+            <a:r>
+              <a:t>instituição.</a:t>
+            </a:r>
+          </a:p>
+        </p:txBody>
+      </p:sp>
+      <p:sp>
+        <p:nvSpPr>
+          <p:cNvPr id="13" name="Rectangle 12"/>
           <p:cNvSpPr/>
           <p:nvPr/>
         </p:nvSpPr>
         <p:spPr>
           <a:xfrm>
-            <a:off x="3352800" y="2667000"/>
-            <a:ext cx="2641600" cy="1905000"/>
+            <a:off x="4301066" y="2438400"/>
+            <a:ext cx="3589866" cy="3352800"/>
           </a:xfrm>
           <a:prstGeom prst="rect">
             <a:avLst/>
@@ -10362,14 +14544,14 @@
       </p:sp>
       <p:sp>
         <p:nvSpPr>
-          <p:cNvPr id="15" name="TextBox 14"/>
+          <p:cNvPr id="14" name="TextBox 13"/>
           <p:cNvSpPr txBox="1"/>
           <p:nvPr/>
         </p:nvSpPr>
         <p:spPr>
           <a:xfrm>
-            <a:off x="3530600" y="2921000"/>
-            <a:ext cx="2286000" cy="440309"/>
+            <a:off x="4555066" y="2667000"/>
+            <a:ext cx="3081866" cy="456438"/>
           </a:xfrm>
           <a:prstGeom prst="rect">
             <a:avLst/>
@@ -10389,7 +14571,7 @@
               <a:spcAft>
                 <a:spcPts val="0"/>
               </a:spcAft>
-              <a:defRPr sz="2100" b="1">
+              <a:defRPr sz="2200" b="1">
                 <a:solidFill>
                   <a:srgbClr val="56D9B0"/>
                 </a:solidFill>
@@ -10397,21 +14579,21 @@
               </a:defRPr>
             </a:pPr>
             <a:r>
-              <a:t>Controllers</a:t>
-            </a:r>
-          </a:p>
-        </p:txBody>
-      </p:sp>
-      <p:sp>
-        <p:nvSpPr>
-          <p:cNvPr id="16" name="TextBox 15"/>
+              <a:t>Moedas</a:t>
+            </a:r>
+          </a:p>
+        </p:txBody>
+      </p:sp>
+      <p:sp>
+        <p:nvSpPr>
+          <p:cNvPr id="15" name="TextBox 14"/>
           <p:cNvSpPr txBox="1"/>
           <p:nvPr/>
         </p:nvSpPr>
         <p:spPr>
           <a:xfrm>
-            <a:off x="3530600" y="3708400"/>
-            <a:ext cx="2286000" cy="649986"/>
+            <a:off x="4555066" y="3327400"/>
+            <a:ext cx="3081866" cy="1633855"/>
           </a:xfrm>
           <a:prstGeom prst="rect">
             <a:avLst/>
@@ -10431,7 +14613,7 @@
               <a:spcAft>
                 <a:spcPts val="0"/>
               </a:spcAft>
-              <a:defRPr sz="1700" b="0">
+              <a:defRPr sz="1900" b="0">
                 <a:solidFill>
                   <a:srgbClr val="F4F7FA"/>
                 </a:solidFill>
@@ -10439,18 +14621,18 @@
               </a:defRPr>
             </a:pPr>
             <a:r>
-              <a:t>HTTP, DTOs e</a:t>
-            </a:r>
-          </a:p>
-          <a:p>
-            <a:pPr>
-              <a:lnSpc>
-                <a:spcPct val="115000"/>
-              </a:lnSpc>
-              <a:spcAft>
-                <a:spcPts val="0"/>
-              </a:spcAft>
-              <a:defRPr sz="1700" b="0">
+              <a:t>Aluno e professor têm</a:t>
+            </a:r>
+          </a:p>
+          <a:p>
+            <a:pPr>
+              <a:lnSpc>
+                <a:spcPct val="115000"/>
+              </a:lnSpc>
+              <a:spcAft>
+                <a:spcPts val="0"/>
+              </a:spcAft>
+              <a:defRPr sz="1900" b="0">
                 <a:solidFill>
                   <a:srgbClr val="F4F7FA"/>
                 </a:solidFill>
@@ -10458,63 +14640,78 @@
               </a:defRPr>
             </a:pPr>
             <a:r>
-              <a:t>validação</a:t>
-            </a:r>
-          </a:p>
-        </p:txBody>
-      </p:sp>
-      <p:sp>
-        <p:nvSpPr>
-          <p:cNvPr id="17" name="TextBox 16"/>
-          <p:cNvSpPr txBox="1"/>
-          <p:nvPr/>
-        </p:nvSpPr>
-        <p:spPr>
-          <a:xfrm>
-            <a:off x="5994400" y="3390900"/>
-            <a:ext cx="254000" cy="408050"/>
-          </a:xfrm>
-          <a:prstGeom prst="rect">
-            <a:avLst/>
-          </a:prstGeom>
-          <a:noFill/>
-        </p:spPr>
-        <p:txBody>
-          <a:bodyPr wrap="none" lIns="0" rIns="0" tIns="0" bIns="0">
-            <a:spAutoFit/>
-          </a:bodyPr>
-          <a:lstStyle/>
-          <a:p>
-            <a:pPr>
-              <a:lnSpc>
-                <a:spcPct val="115000"/>
-              </a:lnSpc>
-              <a:spcAft>
-                <a:spcPts val="0"/>
-              </a:spcAft>
-              <a:defRPr sz="1900" b="1">
-                <a:solidFill>
-                  <a:srgbClr val="56D9B0"/>
-                </a:solidFill>
-                <a:latin typeface="Arial"/>
-              </a:defRPr>
-            </a:pPr>
-            <a:r>
-              <a:t>›</a:t>
-            </a:r>
-          </a:p>
-        </p:txBody>
-      </p:sp>
-      <p:sp>
-        <p:nvSpPr>
-          <p:cNvPr id="18" name="Rectangle 17"/>
+              <a:t>conta.</a:t>
+            </a:r>
+          </a:p>
+          <a:p>
+            <a:pPr>
+              <a:lnSpc>
+                <a:spcPct val="115000"/>
+              </a:lnSpc>
+              <a:spcAft>
+                <a:spcPts val="0"/>
+              </a:spcAft>
+              <a:defRPr sz="1900" b="0">
+                <a:solidFill>
+                  <a:srgbClr val="F4F7FA"/>
+                </a:solidFill>
+                <a:latin typeface="Arial"/>
+              </a:defRPr>
+            </a:pPr>
+            <a:r>
+              <a:t>Movimentações registram</a:t>
+            </a:r>
+          </a:p>
+          <a:p>
+            <a:pPr>
+              <a:lnSpc>
+                <a:spcPct val="115000"/>
+              </a:lnSpc>
+              <a:spcAft>
+                <a:spcPts val="0"/>
+              </a:spcAft>
+              <a:defRPr sz="1900" b="0">
+                <a:solidFill>
+                  <a:srgbClr val="F4F7FA"/>
+                </a:solidFill>
+                <a:latin typeface="Arial"/>
+              </a:defRPr>
+            </a:pPr>
+            <a:r>
+              <a:t>créditos, envios e</a:t>
+            </a:r>
+          </a:p>
+          <a:p>
+            <a:pPr>
+              <a:lnSpc>
+                <a:spcPct val="115000"/>
+              </a:lnSpc>
+              <a:spcAft>
+                <a:spcPts val="0"/>
+              </a:spcAft>
+              <a:defRPr sz="1900" b="0">
+                <a:solidFill>
+                  <a:srgbClr val="F4F7FA"/>
+                </a:solidFill>
+                <a:latin typeface="Arial"/>
+              </a:defRPr>
+            </a:pPr>
+            <a:r>
+              <a:t>resgates.</a:t>
+            </a:r>
+          </a:p>
+        </p:txBody>
+      </p:sp>
+      <p:sp>
+        <p:nvSpPr>
+          <p:cNvPr id="16" name="Rectangle 15"/>
           <p:cNvSpPr/>
           <p:nvPr/>
         </p:nvSpPr>
         <p:spPr>
           <a:xfrm>
-            <a:off x="6197600" y="2667000"/>
-            <a:ext cx="2641600" cy="1905000"/>
+            <a:off x="8094133" y="2438400"/>
+            <a:ext cx="3589866" cy="3352800"/>
           </a:xfrm>
           <a:prstGeom prst="rect">
             <a:avLst/>
@@ -10550,14 +14747,14 @@
       </p:sp>
       <p:sp>
         <p:nvSpPr>
-          <p:cNvPr id="19" name="TextBox 18"/>
+          <p:cNvPr id="17" name="TextBox 16"/>
           <p:cNvSpPr txBox="1"/>
           <p:nvPr/>
         </p:nvSpPr>
         <p:spPr>
           <a:xfrm>
-            <a:off x="6375400" y="2921000"/>
-            <a:ext cx="2286000" cy="440309"/>
+            <a:off x="8348133" y="2667000"/>
+            <a:ext cx="3081866" cy="456438"/>
           </a:xfrm>
           <a:prstGeom prst="rect">
             <a:avLst/>
@@ -10577,7 +14774,7 @@
               <a:spcAft>
                 <a:spcPts val="0"/>
               </a:spcAft>
-              <a:defRPr sz="2100" b="1">
+              <a:defRPr sz="2200" b="1">
                 <a:solidFill>
                   <a:srgbClr val="56D9B0"/>
                 </a:solidFill>
@@ -10585,21 +14782,21 @@
               </a:defRPr>
             </a:pPr>
             <a:r>
-              <a:t>Services</a:t>
-            </a:r>
-          </a:p>
-        </p:txBody>
-      </p:sp>
-      <p:sp>
-        <p:nvSpPr>
-          <p:cNvPr id="20" name="TextBox 19"/>
+              <a:t>Benefícios</a:t>
+            </a:r>
+          </a:p>
+        </p:txBody>
+      </p:sp>
+      <p:sp>
+        <p:nvSpPr>
+          <p:cNvPr id="18" name="TextBox 17"/>
           <p:cNvSpPr txBox="1"/>
           <p:nvPr/>
         </p:nvSpPr>
         <p:spPr>
           <a:xfrm>
-            <a:off x="6375400" y="3708400"/>
-            <a:ext cx="2286000" cy="375793"/>
+            <a:off x="8348133" y="3327400"/>
+            <a:ext cx="3081866" cy="1633855"/>
           </a:xfrm>
           <a:prstGeom prst="rect">
             <a:avLst/>
@@ -10619,7 +14816,7 @@
               <a:spcAft>
                 <a:spcPts val="0"/>
               </a:spcAft>
-              <a:defRPr sz="1700" b="0">
+              <a:defRPr sz="1900" b="0">
                 <a:solidFill>
                   <a:srgbClr val="F4F7FA"/>
                 </a:solidFill>
@@ -10627,168 +14824,18 @@
               </a:defRPr>
             </a:pPr>
             <a:r>
-              <a:t>Regras e transações</a:t>
-            </a:r>
-          </a:p>
-        </p:txBody>
-      </p:sp>
-      <p:sp>
-        <p:nvSpPr>
-          <p:cNvPr id="21" name="TextBox 20"/>
-          <p:cNvSpPr txBox="1"/>
-          <p:nvPr/>
-        </p:nvSpPr>
-        <p:spPr>
-          <a:xfrm>
-            <a:off x="8839200" y="3390900"/>
-            <a:ext cx="254000" cy="408050"/>
-          </a:xfrm>
-          <a:prstGeom prst="rect">
-            <a:avLst/>
-          </a:prstGeom>
-          <a:noFill/>
-        </p:spPr>
-        <p:txBody>
-          <a:bodyPr wrap="none" lIns="0" rIns="0" tIns="0" bIns="0">
-            <a:spAutoFit/>
-          </a:bodyPr>
-          <a:lstStyle/>
-          <a:p>
-            <a:pPr>
-              <a:lnSpc>
-                <a:spcPct val="115000"/>
-              </a:lnSpc>
-              <a:spcAft>
-                <a:spcPts val="0"/>
-              </a:spcAft>
-              <a:defRPr sz="1900" b="1">
-                <a:solidFill>
-                  <a:srgbClr val="56D9B0"/>
-                </a:solidFill>
-                <a:latin typeface="Arial"/>
-              </a:defRPr>
-            </a:pPr>
-            <a:r>
-              <a:t>›</a:t>
-            </a:r>
-          </a:p>
-        </p:txBody>
-      </p:sp>
-      <p:sp>
-        <p:nvSpPr>
-          <p:cNvPr id="22" name="Rectangle 21"/>
-          <p:cNvSpPr/>
-          <p:nvPr/>
-        </p:nvSpPr>
-        <p:spPr>
-          <a:xfrm>
-            <a:off x="9042400" y="2667000"/>
-            <a:ext cx="2641600" cy="1905000"/>
-          </a:xfrm>
-          <a:prstGeom prst="rect">
-            <a:avLst/>
-          </a:prstGeom>
-          <a:solidFill>
-            <a:srgbClr val="1B2D42"/>
-          </a:solidFill>
-          <a:ln>
-            <a:noFill/>
-          </a:ln>
-        </p:spPr>
-        <p:style>
-          <a:lnRef idx="1">
-            <a:schemeClr val="accent1"/>
-          </a:lnRef>
-          <a:fillRef idx="3">
-            <a:schemeClr val="accent1"/>
-          </a:fillRef>
-          <a:effectRef idx="2">
-            <a:schemeClr val="accent1"/>
-          </a:effectRef>
-          <a:fontRef idx="minor">
-            <a:schemeClr val="lt1"/>
-          </a:fontRef>
-        </p:style>
-        <p:txBody>
-          <a:bodyPr rtlCol="0" anchor="ctr"/>
-          <a:lstStyle/>
-          <a:p>
-            <a:pPr algn="ctr"/>
-          </a:p>
-        </p:txBody>
-      </p:sp>
-      <p:sp>
-        <p:nvSpPr>
-          <p:cNvPr id="23" name="TextBox 22"/>
-          <p:cNvSpPr txBox="1"/>
-          <p:nvPr/>
-        </p:nvSpPr>
-        <p:spPr>
-          <a:xfrm>
-            <a:off x="9220200" y="2921000"/>
-            <a:ext cx="2286000" cy="440309"/>
-          </a:xfrm>
-          <a:prstGeom prst="rect">
-            <a:avLst/>
-          </a:prstGeom>
-          <a:noFill/>
-        </p:spPr>
-        <p:txBody>
-          <a:bodyPr wrap="none" lIns="0" rIns="0" tIns="0" bIns="0">
-            <a:spAutoFit/>
-          </a:bodyPr>
-          <a:lstStyle/>
-          <a:p>
-            <a:pPr>
-              <a:lnSpc>
-                <a:spcPct val="115000"/>
-              </a:lnSpc>
-              <a:spcAft>
-                <a:spcPts val="0"/>
-              </a:spcAft>
-              <a:defRPr sz="2100" b="1">
-                <a:solidFill>
-                  <a:srgbClr val="56D9B0"/>
-                </a:solidFill>
-                <a:latin typeface="Arial"/>
-              </a:defRPr>
-            </a:pPr>
-            <a:r>
-              <a:t>JPA + PostgreSQL</a:t>
-            </a:r>
-          </a:p>
-        </p:txBody>
-      </p:sp>
-      <p:sp>
-        <p:nvSpPr>
-          <p:cNvPr id="24" name="TextBox 23"/>
-          <p:cNvSpPr txBox="1"/>
-          <p:nvPr/>
-        </p:nvSpPr>
-        <p:spPr>
-          <a:xfrm>
-            <a:off x="9220200" y="3708400"/>
-            <a:ext cx="2286000" cy="649986"/>
-          </a:xfrm>
-          <a:prstGeom prst="rect">
-            <a:avLst/>
-          </a:prstGeom>
-          <a:noFill/>
-        </p:spPr>
-        <p:txBody>
-          <a:bodyPr wrap="none" lIns="0" rIns="0" tIns="0" bIns="0">
-            <a:spAutoFit/>
-          </a:bodyPr>
-          <a:lstStyle/>
-          <a:p>
-            <a:pPr>
-              <a:lnSpc>
-                <a:spcPct val="115000"/>
-              </a:lnSpc>
-              <a:spcAft>
-                <a:spcPts val="0"/>
-              </a:spcAft>
-              <a:defRPr sz="1700" b="0">
+              <a:t>Empresa publica</a:t>
+            </a:r>
+          </a:p>
+          <a:p>
+            <a:pPr>
+              <a:lnSpc>
+                <a:spcPct val="115000"/>
+              </a:lnSpc>
+              <a:spcAft>
+                <a:spcPts val="0"/>
+              </a:spcAft>
+              <a:defRPr sz="1900" b="0">
                 <a:solidFill>
                   <a:srgbClr val="F4F7FA"/>
                 </a:solidFill>
@@ -10796,18 +14843,18 @@
               </a:defRPr>
             </a:pPr>
             <a:r>
-              <a:t>Entidades e</a:t>
-            </a:r>
-          </a:p>
-          <a:p>
-            <a:pPr>
-              <a:lnSpc>
-                <a:spcPct val="115000"/>
-              </a:lnSpc>
-              <a:spcAft>
-                <a:spcPts val="0"/>
-              </a:spcAft>
-              <a:defRPr sz="1700" b="0">
+              <a:t>vantagem.</a:t>
+            </a:r>
+          </a:p>
+          <a:p>
+            <a:pPr>
+              <a:lnSpc>
+                <a:spcPct val="115000"/>
+              </a:lnSpc>
+              <a:spcAft>
+                <a:spcPts val="0"/>
+              </a:spcAft>
+              <a:defRPr sz="1900" b="0">
                 <a:solidFill>
                   <a:srgbClr val="F4F7FA"/>
                 </a:solidFill>
@@ -10815,49 +14862,45 @@
               </a:defRPr>
             </a:pPr>
             <a:r>
-              <a:t>persistência</a:t>
-            </a:r>
-          </a:p>
-        </p:txBody>
-      </p:sp>
-      <p:sp>
-        <p:nvSpPr>
-          <p:cNvPr id="25" name="TextBox 24"/>
-          <p:cNvSpPr txBox="1"/>
-          <p:nvPr/>
-        </p:nvSpPr>
-        <p:spPr>
-          <a:xfrm>
-            <a:off x="508000" y="5080000"/>
-            <a:ext cx="11049000" cy="440309"/>
-          </a:xfrm>
-          <a:prstGeom prst="rect">
-            <a:avLst/>
-          </a:prstGeom>
-          <a:noFill/>
-        </p:spPr>
-        <p:txBody>
-          <a:bodyPr wrap="none" lIns="0" rIns="0" tIns="0" bIns="0">
-            <a:spAutoFit/>
-          </a:bodyPr>
-          <a:lstStyle/>
-          <a:p>
-            <a:pPr>
-              <a:lnSpc>
-                <a:spcPct val="115000"/>
-              </a:lnSpc>
-              <a:spcAft>
-                <a:spcPts val="0"/>
-              </a:spcAft>
-              <a:defRPr sz="2100" b="0">
-                <a:solidFill>
-                  <a:srgbClr val="B6C7D9"/>
-                </a:solidFill>
-                <a:latin typeface="Arial"/>
-              </a:defRPr>
-            </a:pPr>
-            <a:r>
-              <a:t>Spring Boot no backend · Flyway versiona o esquema do banco.</a:t>
+              <a:t>Resgate guarda cupom.</a:t>
+            </a:r>
+          </a:p>
+          <a:p>
+            <a:pPr>
+              <a:lnSpc>
+                <a:spcPct val="115000"/>
+              </a:lnSpc>
+              <a:spcAft>
+                <a:spcPts val="0"/>
+              </a:spcAft>
+              <a:defRPr sz="1900" b="0">
+                <a:solidFill>
+                  <a:srgbClr val="F4F7FA"/>
+                </a:solidFill>
+                <a:latin typeface="Arial"/>
+              </a:defRPr>
+            </a:pPr>
+            <a:r>
+              <a:t>Notificação registra o</a:t>
+            </a:r>
+          </a:p>
+          <a:p>
+            <a:pPr>
+              <a:lnSpc>
+                <a:spcPct val="115000"/>
+              </a:lnSpc>
+              <a:spcAft>
+                <a:spcPts val="0"/>
+              </a:spcAft>
+              <a:defRPr sz="1900" b="0">
+                <a:solidFill>
+                  <a:srgbClr val="F4F7FA"/>
+                </a:solidFill>
+                <a:latin typeface="Arial"/>
+              </a:defRPr>
+            </a:pPr>
+            <a:r>
+              <a:t>email.</a:t>
             </a:r>
           </a:p>
         </p:txBody>
@@ -11003,7 +15046,7 @@
               </a:defRPr>
             </a:pPr>
             <a:r>
-              <a:t>MODELO DE DADOS</a:t>
+              <a:t>INTEGRIDADE</a:t>
             </a:r>
           </a:p>
         </p:txBody>
@@ -11045,7 +15088,7 @@
               </a:defRPr>
             </a:pPr>
             <a:r>
-              <a:t>Identidade, saldo e histórico</a:t>
+              <a:t>Uma operação, um registro consistente</a:t>
             </a:r>
           </a:p>
         </p:txBody>
@@ -11087,7 +15130,7 @@
               </a:defRPr>
             </a:pPr>
             <a:r>
-              <a:t>Visão resumida das relações; o ER completo está na documentação.</a:t>
+              <a:t>Saldo, movimentação e intenção de email são confirmados juntos.</a:t>
             </a:r>
           </a:p>
         </p:txBody>
@@ -11228,7 +15271,7 @@
         <p:spPr>
           <a:xfrm>
             <a:off x="508000" y="2438400"/>
-            <a:ext cx="3589866" cy="3352800"/>
+            <a:ext cx="3589866" cy="3048000"/>
           </a:xfrm>
           <a:prstGeom prst="rect">
             <a:avLst/>
@@ -11299,7 +15342,7 @@
               </a:defRPr>
             </a:pPr>
             <a:r>
-              <a:t>Identidade</a:t>
+              <a:t>Saldo protegido</a:t>
             </a:r>
           </a:p>
         </p:txBody>
@@ -11313,7 +15356,7 @@
         <p:spPr>
           <a:xfrm>
             <a:off x="762000" y="3327400"/>
-            <a:ext cx="3081866" cy="1327404"/>
+            <a:ext cx="3081866" cy="1020953"/>
           </a:xfrm>
           <a:prstGeom prst="rect">
             <a:avLst/>
@@ -11341,7 +15384,7 @@
               </a:defRPr>
             </a:pPr>
             <a:r>
-              <a:t>Usuário vincula aluno,</a:t>
+              <a:t>Bloqueio de contas e</a:t>
             </a:r>
           </a:p>
           <a:p>
@@ -11360,7 +15403,7 @@
               </a:defRPr>
             </a:pPr>
             <a:r>
-              <a:t>professor ou empresa.</a:t>
+              <a:t>validação impedem débito</a:t>
             </a:r>
           </a:p>
           <a:p>
@@ -11379,26 +15422,7 @@
               </a:defRPr>
             </a:pPr>
             <a:r>
-              <a:t>Aluno e professor têm</a:t>
-            </a:r>
-          </a:p>
-          <a:p>
-            <a:pPr>
-              <a:lnSpc>
-                <a:spcPct val="115000"/>
-              </a:lnSpc>
-              <a:spcAft>
-                <a:spcPts val="0"/>
-              </a:spcAft>
-              <a:defRPr sz="1900" b="0">
-                <a:solidFill>
-                  <a:srgbClr val="F4F7FA"/>
-                </a:solidFill>
-                <a:latin typeface="Arial"/>
-              </a:defRPr>
-            </a:pPr>
-            <a:r>
-              <a:t>instituição.</a:t>
+              <a:t>acima do saldo.</a:t>
             </a:r>
           </a:p>
         </p:txBody>
@@ -11412,7 +15436,7 @@
         <p:spPr>
           <a:xfrm>
             <a:off x="4301066" y="2438400"/>
-            <a:ext cx="3589866" cy="3352800"/>
+            <a:ext cx="3589866" cy="3048000"/>
           </a:xfrm>
           <a:prstGeom prst="rect">
             <a:avLst/>
@@ -11483,7 +15507,7 @@
               </a:defRPr>
             </a:pPr>
             <a:r>
-              <a:t>Moedas</a:t>
+              <a:t>Sem duplicidade</a:t>
             </a:r>
           </a:p>
         </p:txBody>
@@ -11497,7 +15521,7 @@
         <p:spPr>
           <a:xfrm>
             <a:off x="4555066" y="3327400"/>
-            <a:ext cx="3081866" cy="1633855"/>
+            <a:ext cx="3081866" cy="1327404"/>
           </a:xfrm>
           <a:prstGeom prst="rect">
             <a:avLst/>
@@ -11525,7 +15549,7 @@
               </a:defRPr>
             </a:pPr>
             <a:r>
-              <a:t>Aluno e professor têm</a:t>
+              <a:t>Uma identificação por</a:t>
             </a:r>
           </a:p>
           <a:p>
@@ -11544,7 +15568,7 @@
               </a:defRPr>
             </a:pPr>
             <a:r>
-              <a:t>conta.</a:t>
+              <a:t>comando evita repetir o</a:t>
             </a:r>
           </a:p>
           <a:p>
@@ -11563,7 +15587,7 @@
               </a:defRPr>
             </a:pPr>
             <a:r>
-              <a:t>Movimentações registram</a:t>
+              <a:t>débito ao reenviar a</a:t>
             </a:r>
           </a:p>
           <a:p>
@@ -11582,26 +15606,7 @@
               </a:defRPr>
             </a:pPr>
             <a:r>
-              <a:t>créditos, envios e</a:t>
-            </a:r>
-          </a:p>
-          <a:p>
-            <a:pPr>
-              <a:lnSpc>
-                <a:spcPct val="115000"/>
-              </a:lnSpc>
-              <a:spcAft>
-                <a:spcPts val="0"/>
-              </a:spcAft>
-              <a:defRPr sz="1900" b="0">
-                <a:solidFill>
-                  <a:srgbClr val="F4F7FA"/>
-                </a:solidFill>
-                <a:latin typeface="Arial"/>
-              </a:defRPr>
-            </a:pPr>
-            <a:r>
-              <a:t>resgates.</a:t>
+              <a:t>operação.</a:t>
             </a:r>
           </a:p>
         </p:txBody>
@@ -11615,7 +15620,7 @@
         <p:spPr>
           <a:xfrm>
             <a:off x="8094133" y="2438400"/>
-            <a:ext cx="3589866" cy="3352800"/>
+            <a:ext cx="3589866" cy="3048000"/>
           </a:xfrm>
           <a:prstGeom prst="rect">
             <a:avLst/>
@@ -11686,7 +15691,7 @@
               </a:defRPr>
             </a:pPr>
             <a:r>
-              <a:t>Benefícios</a:t>
+              <a:t>Histórico preservado</a:t>
             </a:r>
           </a:p>
         </p:txBody>
@@ -11700,7 +15705,7 @@
         <p:spPr>
           <a:xfrm>
             <a:off x="8348133" y="3327400"/>
-            <a:ext cx="3081866" cy="1633855"/>
+            <a:ext cx="3081866" cy="1327404"/>
           </a:xfrm>
           <a:prstGeom prst="rect">
             <a:avLst/>
@@ -11728,7 +15733,7 @@
               </a:defRPr>
             </a:pPr>
             <a:r>
-              <a:t>Empresa publica</a:t>
+              <a:t>Inativação conserva</a:t>
             </a:r>
           </a:p>
           <a:p>
@@ -11747,7 +15752,7 @@
               </a:defRPr>
             </a:pPr>
             <a:r>
-              <a:t>vantagem.</a:t>
+              <a:t>cadastros e</a:t>
             </a:r>
           </a:p>
           <a:p>
@@ -11766,7 +15771,7 @@
               </a:defRPr>
             </a:pPr>
             <a:r>
-              <a:t>Resgate guarda cupom.</a:t>
+              <a:t>movimentações já</a:t>
             </a:r>
           </a:p>
           <a:p>
@@ -11785,26 +15790,7 @@
               </a:defRPr>
             </a:pPr>
             <a:r>
-              <a:t>Notificação registra o</a:t>
-            </a:r>
-          </a:p>
-          <a:p>
-            <a:pPr>
-              <a:lnSpc>
-                <a:spcPct val="115000"/>
-              </a:lnSpc>
-              <a:spcAft>
-                <a:spcPts val="0"/>
-              </a:spcAft>
-              <a:defRPr sz="1900" b="0">
-                <a:solidFill>
-                  <a:srgbClr val="F4F7FA"/>
-                </a:solidFill>
-                <a:latin typeface="Arial"/>
-              </a:defRPr>
-            </a:pPr>
-            <a:r>
-              <a:t>email.</a:t>
+              <a:t>realizadas.</a:t>
             </a:r>
           </a:p>
         </p:txBody>
@@ -11950,7 +15936,7 @@
               </a:defRPr>
             </a:pPr>
             <a:r>
-              <a:t>INTEGRIDADE</a:t>
+              <a:t>ACESSO E SEGURANÇA</a:t>
             </a:r>
           </a:p>
         </p:txBody>
@@ -11992,7 +15978,7 @@
               </a:defRPr>
             </a:pPr>
             <a:r>
-              <a:t>Uma operação, um registro consistente</a:t>
+              <a:t>Cada perfil acessa suas funções</a:t>
             </a:r>
           </a:p>
         </p:txBody>
@@ -12034,7 +16020,7 @@
               </a:defRPr>
             </a:pPr>
             <a:r>
-              <a:t>Saldo, movimentação e intenção de email são confirmados juntos.</a:t>
+              <a:t>Autorização no backend acompanha a navegação da interface.</a:t>
             </a:r>
           </a:p>
         </p:txBody>
@@ -12246,7 +16232,7 @@
               </a:defRPr>
             </a:pPr>
             <a:r>
-              <a:t>Saldo protegido</a:t>
+              <a:t>Autenticação</a:t>
             </a:r>
           </a:p>
         </p:txBody>
@@ -12260,7 +16246,7 @@
         <p:spPr>
           <a:xfrm>
             <a:off x="762000" y="3327400"/>
-            <a:ext cx="3081866" cy="1020953"/>
+            <a:ext cx="3081866" cy="1327404"/>
           </a:xfrm>
           <a:prstGeom prst="rect">
             <a:avLst/>
@@ -12288,7 +16274,7 @@
               </a:defRPr>
             </a:pPr>
             <a:r>
-              <a:t>Bloqueio de contas e</a:t>
+              <a:t>Senhas com BCrypt.</a:t>
             </a:r>
           </a:p>
           <a:p>
@@ -12307,7 +16293,7 @@
               </a:defRPr>
             </a:pPr>
             <a:r>
-              <a:t>validação impedem débito</a:t>
+              <a:t>Sessão com cookie</a:t>
             </a:r>
           </a:p>
           <a:p>
@@ -12326,7 +16312,26 @@
               </a:defRPr>
             </a:pPr>
             <a:r>
-              <a:t>acima do saldo.</a:t>
+              <a:t>HttpOnly e proteção</a:t>
+            </a:r>
+          </a:p>
+          <a:p>
+            <a:pPr>
+              <a:lnSpc>
+                <a:spcPct val="115000"/>
+              </a:lnSpc>
+              <a:spcAft>
+                <a:spcPts val="0"/>
+              </a:spcAft>
+              <a:defRPr sz="1900" b="0">
+                <a:solidFill>
+                  <a:srgbClr val="F4F7FA"/>
+                </a:solidFill>
+                <a:latin typeface="Arial"/>
+              </a:defRPr>
+            </a:pPr>
+            <a:r>
+              <a:t>CSRF.</a:t>
             </a:r>
           </a:p>
         </p:txBody>
@@ -12411,7 +16416,7 @@
               </a:defRPr>
             </a:pPr>
             <a:r>
-              <a:t>Sem duplicidade</a:t>
+              <a:t>Autorização</a:t>
             </a:r>
           </a:p>
         </p:txBody>
@@ -12453,7 +16458,7 @@
               </a:defRPr>
             </a:pPr>
             <a:r>
-              <a:t>Uma identificação por</a:t>
+              <a:t>Aluno e empresa mantêm</a:t>
             </a:r>
           </a:p>
           <a:p>
@@ -12472,7 +16477,7 @@
               </a:defRPr>
             </a:pPr>
             <a:r>
-              <a:t>comando evita repetir o</a:t>
+              <a:t>apenas seu próprio</a:t>
             </a:r>
           </a:p>
           <a:p>
@@ -12491,7 +16496,7 @@
               </a:defRPr>
             </a:pPr>
             <a:r>
-              <a:t>débito ao reenviar a</a:t>
+              <a:t>cadastro. Professor</a:t>
             </a:r>
           </a:p>
           <a:p>
@@ -12510,7 +16515,7 @@
               </a:defRPr>
             </a:pPr>
             <a:r>
-              <a:t>operação.</a:t>
+              <a:t>reconhece alunos.</a:t>
             </a:r>
           </a:p>
         </p:txBody>
@@ -12595,7 +16600,7 @@
               </a:defRPr>
             </a:pPr>
             <a:r>
-              <a:t>Histórico preservado</a:t>
+              <a:t>Validação</a:t>
             </a:r>
           </a:p>
         </p:txBody>
@@ -12637,7 +16642,7 @@
               </a:defRPr>
             </a:pPr>
             <a:r>
-              <a:t>Inativação conserva</a:t>
+              <a:t>DTOs e Bean Validation.</a:t>
             </a:r>
           </a:p>
           <a:p>
@@ -12656,7 +16661,7 @@
               </a:defRPr>
             </a:pPr>
             <a:r>
-              <a:t>cadastros e</a:t>
+              <a:t>Entidades e hashes de</a:t>
             </a:r>
           </a:p>
           <a:p>
@@ -12675,7 +16680,7 @@
               </a:defRPr>
             </a:pPr>
             <a:r>
-              <a:t>movimentações já</a:t>
+              <a:t>senha não são expostos</a:t>
             </a:r>
           </a:p>
           <a:p>
@@ -12694,7 +16699,7 @@
               </a:defRPr>
             </a:pPr>
             <a:r>
-              <a:t>realizadas.</a:t>
+              <a:t>pela API.</a:t>
             </a:r>
           </a:p>
         </p:txBody>
@@ -12840,7 +16845,7 @@
               </a:defRPr>
             </a:pPr>
             <a:r>
-              <a:t>ACESSO E SEGURANÇA</a:t>
+              <a:t>EMAILS E CUPONS</a:t>
             </a:r>
           </a:p>
         </p:txBody>
@@ -12882,7 +16887,7 @@
               </a:defRPr>
             </a:pPr>
             <a:r>
-              <a:t>Cada perfil acessa suas funções</a:t>
+              <a:t>O resgate chega às duas partes</a:t>
             </a:r>
           </a:p>
         </p:txBody>
@@ -12924,7 +16929,7 @@
               </a:defRPr>
             </a:pPr>
             <a:r>
-              <a:t>Autorização no backend acompanha a navegação da interface.</a:t>
+              <a:t>Aluno e empresa recebem o mesmo código de cupom.</a:t>
             </a:r>
           </a:p>
         </p:txBody>
@@ -13064,8 +17069,8 @@
         </p:nvSpPr>
         <p:spPr>
           <a:xfrm>
-            <a:off x="508000" y="2438400"/>
-            <a:ext cx="3589866" cy="3048000"/>
+            <a:off x="508000" y="2286000"/>
+            <a:ext cx="11176000" cy="1028700"/>
           </a:xfrm>
           <a:prstGeom prst="rect">
             <a:avLst/>
@@ -13107,8 +17112,8 @@
         </p:nvSpPr>
         <p:spPr>
           <a:xfrm>
-            <a:off x="762000" y="2667000"/>
-            <a:ext cx="3081866" cy="456438"/>
+            <a:off x="762000" y="2451100"/>
+            <a:ext cx="3302000" cy="440309"/>
           </a:xfrm>
           <a:prstGeom prst="rect">
             <a:avLst/>
@@ -13128,7 +17133,7 @@
               <a:spcAft>
                 <a:spcPts val="0"/>
               </a:spcAft>
-              <a:defRPr sz="2200" b="1">
+              <a:defRPr sz="2100" b="1">
                 <a:solidFill>
                   <a:srgbClr val="56D9B0"/>
                 </a:solidFill>
@@ -13136,7 +17141,7 @@
               </a:defRPr>
             </a:pPr>
             <a:r>
-              <a:t>Autenticação</a:t>
+              <a:t>Resgate confirmado</a:t>
             </a:r>
           </a:p>
         </p:txBody>
@@ -13149,8 +17154,8 @@
         </p:nvSpPr>
         <p:spPr>
           <a:xfrm>
-            <a:off x="762000" y="3327400"/>
-            <a:ext cx="3081866" cy="1327404"/>
+            <a:off x="4445000" y="2463800"/>
+            <a:ext cx="6858000" cy="424180"/>
           </a:xfrm>
           <a:prstGeom prst="rect">
             <a:avLst/>
@@ -13170,7 +17175,7 @@
               <a:spcAft>
                 <a:spcPts val="0"/>
               </a:spcAft>
-              <a:defRPr sz="1900" b="0">
+              <a:defRPr sz="2000" b="0">
                 <a:solidFill>
                   <a:srgbClr val="F4F7FA"/>
                 </a:solidFill>
@@ -13178,64 +17183,7 @@
               </a:defRPr>
             </a:pPr>
             <a:r>
-              <a:t>Senhas com BCrypt.</a:t>
-            </a:r>
-          </a:p>
-          <a:p>
-            <a:pPr>
-              <a:lnSpc>
-                <a:spcPct val="115000"/>
-              </a:lnSpc>
-              <a:spcAft>
-                <a:spcPts val="0"/>
-              </a:spcAft>
-              <a:defRPr sz="1900" b="0">
-                <a:solidFill>
-                  <a:srgbClr val="F4F7FA"/>
-                </a:solidFill>
-                <a:latin typeface="Arial"/>
-              </a:defRPr>
-            </a:pPr>
-            <a:r>
-              <a:t>Sessão com cookie</a:t>
-            </a:r>
-          </a:p>
-          <a:p>
-            <a:pPr>
-              <a:lnSpc>
-                <a:spcPct val="115000"/>
-              </a:lnSpc>
-              <a:spcAft>
-                <a:spcPts val="0"/>
-              </a:spcAft>
-              <a:defRPr sz="1900" b="0">
-                <a:solidFill>
-                  <a:srgbClr val="F4F7FA"/>
-                </a:solidFill>
-                <a:latin typeface="Arial"/>
-              </a:defRPr>
-            </a:pPr>
-            <a:r>
-              <a:t>HttpOnly e proteção</a:t>
-            </a:r>
-          </a:p>
-          <a:p>
-            <a:pPr>
-              <a:lnSpc>
-                <a:spcPct val="115000"/>
-              </a:lnSpc>
-              <a:spcAft>
-                <a:spcPts val="0"/>
-              </a:spcAft>
-              <a:defRPr sz="1900" b="0">
-                <a:solidFill>
-                  <a:srgbClr val="F4F7FA"/>
-                </a:solidFill>
-                <a:latin typeface="Arial"/>
-              </a:defRPr>
-            </a:pPr>
-            <a:r>
-              <a:t>CSRF.</a:t>
+              <a:t>Banco registra débito, cupom e notificações.</a:t>
             </a:r>
           </a:p>
         </p:txBody>
@@ -13248,8 +17196,8 @@
         </p:nvSpPr>
         <p:spPr>
           <a:xfrm>
-            <a:off x="4301066" y="2438400"/>
-            <a:ext cx="3589866" cy="3048000"/>
+            <a:off x="508000" y="3492500"/>
+            <a:ext cx="11176000" cy="1028700"/>
           </a:xfrm>
           <a:prstGeom prst="rect">
             <a:avLst/>
@@ -13291,8 +17239,8 @@
         </p:nvSpPr>
         <p:spPr>
           <a:xfrm>
-            <a:off x="4555066" y="2667000"/>
-            <a:ext cx="3081866" cy="456438"/>
+            <a:off x="762000" y="3657600"/>
+            <a:ext cx="3302000" cy="440309"/>
           </a:xfrm>
           <a:prstGeom prst="rect">
             <a:avLst/>
@@ -13312,7 +17260,7 @@
               <a:spcAft>
                 <a:spcPts val="0"/>
               </a:spcAft>
-              <a:defRPr sz="2200" b="1">
+              <a:defRPr sz="2100" b="1">
                 <a:solidFill>
                   <a:srgbClr val="56D9B0"/>
                 </a:solidFill>
@@ -13320,7 +17268,7 @@
               </a:defRPr>
             </a:pPr>
             <a:r>
-              <a:t>Autorização</a:t>
+              <a:t>Worker de email</a:t>
             </a:r>
           </a:p>
         </p:txBody>
@@ -13333,8 +17281,8 @@
         </p:nvSpPr>
         <p:spPr>
           <a:xfrm>
-            <a:off x="4555066" y="3327400"/>
-            <a:ext cx="3081866" cy="1327404"/>
+            <a:off x="4445000" y="3670300"/>
+            <a:ext cx="6858000" cy="424180"/>
           </a:xfrm>
           <a:prstGeom prst="rect">
             <a:avLst/>
@@ -13354,7 +17302,7 @@
               <a:spcAft>
                 <a:spcPts val="0"/>
               </a:spcAft>
-              <a:defRPr sz="1900" b="0">
+              <a:defRPr sz="2000" b="0">
                 <a:solidFill>
                   <a:srgbClr val="F4F7FA"/>
                 </a:solidFill>
@@ -13362,64 +17310,7 @@
               </a:defRPr>
             </a:pPr>
             <a:r>
-              <a:t>Aluno e empresa mantêm</a:t>
-            </a:r>
-          </a:p>
-          <a:p>
-            <a:pPr>
-              <a:lnSpc>
-                <a:spcPct val="115000"/>
-              </a:lnSpc>
-              <a:spcAft>
-                <a:spcPts val="0"/>
-              </a:spcAft>
-              <a:defRPr sz="1900" b="0">
-                <a:solidFill>
-                  <a:srgbClr val="F4F7FA"/>
-                </a:solidFill>
-                <a:latin typeface="Arial"/>
-              </a:defRPr>
-            </a:pPr>
-            <a:r>
-              <a:t>apenas seu próprio</a:t>
-            </a:r>
-          </a:p>
-          <a:p>
-            <a:pPr>
-              <a:lnSpc>
-                <a:spcPct val="115000"/>
-              </a:lnSpc>
-              <a:spcAft>
-                <a:spcPts val="0"/>
-              </a:spcAft>
-              <a:defRPr sz="1900" b="0">
-                <a:solidFill>
-                  <a:srgbClr val="F4F7FA"/>
-                </a:solidFill>
-                <a:latin typeface="Arial"/>
-              </a:defRPr>
-            </a:pPr>
-            <a:r>
-              <a:t>cadastro. Professor</a:t>
-            </a:r>
-          </a:p>
-          <a:p>
-            <a:pPr>
-              <a:lnSpc>
-                <a:spcPct val="115000"/>
-              </a:lnSpc>
-              <a:spcAft>
-                <a:spcPts val="0"/>
-              </a:spcAft>
-              <a:defRPr sz="1900" b="0">
-                <a:solidFill>
-                  <a:srgbClr val="F4F7FA"/>
-                </a:solidFill>
-                <a:latin typeface="Arial"/>
-              </a:defRPr>
-            </a:pPr>
-            <a:r>
-              <a:t>reconhece alunos.</a:t>
+              <a:t>Processa o envio e tenta novamente após falha.</a:t>
             </a:r>
           </a:p>
         </p:txBody>
@@ -13432,8 +17323,8 @@
         </p:nvSpPr>
         <p:spPr>
           <a:xfrm>
-            <a:off x="8094133" y="2438400"/>
-            <a:ext cx="3589866" cy="3048000"/>
+            <a:off x="508000" y="4699000"/>
+            <a:ext cx="11176000" cy="1028700"/>
           </a:xfrm>
           <a:prstGeom prst="rect">
             <a:avLst/>
@@ -13475,8 +17366,8 @@
         </p:nvSpPr>
         <p:spPr>
           <a:xfrm>
-            <a:off x="8348133" y="2667000"/>
-            <a:ext cx="3081866" cy="456438"/>
+            <a:off x="762000" y="4864100"/>
+            <a:ext cx="3302000" cy="440309"/>
           </a:xfrm>
           <a:prstGeom prst="rect">
             <a:avLst/>
@@ -13496,7 +17387,7 @@
               <a:spcAft>
                 <a:spcPts val="0"/>
               </a:spcAft>
-              <a:defRPr sz="2200" b="1">
+              <a:defRPr sz="2100" b="1">
                 <a:solidFill>
                   <a:srgbClr val="56D9B0"/>
                 </a:solidFill>
@@ -13504,7 +17395,7 @@
               </a:defRPr>
             </a:pPr>
             <a:r>
-              <a:t>Validação</a:t>
+              <a:t>Mailpit local</a:t>
             </a:r>
           </a:p>
         </p:txBody>
@@ -13517,8 +17408,8 @@
         </p:nvSpPr>
         <p:spPr>
           <a:xfrm>
-            <a:off x="8348133" y="3327400"/>
-            <a:ext cx="3081866" cy="1327404"/>
+            <a:off x="4445000" y="4876800"/>
+            <a:ext cx="6858000" cy="424180"/>
           </a:xfrm>
           <a:prstGeom prst="rect">
             <a:avLst/>
@@ -13538,7 +17429,7 @@
               <a:spcAft>
                 <a:spcPts val="0"/>
               </a:spcAft>
-              <a:defRPr sz="1900" b="0">
+              <a:defRPr sz="2000" b="0">
                 <a:solidFill>
                   <a:srgbClr val="F4F7FA"/>
                 </a:solidFill>
@@ -13546,64 +17437,7 @@
               </a:defRPr>
             </a:pPr>
             <a:r>
-              <a:t>DTOs e Bean Validation.</a:t>
-            </a:r>
-          </a:p>
-          <a:p>
-            <a:pPr>
-              <a:lnSpc>
-                <a:spcPct val="115000"/>
-              </a:lnSpc>
-              <a:spcAft>
-                <a:spcPts val="0"/>
-              </a:spcAft>
-              <a:defRPr sz="1900" b="0">
-                <a:solidFill>
-                  <a:srgbClr val="F4F7FA"/>
-                </a:solidFill>
-                <a:latin typeface="Arial"/>
-              </a:defRPr>
-            </a:pPr>
-            <a:r>
-              <a:t>Entidades e hashes de</a:t>
-            </a:r>
-          </a:p>
-          <a:p>
-            <a:pPr>
-              <a:lnSpc>
-                <a:spcPct val="115000"/>
-              </a:lnSpc>
-              <a:spcAft>
-                <a:spcPts val="0"/>
-              </a:spcAft>
-              <a:defRPr sz="1900" b="0">
-                <a:solidFill>
-                  <a:srgbClr val="F4F7FA"/>
-                </a:solidFill>
-                <a:latin typeface="Arial"/>
-              </a:defRPr>
-            </a:pPr>
-            <a:r>
-              <a:t>senha não são expostos</a:t>
-            </a:r>
-          </a:p>
-          <a:p>
-            <a:pPr>
-              <a:lnSpc>
-                <a:spcPct val="115000"/>
-              </a:lnSpc>
-              <a:spcAft>
-                <a:spcPts val="0"/>
-              </a:spcAft>
-              <a:defRPr sz="1900" b="0">
-                <a:solidFill>
-                  <a:srgbClr val="F4F7FA"/>
-                </a:solidFill>
-                <a:latin typeface="Arial"/>
-              </a:defRPr>
-            </a:pPr>
-            <a:r>
-              <a:t>pela API.</a:t>
+              <a:t>Captura mensagens em localhost:8025.</a:t>
             </a:r>
           </a:p>
         </p:txBody>
@@ -13749,7 +17583,7 @@
               </a:defRPr>
             </a:pPr>
             <a:r>
-              <a:t>EMAILS E CUPONS</a:t>
+              <a:t>CRUDS DE ALUNO E EMPRESA</a:t>
             </a:r>
           </a:p>
         </p:txBody>
@@ -13791,7 +17625,7 @@
               </a:defRPr>
             </a:pPr>
             <a:r>
-              <a:t>O resgate chega às duas partes</a:t>
+              <a:t>Criar, consultar, editar e inativar</a:t>
             </a:r>
           </a:p>
         </p:txBody>
@@ -13833,7 +17667,7 @@
               </a:defRPr>
             </a:pPr>
             <a:r>
-              <a:t>Aluno e empresa recebem o mesmo código de cupom.</a:t>
+              <a:t>A mesma estrutura de operações atende aos dois perfis.</a:t>
             </a:r>
           </a:p>
         </p:txBody>
@@ -13973,8 +17807,8 @@
         </p:nvSpPr>
         <p:spPr>
           <a:xfrm>
-            <a:off x="508000" y="2286000"/>
-            <a:ext cx="11176000" cy="1028700"/>
+            <a:off x="508000" y="2438400"/>
+            <a:ext cx="3589866" cy="3175000"/>
           </a:xfrm>
           <a:prstGeom prst="rect">
             <a:avLst/>
@@ -14016,8 +17850,8 @@
         </p:nvSpPr>
         <p:spPr>
           <a:xfrm>
-            <a:off x="762000" y="2451100"/>
-            <a:ext cx="3302000" cy="440309"/>
+            <a:off x="762000" y="2667000"/>
+            <a:ext cx="3081866" cy="456438"/>
           </a:xfrm>
           <a:prstGeom prst="rect">
             <a:avLst/>
@@ -14037,7 +17871,7 @@
               <a:spcAft>
                 <a:spcPts val="0"/>
               </a:spcAft>
-              <a:defRPr sz="2100" b="1">
+              <a:defRPr sz="2200" b="1">
                 <a:solidFill>
                   <a:srgbClr val="56D9B0"/>
                 </a:solidFill>
@@ -14045,7 +17879,7 @@
               </a:defRPr>
             </a:pPr>
             <a:r>
-              <a:t>Resgate confirmado</a:t>
+              <a:t>Cadastro e consulta</a:t>
             </a:r>
           </a:p>
         </p:txBody>
@@ -14058,8 +17892,8 @@
         </p:nvSpPr>
         <p:spPr>
           <a:xfrm>
-            <a:off x="4445000" y="2463800"/>
-            <a:ext cx="6858000" cy="424180"/>
+            <a:off x="762000" y="3327400"/>
+            <a:ext cx="3081866" cy="1020953"/>
           </a:xfrm>
           <a:prstGeom prst="rect">
             <a:avLst/>
@@ -14079,7 +17913,7 @@
               <a:spcAft>
                 <a:spcPts val="0"/>
               </a:spcAft>
-              <a:defRPr sz="2000" b="0">
+              <a:defRPr sz="1900" b="0">
                 <a:solidFill>
                   <a:srgbClr val="F4F7FA"/>
                 </a:solidFill>
@@ -14087,7 +17921,45 @@
               </a:defRPr>
             </a:pPr>
             <a:r>
-              <a:t>Banco registra débito, cupom e notificações.</a:t>
+              <a:t>POST cria o cadastro.</a:t>
+            </a:r>
+          </a:p>
+          <a:p>
+            <a:pPr>
+              <a:lnSpc>
+                <a:spcPct val="115000"/>
+              </a:lnSpc>
+              <a:spcAft>
+                <a:spcPts val="0"/>
+              </a:spcAft>
+              <a:defRPr sz="1900" b="0">
+                <a:solidFill>
+                  <a:srgbClr val="F4F7FA"/>
+                </a:solidFill>
+                <a:latin typeface="Arial"/>
+              </a:defRPr>
+            </a:pPr>
+            <a:r>
+              <a:t>GET consulta os dados do</a:t>
+            </a:r>
+          </a:p>
+          <a:p>
+            <a:pPr>
+              <a:lnSpc>
+                <a:spcPct val="115000"/>
+              </a:lnSpc>
+              <a:spcAft>
+                <a:spcPts val="0"/>
+              </a:spcAft>
+              <a:defRPr sz="1900" b="0">
+                <a:solidFill>
+                  <a:srgbClr val="F4F7FA"/>
+                </a:solidFill>
+                <a:latin typeface="Arial"/>
+              </a:defRPr>
+            </a:pPr>
+            <a:r>
+              <a:t>titular autenticado.</a:t>
             </a:r>
           </a:p>
         </p:txBody>
@@ -14100,8 +17972,8 @@
         </p:nvSpPr>
         <p:spPr>
           <a:xfrm>
-            <a:off x="508000" y="3492500"/>
-            <a:ext cx="11176000" cy="1028700"/>
+            <a:off x="4301066" y="2438400"/>
+            <a:ext cx="3589866" cy="3175000"/>
           </a:xfrm>
           <a:prstGeom prst="rect">
             <a:avLst/>
@@ -14143,8 +18015,8 @@
         </p:nvSpPr>
         <p:spPr>
           <a:xfrm>
-            <a:off x="762000" y="3657600"/>
-            <a:ext cx="3302000" cy="440309"/>
+            <a:off x="4555066" y="2667000"/>
+            <a:ext cx="3081866" cy="456438"/>
           </a:xfrm>
           <a:prstGeom prst="rect">
             <a:avLst/>
@@ -14164,7 +18036,7 @@
               <a:spcAft>
                 <a:spcPts val="0"/>
               </a:spcAft>
-              <a:defRPr sz="2100" b="1">
+              <a:defRPr sz="2200" b="1">
                 <a:solidFill>
                   <a:srgbClr val="56D9B0"/>
                 </a:solidFill>
@@ -14172,7 +18044,7 @@
               </a:defRPr>
             </a:pPr>
             <a:r>
-              <a:t>Worker de email</a:t>
+              <a:t>Atualização</a:t>
             </a:r>
           </a:p>
         </p:txBody>
@@ -14185,8 +18057,8 @@
         </p:nvSpPr>
         <p:spPr>
           <a:xfrm>
-            <a:off x="4445000" y="3670300"/>
-            <a:ext cx="6858000" cy="424180"/>
+            <a:off x="4555066" y="3327400"/>
+            <a:ext cx="3081866" cy="1327404"/>
           </a:xfrm>
           <a:prstGeom prst="rect">
             <a:avLst/>
@@ -14206,7 +18078,7 @@
               <a:spcAft>
                 <a:spcPts val="0"/>
               </a:spcAft>
-              <a:defRPr sz="2000" b="0">
+              <a:defRPr sz="1900" b="0">
                 <a:solidFill>
                   <a:srgbClr val="F4F7FA"/>
                 </a:solidFill>
@@ -14214,7 +18086,64 @@
               </a:defRPr>
             </a:pPr>
             <a:r>
-              <a:t>Processa o envio e tenta novamente após falha.</a:t>
+              <a:t>PUT altera os dados.</a:t>
+            </a:r>
+          </a:p>
+          <a:p>
+            <a:pPr>
+              <a:lnSpc>
+                <a:spcPct val="115000"/>
+              </a:lnSpc>
+              <a:spcAft>
+                <a:spcPts val="0"/>
+              </a:spcAft>
+              <a:defRPr sz="1900" b="0">
+                <a:solidFill>
+                  <a:srgbClr val="F4F7FA"/>
+                </a:solidFill>
+                <a:latin typeface="Arial"/>
+              </a:defRPr>
+            </a:pPr>
+            <a:r>
+              <a:t>A empresa mantém nome e</a:t>
+            </a:r>
+          </a:p>
+          <a:p>
+            <a:pPr>
+              <a:lnSpc>
+                <a:spcPct val="115000"/>
+              </a:lnSpc>
+              <a:spcAft>
+                <a:spcPts val="0"/>
+              </a:spcAft>
+              <a:defRPr sz="1900" b="0">
+                <a:solidFill>
+                  <a:srgbClr val="F4F7FA"/>
+                </a:solidFill>
+                <a:latin typeface="Arial"/>
+              </a:defRPr>
+            </a:pPr>
+            <a:r>
+              <a:t>email; o aluno mantém</a:t>
+            </a:r>
+          </a:p>
+          <a:p>
+            <a:pPr>
+              <a:lnSpc>
+                <a:spcPct val="115000"/>
+              </a:lnSpc>
+              <a:spcAft>
+                <a:spcPts val="0"/>
+              </a:spcAft>
+              <a:defRPr sz="1900" b="0">
+                <a:solidFill>
+                  <a:srgbClr val="F4F7FA"/>
+                </a:solidFill>
+                <a:latin typeface="Arial"/>
+              </a:defRPr>
+            </a:pPr>
+            <a:r>
+              <a:t>seus dados acadêmicos.</a:t>
             </a:r>
           </a:p>
         </p:txBody>
@@ -14227,8 +18156,8 @@
         </p:nvSpPr>
         <p:spPr>
           <a:xfrm>
-            <a:off x="508000" y="4699000"/>
-            <a:ext cx="11176000" cy="1028700"/>
+            <a:off x="8094133" y="2438400"/>
+            <a:ext cx="3589866" cy="3175000"/>
           </a:xfrm>
           <a:prstGeom prst="rect">
             <a:avLst/>
@@ -14270,8 +18199,8 @@
         </p:nvSpPr>
         <p:spPr>
           <a:xfrm>
-            <a:off x="762000" y="4864100"/>
-            <a:ext cx="3302000" cy="440309"/>
+            <a:off x="8348133" y="2667000"/>
+            <a:ext cx="3081866" cy="456438"/>
           </a:xfrm>
           <a:prstGeom prst="rect">
             <a:avLst/>
@@ -14291,7 +18220,7 @@
               <a:spcAft>
                 <a:spcPts val="0"/>
               </a:spcAft>
-              <a:defRPr sz="2100" b="1">
+              <a:defRPr sz="2200" b="1">
                 <a:solidFill>
                   <a:srgbClr val="56D9B0"/>
                 </a:solidFill>
@@ -14299,7 +18228,7 @@
               </a:defRPr>
             </a:pPr>
             <a:r>
-              <a:t>Mailpit local</a:t>
+              <a:t>Inativação</a:t>
             </a:r>
           </a:p>
         </p:txBody>
@@ -14312,8 +18241,8 @@
         </p:nvSpPr>
         <p:spPr>
           <a:xfrm>
-            <a:off x="4445000" y="4876800"/>
-            <a:ext cx="6858000" cy="424180"/>
+            <a:off x="8348133" y="3327400"/>
+            <a:ext cx="3081866" cy="1633855"/>
           </a:xfrm>
           <a:prstGeom prst="rect">
             <a:avLst/>
@@ -14333,7 +18262,7 @@
               <a:spcAft>
                 <a:spcPts val="0"/>
               </a:spcAft>
-              <a:defRPr sz="2000" b="0">
+              <a:defRPr sz="1900" b="0">
                 <a:solidFill>
                   <a:srgbClr val="F4F7FA"/>
                 </a:solidFill>
@@ -14341,7 +18270,83 @@
               </a:defRPr>
             </a:pPr>
             <a:r>
-              <a:t>Captura mensagens em localhost:8025.</a:t>
+              <a:t>DELETE inativa o</a:t>
+            </a:r>
+          </a:p>
+          <a:p>
+            <a:pPr>
+              <a:lnSpc>
+                <a:spcPct val="115000"/>
+              </a:lnSpc>
+              <a:spcAft>
+                <a:spcPts val="0"/>
+              </a:spcAft>
+              <a:defRPr sz="1900" b="0">
+                <a:solidFill>
+                  <a:srgbClr val="F4F7FA"/>
+                </a:solidFill>
+                <a:latin typeface="Arial"/>
+              </a:defRPr>
+            </a:pPr>
+            <a:r>
+              <a:t>cadastro e encerra a</a:t>
+            </a:r>
+          </a:p>
+          <a:p>
+            <a:pPr>
+              <a:lnSpc>
+                <a:spcPct val="115000"/>
+              </a:lnSpc>
+              <a:spcAft>
+                <a:spcPts val="0"/>
+              </a:spcAft>
+              <a:defRPr sz="1900" b="0">
+                <a:solidFill>
+                  <a:srgbClr val="F4F7FA"/>
+                </a:solidFill>
+                <a:latin typeface="Arial"/>
+              </a:defRPr>
+            </a:pPr>
+            <a:r>
+              <a:t>sessão.</a:t>
+            </a:r>
+          </a:p>
+          <a:p>
+            <a:pPr>
+              <a:lnSpc>
+                <a:spcPct val="115000"/>
+              </a:lnSpc>
+              <a:spcAft>
+                <a:spcPts val="0"/>
+              </a:spcAft>
+              <a:defRPr sz="1900" b="0">
+                <a:solidFill>
+                  <a:srgbClr val="F4F7FA"/>
+                </a:solidFill>
+                <a:latin typeface="Arial"/>
+              </a:defRPr>
+            </a:pPr>
+            <a:r>
+              <a:t>O histórico é</a:t>
+            </a:r>
+          </a:p>
+          <a:p>
+            <a:pPr>
+              <a:lnSpc>
+                <a:spcPct val="115000"/>
+              </a:lnSpc>
+              <a:spcAft>
+                <a:spcPts val="0"/>
+              </a:spcAft>
+              <a:defRPr sz="1900" b="0">
+                <a:solidFill>
+                  <a:srgbClr val="F4F7FA"/>
+                </a:solidFill>
+                <a:latin typeface="Arial"/>
+              </a:defRPr>
+            </a:pPr>
+            <a:r>
+              <a:t>conservado.</a:t>
             </a:r>
           </a:p>
         </p:txBody>
